--- a/GroupMeeting&CourseSlide/Slide/SNNTrainingSlideNotes/Week4_SNN Training.pptx
+++ b/GroupMeeting&CourseSlide/Slide/SNNTrainingSlideNotes/Week4_SNN Training.pptx
@@ -1097,143 +1097,33 @@
         <p:cNvGrpSpPr/>
         <p:nvPr/>
       </p:nvGrpSpPr>
-      <p:grpSpPr>
-        <a:xfrm>
-          <a:off x="0" y="0"/>
-          <a:ext cx="0" cy="0"/>
-          <a:chOff x="0" y="0"/>
-          <a:chExt cx="0" cy="0"/>
-        </a:xfrm>
-      </p:grpSpPr>
-      <p:sp>
-        <p:nvSpPr>
-          <p:cNvPr id="2" name="Slide Image Placeholder 1"/>
-          <p:cNvSpPr>
-            <a:spLocks noGrp="1" noRot="1" noChangeAspect="1"/>
-          </p:cNvSpPr>
-          <p:nvPr>
-            <p:ph type="sldImg"/>
+      <p:grpSpPr/>
+      <p:sp>
+        <p:nvSpPr>
+          <p:cNvPr id="2" name="幻灯片图像占位符 1"/>
+          <p:cNvSpPr>
+            <a:spLocks noGrp="1"/>
+          </p:cNvSpPr>
+          <p:nvPr>
+            <p:ph type="sldImg" idx="2"/>
           </p:nvPr>
         </p:nvSpPr>
         <p:spPr/>
       </p:sp>
       <p:sp>
         <p:nvSpPr>
-          <p:cNvPr id="3" name="Notes Placeholder 2"/>
-          <p:cNvSpPr>
-            <a:spLocks noGrp="1"/>
-          </p:cNvSpPr>
-          <p:nvPr>
-            <p:ph type="body" idx="1"/>
+          <p:cNvPr id="3" name="文本占位符 2"/>
+          <p:cNvSpPr>
+            <a:spLocks noGrp="1"/>
+          </p:cNvSpPr>
+          <p:nvPr>
+            <p:ph type="body" idx="3"/>
           </p:nvPr>
         </p:nvSpPr>
         <p:spPr/>
         <p:txBody>
           <a:bodyPr/>
-          <a:lstStyle/>
-          <a:p>
-            <a:r>
-              <a:rPr lang="en-US" dirty="0"/>
-              <a:t>To compute gradients:</a:t>
-            </a:r>
-            <a:endParaRPr lang="en-US" dirty="0"/>
-          </a:p>
-          <a:p>
-            <a:r>
-              <a:rPr lang="en-US" dirty="0"/>
-              <a:t>✓ Store membrane potentials</a:t>
-            </a:r>
-            <a:endParaRPr lang="en-US" dirty="0"/>
-          </a:p>
-          <a:p>
-            <a:r>
-              <a:rPr lang="en-US" dirty="0"/>
-              <a:t>✓ Store spikes</a:t>
-            </a:r>
-            <a:endParaRPr lang="en-US" dirty="0"/>
-          </a:p>
-          <a:p>
-            <a:r>
-              <a:rPr lang="en-US" dirty="0"/>
-              <a:t>✓ Store computation graph</a:t>
-            </a:r>
-            <a:endParaRPr lang="en-US" dirty="0"/>
-          </a:p>
-          <a:p>
-            <a:r>
-              <a:rPr lang="en-US" dirty="0"/>
-              <a:t>for every timestep.</a:t>
-            </a:r>
-            <a:endParaRPr lang="en-US" dirty="0"/>
-          </a:p>
-          <a:p>
-            <a:endParaRPr lang="en-US" dirty="0"/>
-          </a:p>
-          <a:p>
-            <a:r>
-              <a:rPr lang="en-US" dirty="0"/>
-              <a:t>Temporal dependencies are coupled across all timesteps.</a:t>
-            </a:r>
-            <a:br>
-              <a:rPr lang="en-US" dirty="0"/>
-            </a:br>
-            <a:r>
-              <a:rPr lang="en-US" dirty="0"/>
-              <a:t>may cause:</a:t>
-            </a:r>
-            <a:endParaRPr lang="en-US" dirty="0"/>
-          </a:p>
-          <a:p>
-            <a:pPr>
-              <a:buFont typeface="Arial" panose="020B0604020202020204" pitchFamily="34" charset="0"/>
-              <a:buChar char="•"/>
-            </a:pPr>
-            <a:r>
-              <a:rPr lang="en-US" dirty="0"/>
-              <a:t>vanishing gradients </a:t>
-            </a:r>
-            <a:endParaRPr lang="en-US" dirty="0"/>
-          </a:p>
-          <a:p>
-            <a:pPr>
-              <a:buFont typeface="Arial" panose="020B0604020202020204" pitchFamily="34" charset="0"/>
-              <a:buChar char="•"/>
-            </a:pPr>
-            <a:r>
-              <a:rPr lang="en-US" dirty="0"/>
-              <a:t>exploding gradients</a:t>
-            </a:r>
-            <a:endParaRPr lang="en-US" dirty="0"/>
-          </a:p>
-          <a:p>
-            <a:endParaRPr lang="en-US" dirty="0"/>
-          </a:p>
-          <a:p>
-            <a:endParaRPr lang="en-US" dirty="0"/>
-          </a:p>
-          <a:p>
-            <a:endParaRPr lang="en-US" dirty="0"/>
-          </a:p>
-        </p:txBody>
-      </p:sp>
-      <p:sp>
-        <p:nvSpPr>
-          <p:cNvPr id="4" name="Slide Number Placeholder 3"/>
-          <p:cNvSpPr>
-            <a:spLocks noGrp="1"/>
-          </p:cNvSpPr>
-          <p:nvPr>
-            <p:ph type="sldNum" sz="quarter" idx="5"/>
-          </p:nvPr>
-        </p:nvSpPr>
-        <p:spPr/>
-        <p:txBody>
-          <a:bodyPr/>
-          <a:lstStyle/>
-          <a:p>
-            <a:fld id="{095ECFFD-F771-4A99-B596-9BEE74658088}" type="slidenum">
-              <a:rPr lang="zh-CN" altLang="en-US" smtClean="0"/>
-            </a:fld>
+          <a:p>
             <a:endParaRPr lang="zh-CN" altLang="en-US"/>
           </a:p>
         </p:txBody>
@@ -1292,8 +1182,84 @@
           <a:p>
             <a:r>
               <a:rPr lang="en-US" dirty="0"/>
-              <a:t>Use only local information:</a:t>
-            </a:r>
+              <a:t>To compute gradients:</a:t>
+            </a:r>
+            <a:endParaRPr lang="en-US" dirty="0"/>
+          </a:p>
+          <a:p>
+            <a:r>
+              <a:rPr lang="en-US" dirty="0"/>
+              <a:t>✓ Store membrane potentials</a:t>
+            </a:r>
+            <a:endParaRPr lang="en-US" dirty="0"/>
+          </a:p>
+          <a:p>
+            <a:r>
+              <a:rPr lang="en-US" dirty="0"/>
+              <a:t>✓ Store spikes</a:t>
+            </a:r>
+            <a:endParaRPr lang="en-US" dirty="0"/>
+          </a:p>
+          <a:p>
+            <a:r>
+              <a:rPr lang="en-US" dirty="0"/>
+              <a:t>✓ Store computation graph</a:t>
+            </a:r>
+            <a:endParaRPr lang="en-US" dirty="0"/>
+          </a:p>
+          <a:p>
+            <a:r>
+              <a:rPr lang="en-US" dirty="0"/>
+              <a:t>for every timestep.</a:t>
+            </a:r>
+            <a:endParaRPr lang="en-US" dirty="0"/>
+          </a:p>
+          <a:p>
+            <a:endParaRPr lang="en-US" dirty="0"/>
+          </a:p>
+          <a:p>
+            <a:r>
+              <a:rPr lang="en-US" dirty="0"/>
+              <a:t>Temporal dependencies are coupled across all timesteps.</a:t>
+            </a:r>
+            <a:br>
+              <a:rPr lang="en-US" dirty="0"/>
+            </a:br>
+            <a:r>
+              <a:rPr lang="en-US" dirty="0"/>
+              <a:t>may cause:</a:t>
+            </a:r>
+            <a:endParaRPr lang="en-US" dirty="0"/>
+          </a:p>
+          <a:p>
+            <a:pPr>
+              <a:buFont typeface="Arial" panose="020B0604020202020204" pitchFamily="34" charset="0"/>
+              <a:buChar char="•"/>
+            </a:pPr>
+            <a:r>
+              <a:rPr lang="en-US" dirty="0"/>
+              <a:t>vanishing gradients </a:t>
+            </a:r>
+            <a:endParaRPr lang="en-US" dirty="0"/>
+          </a:p>
+          <a:p>
+            <a:pPr>
+              <a:buFont typeface="Arial" panose="020B0604020202020204" pitchFamily="34" charset="0"/>
+              <a:buChar char="•"/>
+            </a:pPr>
+            <a:r>
+              <a:rPr lang="en-US" dirty="0"/>
+              <a:t>exploding gradients</a:t>
+            </a:r>
+            <a:endParaRPr lang="en-US" dirty="0"/>
+          </a:p>
+          <a:p>
+            <a:endParaRPr lang="en-US" dirty="0"/>
+          </a:p>
+          <a:p>
+            <a:endParaRPr lang="en-US" dirty="0"/>
+          </a:p>
+          <a:p>
             <a:endParaRPr lang="en-US" dirty="0"/>
           </a:p>
         </p:txBody>
@@ -1374,7 +1340,7 @@
           <a:p>
             <a:r>
               <a:rPr lang="en-US" dirty="0"/>
-              <a:t>BPTT remembers every timestep and computes gradients later; Online Learning summarizes the past into an eligibility trace and updates weights immediately.</a:t>
+              <a:t>Use only local information:</a:t>
             </a:r>
             <a:endParaRPr lang="en-US" dirty="0"/>
           </a:p>
@@ -1411,6 +1377,88 @@
 </file>
 
 <file path=ppt/notesSlides/notesSlide8.xml><?xml version="1.0" encoding="utf-8"?>
+<p:notes xmlns:a="http://schemas.openxmlformats.org/drawingml/2006/main" xmlns:r="http://schemas.openxmlformats.org/officeDocument/2006/relationships" xmlns:p="http://schemas.openxmlformats.org/presentationml/2006/main">
+  <p:cSld>
+    <p:spTree>
+      <p:nvGrpSpPr>
+        <p:cNvPr id="1" name=""/>
+        <p:cNvGrpSpPr/>
+        <p:nvPr/>
+      </p:nvGrpSpPr>
+      <p:grpSpPr>
+        <a:xfrm>
+          <a:off x="0" y="0"/>
+          <a:ext cx="0" cy="0"/>
+          <a:chOff x="0" y="0"/>
+          <a:chExt cx="0" cy="0"/>
+        </a:xfrm>
+      </p:grpSpPr>
+      <p:sp>
+        <p:nvSpPr>
+          <p:cNvPr id="2" name="Slide Image Placeholder 1"/>
+          <p:cNvSpPr>
+            <a:spLocks noGrp="1" noRot="1" noChangeAspect="1"/>
+          </p:cNvSpPr>
+          <p:nvPr>
+            <p:ph type="sldImg"/>
+          </p:nvPr>
+        </p:nvSpPr>
+        <p:spPr/>
+      </p:sp>
+      <p:sp>
+        <p:nvSpPr>
+          <p:cNvPr id="3" name="Notes Placeholder 2"/>
+          <p:cNvSpPr>
+            <a:spLocks noGrp="1"/>
+          </p:cNvSpPr>
+          <p:nvPr>
+            <p:ph type="body" idx="1"/>
+          </p:nvPr>
+        </p:nvSpPr>
+        <p:spPr/>
+        <p:txBody>
+          <a:bodyPr/>
+          <a:lstStyle/>
+          <a:p>
+            <a:r>
+              <a:rPr lang="en-US" dirty="0"/>
+              <a:t>BPTT remembers every timestep and computes gradients later; Online Learning summarizes the past into an eligibility trace and updates weights immediately.</a:t>
+            </a:r>
+            <a:endParaRPr lang="en-US" dirty="0"/>
+          </a:p>
+        </p:txBody>
+      </p:sp>
+      <p:sp>
+        <p:nvSpPr>
+          <p:cNvPr id="4" name="Slide Number Placeholder 3"/>
+          <p:cNvSpPr>
+            <a:spLocks noGrp="1"/>
+          </p:cNvSpPr>
+          <p:nvPr>
+            <p:ph type="sldNum" sz="quarter" idx="5"/>
+          </p:nvPr>
+        </p:nvSpPr>
+        <p:spPr/>
+        <p:txBody>
+          <a:bodyPr/>
+          <a:lstStyle/>
+          <a:p>
+            <a:fld id="{095ECFFD-F771-4A99-B596-9BEE74658088}" type="slidenum">
+              <a:rPr lang="zh-CN" altLang="en-US" smtClean="0"/>
+            </a:fld>
+            <a:endParaRPr lang="zh-CN" altLang="en-US"/>
+          </a:p>
+        </p:txBody>
+      </p:sp>
+    </p:spTree>
+  </p:cSld>
+  <p:clrMapOvr>
+    <a:masterClrMapping/>
+  </p:clrMapOvr>
+</p:notes>
+</file>
+
+<file path=ppt/notesSlides/notesSlide9.xml><?xml version="1.0" encoding="utf-8"?>
 <p:notes xmlns:a="http://schemas.openxmlformats.org/drawingml/2006/main" xmlns:r="http://schemas.openxmlformats.org/officeDocument/2006/relationships" xmlns:p="http://schemas.openxmlformats.org/presentationml/2006/main">
   <p:cSld>
     <p:spTree>
@@ -7695,25 +7743,616 @@
           </a:p>
         </p:txBody>
       </p:sp>
-      <p:sp>
-        <p:nvSpPr>
-          <p:cNvPr id="3" name="Content Placeholder 2"/>
-          <p:cNvSpPr>
-            <a:spLocks noGrp="1"/>
-          </p:cNvSpPr>
-          <p:nvPr>
-            <p:ph idx="1"/>
-          </p:nvPr>
-        </p:nvSpPr>
-        <p:spPr/>
-        <p:txBody>
-          <a:bodyPr/>
-          <a:lstStyle/>
-          <a:p>
-            <a:endParaRPr lang="en-US"/>
-          </a:p>
-        </p:txBody>
-      </p:sp>
+      <mc:AlternateContent xmlns:mc="http://schemas.openxmlformats.org/markup-compatibility/2006">
+        <mc:Choice xmlns:a14="http://schemas.microsoft.com/office/drawing/2010/main" Requires="a14">
+          <p:sp>
+            <p:nvSpPr>
+              <p:cNvPr id="3" name="Content Placeholder 2"/>
+              <p:cNvSpPr>
+                <a:spLocks noGrp="1"/>
+              </p:cNvSpPr>
+              <p:nvPr>
+                <p:ph idx="1"/>
+              </p:nvPr>
+            </p:nvSpPr>
+            <p:spPr/>
+            <p:txBody>
+              <a:bodyPr>
+                <a:normAutofit lnSpcReduction="10000"/>
+              </a:bodyPr>
+              <a:lstStyle/>
+              <a:p>
+                <a:r>
+                  <a:rPr lang="en-US" altLang="zh-CN" b="1"/>
+                  <a:t>The Bottleneck of BPTT</a:t>
+                </a:r>
+                <a:r>
+                  <a:rPr lang="zh-CN" altLang="en-US" b="1"/>
+                  <a:t>：</a:t>
+                </a:r>
+                <a:endParaRPr lang="zh-CN" altLang="en-US" b="1"/>
+              </a:p>
+              <a:p>
+                <a:pPr lvl="1"/>
+                <a:r>
+                  <a:rPr lang="en-US" altLang="zh-CN"/>
+                  <a:t>Unrolls the computational graph over </a:t>
+                </a:r>
+                <a14:m>
+                  <m:oMath xmlns:m="http://schemas.openxmlformats.org/officeDocument/2006/math">
+                    <m:r>
+                      <a:rPr lang="en-US" i="1" dirty="0" smtClean="0">
+                        <a:latin typeface="Cambria Math" panose="02040503050406030204" pitchFamily="18" charset="0"/>
+                      </a:rPr>
+                      <m:t>𝑇</m:t>
+                    </m:r>
+                  </m:oMath>
+                </a14:m>
+                <a:r>
+                  <a:rPr lang="en-US" altLang="zh-CN"/>
+                  <a:t> time steps.</a:t>
+                </a:r>
+                <a:endParaRPr lang="en-US" altLang="zh-CN"/>
+              </a:p>
+              <a:p>
+                <a:pPr lvl="1"/>
+                <a:r>
+                  <a:rPr lang="en-US" altLang="zh-CN"/>
+                  <a:t>Memory complexity: </a:t>
+                </a:r>
+                <a14:m>
+                  <m:oMath xmlns:m="http://schemas.openxmlformats.org/officeDocument/2006/math">
+                    <m:r>
+                      <a:rPr lang="en-US" i="1" dirty="0" smtClean="0">
+                        <a:latin typeface="Cambria Math" panose="02040503050406030204" pitchFamily="18" charset="0"/>
+                      </a:rPr>
+                      <m:t>𝑂</m:t>
+                    </m:r>
+                    <m:r>
+                      <a:rPr lang="en-US" i="1" dirty="0" smtClean="0">
+                        <a:latin typeface="Cambria Math" panose="02040503050406030204" pitchFamily="18" charset="0"/>
+                      </a:rPr>
+                      <m:t>(</m:t>
+                    </m:r>
+                    <m:r>
+                      <a:rPr lang="en-US" i="1" dirty="0" smtClean="0">
+                        <a:latin typeface="Cambria Math" panose="02040503050406030204" pitchFamily="18" charset="0"/>
+                      </a:rPr>
+                      <m:t>𝑇</m:t>
+                    </m:r>
+                    <m:r>
+                      <a:rPr lang="en-US" i="1" dirty="0" smtClean="0">
+                        <a:latin typeface="Cambria Math" panose="02040503050406030204" pitchFamily="18" charset="0"/>
+                        <a:cs typeface="Cambria Math" panose="02040503050406030204" pitchFamily="18" charset="0"/>
+                      </a:rPr>
+                      <m:t>×</m:t>
+                    </m:r>
+                    <m:r>
+                      <a:rPr lang="en-US" i="1" dirty="0" smtClean="0">
+                        <a:latin typeface="Cambria Math" panose="02040503050406030204" pitchFamily="18" charset="0"/>
+                        <a:cs typeface="Cambria Math" panose="02040503050406030204" pitchFamily="18" charset="0"/>
+                      </a:rPr>
+                      <m:t>𝑛</m:t>
+                    </m:r>
+                    <m:r>
+                      <a:rPr lang="en-US" i="1" dirty="0" smtClean="0">
+                        <a:latin typeface="Cambria Math" panose="02040503050406030204" pitchFamily="18" charset="0"/>
+                      </a:rPr>
+                      <m:t>)</m:t>
+                    </m:r>
+                  </m:oMath>
+                </a14:m>
+                <a:r>
+                  <a:rPr lang="en-US" altLang="zh-CN"/>
+                  <a:t> (stores all states).</a:t>
+                </a:r>
+                <a:endParaRPr lang="en-US" altLang="zh-CN"/>
+              </a:p>
+              <a:p>
+                <a:pPr lvl="1"/>
+                <a:r>
+                  <a:rPr lang="en-US" altLang="zh-CN"/>
+                  <a:t>Prevents online / on-device learning.</a:t>
+                </a:r>
+                <a:endParaRPr lang="en-US" altLang="zh-CN"/>
+              </a:p>
+              <a:p>
+                <a:pPr marL="228600" lvl="1" algn="l">
+                  <a:spcBef>
+                    <a:spcPts val="1000"/>
+                  </a:spcBef>
+                  <a:buClrTx/>
+                  <a:buSzTx/>
+                </a:pPr>
+                <a:r>
+                  <a:rPr lang="en-US" altLang="zh-CN" sz="2800" b="1"/>
+                  <a:t>Core Idea of Eligibility Trace:</a:t>
+                </a:r>
+                <a:endParaRPr lang="en-US" altLang="zh-CN" sz="2800" b="1"/>
+              </a:p>
+              <a:p>
+                <a:pPr lvl="2" algn="l">
+                  <a:spcBef>
+                    <a:spcPts val="1000"/>
+                  </a:spcBef>
+                  <a:buClrTx/>
+                  <a:buSzTx/>
+                </a:pPr>
+                <a:r>
+                  <a:rPr lang="en-US" altLang="zh-CN" sz="2400"/>
+                  <a:t>Replace historical memory with a recursive state.</a:t>
+                </a:r>
+                <a:endParaRPr lang="en-US" altLang="zh-CN" sz="2400"/>
+              </a:p>
+              <a:p>
+                <a:pPr lvl="2" algn="l">
+                  <a:spcBef>
+                    <a:spcPts val="1000"/>
+                  </a:spcBef>
+                  <a:buClrTx/>
+                  <a:buSzTx/>
+                </a:pPr>
+                <a:r>
+                  <a:rPr lang="en-US" altLang="zh-CN" sz="2400"/>
+                  <a:t>Accumulates past effects into a local ”trace” </a:t>
+                </a:r>
+                <a14:m>
+                  <m:oMath xmlns:m="http://schemas.openxmlformats.org/officeDocument/2006/math">
+                    <m:sSubSup>
+                      <m:sSubSupPr>
+                        <m:ctrlPr>
+                          <a:rPr lang="en-US" sz="2400" i="1" dirty="0" smtClean="0">
+                            <a:latin typeface="Cambria Math" panose="02040503050406030204" pitchFamily="18" charset="0"/>
+                            <a:cs typeface="Cambria Math" panose="02040503050406030204" pitchFamily="18" charset="0"/>
+                          </a:rPr>
+                        </m:ctrlPr>
+                      </m:sSubSupPr>
+                      <m:e>
+                        <m:r>
+                          <a:rPr lang="en-US" sz="2400" i="1" dirty="0" smtClean="0">
+                            <a:latin typeface="Cambria Math" panose="02040503050406030204" pitchFamily="18" charset="0"/>
+                            <a:cs typeface="Cambria Math" panose="02040503050406030204" pitchFamily="18" charset="0"/>
+                          </a:rPr>
+                          <m:t>𝑒</m:t>
+                        </m:r>
+                      </m:e>
+                      <m:sub>
+                        <m:r>
+                          <a:rPr lang="en-US" sz="2400" i="1" dirty="0" smtClean="0">
+                            <a:latin typeface="Cambria Math" panose="02040503050406030204" pitchFamily="18" charset="0"/>
+                            <a:cs typeface="Cambria Math" panose="02040503050406030204" pitchFamily="18" charset="0"/>
+                          </a:rPr>
+                          <m:t>𝑗𝑖</m:t>
+                        </m:r>
+                      </m:sub>
+                      <m:sup>
+                        <m:r>
+                          <a:rPr lang="en-US" sz="2400" i="1" dirty="0" smtClean="0">
+                            <a:latin typeface="Cambria Math" panose="02040503050406030204" pitchFamily="18" charset="0"/>
+                            <a:cs typeface="Cambria Math" panose="02040503050406030204" pitchFamily="18" charset="0"/>
+                          </a:rPr>
+                          <m:t>𝑡</m:t>
+                        </m:r>
+                      </m:sup>
+                    </m:sSubSup>
+                  </m:oMath>
+                </a14:m>
+                <a:endParaRPr lang="en-US" altLang="zh-CN" sz="2400"/>
+              </a:p>
+              <a:p>
+                <a:pPr lvl="2" algn="l">
+                  <a:spcBef>
+                    <a:spcPts val="1000"/>
+                  </a:spcBef>
+                  <a:buClrTx/>
+                  <a:buSzTx/>
+                </a:pPr>
+                <a:r>
+                  <a:rPr lang="en-US" altLang="zh-CN" sz="2400"/>
+                  <a:t>Enables forward-in-time gradient computation.</a:t>
+                </a:r>
+                <a:endParaRPr lang="en-US" altLang="zh-CN" sz="2400"/>
+              </a:p>
+              <a:p>
+                <a:pPr lvl="2" algn="l">
+                  <a:spcBef>
+                    <a:spcPts val="1000"/>
+                  </a:spcBef>
+                  <a:buClrTx/>
+                  <a:buSzTx/>
+                </a:pPr>
+                <a14:m>
+                  <m:oMath xmlns:m="http://schemas.openxmlformats.org/officeDocument/2006/math">
+                    <m:r>
+                      <a:rPr lang="en-US" altLang="zh-CN" sz="2400" i="1">
+                        <a:latin typeface="Cambria Math" panose="02040503050406030204" pitchFamily="18" charset="0"/>
+                        <a:ea typeface="MS Mincho" charset="0"/>
+                        <a:cs typeface="Cambria Math" panose="02040503050406030204" pitchFamily="18" charset="0"/>
+                      </a:rPr>
+                      <m:t>𝛥</m:t>
+                    </m:r>
+                    <m:sSub>
+                      <m:sSubPr>
+                        <m:ctrlPr>
+                          <a:rPr lang="en-US" altLang="zh-CN" sz="2400" i="1">
+                            <a:latin typeface="Cambria Math" panose="02040503050406030204" pitchFamily="18" charset="0"/>
+                            <a:cs typeface="Cambria Math" panose="02040503050406030204" pitchFamily="18" charset="0"/>
+                          </a:rPr>
+                        </m:ctrlPr>
+                      </m:sSubPr>
+                      <m:e>
+                        <m:r>
+                          <a:rPr lang="en-US" altLang="zh-CN" sz="2400" i="1">
+                            <a:latin typeface="Cambria Math" panose="02040503050406030204" pitchFamily="18" charset="0"/>
+                            <a:cs typeface="Cambria Math" panose="02040503050406030204" pitchFamily="18" charset="0"/>
+                          </a:rPr>
+                          <m:t>𝑊</m:t>
+                        </m:r>
+                      </m:e>
+                      <m:sub>
+                        <m:r>
+                          <a:rPr lang="en-US" altLang="zh-CN" sz="2400" i="1">
+                            <a:latin typeface="Cambria Math" panose="02040503050406030204" pitchFamily="18" charset="0"/>
+                            <a:cs typeface="Cambria Math" panose="02040503050406030204" pitchFamily="18" charset="0"/>
+                          </a:rPr>
+                          <m:t>𝑗𝑖</m:t>
+                        </m:r>
+                      </m:sub>
+                    </m:sSub>
+                    <m:r>
+                      <a:rPr lang="en-US" altLang="zh-CN" sz="2400" i="1">
+                        <a:latin typeface="Cambria Math" panose="02040503050406030204" pitchFamily="18" charset="0"/>
+                        <a:ea typeface="MS Mincho" charset="0"/>
+                        <a:cs typeface="Cambria Math" panose="02040503050406030204" pitchFamily="18" charset="0"/>
+                      </a:rPr>
+                      <m:t>=</m:t>
+                    </m:r>
+                    <m:nary>
+                      <m:naryPr>
+                        <m:chr m:val="∑"/>
+                        <m:limLoc m:val="subSup"/>
+                        <m:supHide m:val="on"/>
+                        <m:ctrlPr>
+                          <a:rPr lang="en-US" altLang="zh-CN" sz="2400" i="1">
+                            <a:latin typeface="Cambria Math" panose="02040503050406030204" pitchFamily="18" charset="0"/>
+                            <a:cs typeface="Cambria Math" panose="02040503050406030204" pitchFamily="18" charset="0"/>
+                          </a:rPr>
+                        </m:ctrlPr>
+                      </m:naryPr>
+                      <m:sub>
+                        <m:r>
+                          <a:rPr lang="en-US" altLang="zh-CN" sz="2400" i="1">
+                            <a:latin typeface="Cambria Math" panose="02040503050406030204" pitchFamily="18" charset="0"/>
+                            <a:cs typeface="Cambria Math" panose="02040503050406030204" pitchFamily="18" charset="0"/>
+                          </a:rPr>
+                          <m:t>𝑡</m:t>
+                        </m:r>
+                      </m:sub>
+                      <m:sup/>
+                      <m:e>
+                        <m:sSubSup>
+                          <m:sSubSupPr>
+                            <m:ctrlPr>
+                              <a:rPr lang="en-US" altLang="zh-CN" sz="2400" i="1">
+                                <a:latin typeface="Cambria Math" panose="02040503050406030204" pitchFamily="18" charset="0"/>
+                                <a:cs typeface="Cambria Math" panose="02040503050406030204" pitchFamily="18" charset="0"/>
+                              </a:rPr>
+                            </m:ctrlPr>
+                          </m:sSubSupPr>
+                          <m:e>
+                            <m:r>
+                              <a:rPr lang="en-US" altLang="zh-CN" sz="2400" i="1">
+                                <a:latin typeface="Cambria Math" panose="02040503050406030204" pitchFamily="18" charset="0"/>
+                                <a:cs typeface="Cambria Math" panose="02040503050406030204" pitchFamily="18" charset="0"/>
+                              </a:rPr>
+                              <m:t>𝐿</m:t>
+                            </m:r>
+                          </m:e>
+                          <m:sub>
+                            <m:r>
+                              <a:rPr lang="en-US" altLang="zh-CN" sz="2400" i="1">
+                                <a:latin typeface="Cambria Math" panose="02040503050406030204" pitchFamily="18" charset="0"/>
+                                <a:cs typeface="Cambria Math" panose="02040503050406030204" pitchFamily="18" charset="0"/>
+                              </a:rPr>
+                              <m:t>𝑗</m:t>
+                            </m:r>
+                          </m:sub>
+                          <m:sup>
+                            <m:r>
+                              <a:rPr lang="en-US" altLang="zh-CN" sz="2400" i="1">
+                                <a:latin typeface="Cambria Math" panose="02040503050406030204" pitchFamily="18" charset="0"/>
+                                <a:cs typeface="Cambria Math" panose="02040503050406030204" pitchFamily="18" charset="0"/>
+                              </a:rPr>
+                              <m:t>𝑡</m:t>
+                            </m:r>
+                          </m:sup>
+                        </m:sSubSup>
+                      </m:e>
+                    </m:nary>
+                    <m:r>
+                      <a:rPr lang="en-US" altLang="zh-CN" sz="2400" i="1">
+                        <a:latin typeface="Cambria Math" panose="02040503050406030204" pitchFamily="18" charset="0"/>
+                        <a:ea typeface="MS Mincho" charset="0"/>
+                        <a:cs typeface="Cambria Math" panose="02040503050406030204" pitchFamily="18" charset="0"/>
+                      </a:rPr>
+                      <m:t>⋅</m:t>
+                    </m:r>
+                    <m:sSubSup>
+                      <m:sSubSupPr>
+                        <m:ctrlPr>
+                          <a:rPr lang="en-US" altLang="zh-CN" sz="2400" i="1">
+                            <a:latin typeface="Cambria Math" panose="02040503050406030204" pitchFamily="18" charset="0"/>
+                            <a:cs typeface="Cambria Math" panose="02040503050406030204" pitchFamily="18" charset="0"/>
+                          </a:rPr>
+                        </m:ctrlPr>
+                      </m:sSubSupPr>
+                      <m:e>
+                        <m:r>
+                          <a:rPr lang="en-US" altLang="zh-CN" sz="2400" i="1">
+                            <a:latin typeface="Cambria Math" panose="02040503050406030204" pitchFamily="18" charset="0"/>
+                            <a:cs typeface="Cambria Math" panose="02040503050406030204" pitchFamily="18" charset="0"/>
+                          </a:rPr>
+                          <m:t>𝑒</m:t>
+                        </m:r>
+                      </m:e>
+                      <m:sub>
+                        <m:r>
+                          <a:rPr lang="en-US" altLang="zh-CN" sz="2400" i="1">
+                            <a:latin typeface="Cambria Math" panose="02040503050406030204" pitchFamily="18" charset="0"/>
+                            <a:cs typeface="Cambria Math" panose="02040503050406030204" pitchFamily="18" charset="0"/>
+                          </a:rPr>
+                          <m:t>𝑗𝑖</m:t>
+                        </m:r>
+                      </m:sub>
+                      <m:sup>
+                        <m:r>
+                          <a:rPr lang="en-US" altLang="zh-CN" sz="2400" i="1">
+                            <a:latin typeface="Cambria Math" panose="02040503050406030204" pitchFamily="18" charset="0"/>
+                            <a:cs typeface="Cambria Math" panose="02040503050406030204" pitchFamily="18" charset="0"/>
+                          </a:rPr>
+                          <m:t>𝑡</m:t>
+                        </m:r>
+                      </m:sup>
+                    </m:sSubSup>
+                  </m:oMath>
+                </a14:m>
+                <a:r>
+                  <a:rPr lang="en-US" altLang="zh-CN" sz="2400" i="1">
+                    <a:latin typeface="Cambria Math" panose="02040503050406030204" pitchFamily="18" charset="0"/>
+                    <a:cs typeface="Cambria Math" panose="02040503050406030204" pitchFamily="18" charset="0"/>
+                  </a:rPr>
+                  <a:t>	</a:t>
+                </a:r>
+                <a:endParaRPr lang="en-US" altLang="zh-CN" sz="2400" i="1">
+                  <a:latin typeface="Cambria Math" panose="02040503050406030204" pitchFamily="18" charset="0"/>
+                  <a:cs typeface="Cambria Math" panose="02040503050406030204" pitchFamily="18" charset="0"/>
+                </a:endParaRPr>
+              </a:p>
+              <a:p>
+                <a:pPr lvl="2" algn="l">
+                  <a:spcBef>
+                    <a:spcPts val="1000"/>
+                  </a:spcBef>
+                  <a:buClrTx/>
+                  <a:buSzTx/>
+                </a:pPr>
+                <a14:m>
+                  <m:oMath xmlns:m="http://schemas.openxmlformats.org/officeDocument/2006/math">
+                    <m:sSubSup>
+                      <m:sSubSupPr>
+                        <m:ctrlPr>
+                          <a:rPr lang="en-US" altLang="zh-CN" sz="2400"/>
+                        </m:ctrlPr>
+                      </m:sSubSupPr>
+                      <m:e>
+                        <m:r>
+                          <a:rPr lang="en-US" altLang="zh-CN" sz="2400">
+                            <a:latin typeface="Cambria Math" panose="02040503050406030204" pitchFamily="18" charset="0"/>
+                          </a:rPr>
+                          <m:t>𝐿</m:t>
+                        </m:r>
+                      </m:e>
+                      <m:sub>
+                        <m:r>
+                          <a:rPr lang="en-US" altLang="zh-CN" sz="2400">
+                            <a:latin typeface="Cambria Math" panose="02040503050406030204" pitchFamily="18" charset="0"/>
+                          </a:rPr>
+                          <m:t>𝑗</m:t>
+                        </m:r>
+                      </m:sub>
+                      <m:sup>
+                        <m:r>
+                          <a:rPr lang="en-US" altLang="zh-CN" sz="2400">
+                            <a:latin typeface="Cambria Math" panose="02040503050406030204" pitchFamily="18" charset="0"/>
+                          </a:rPr>
+                          <m:t>𝑡</m:t>
+                        </m:r>
+                      </m:sup>
+                    </m:sSubSup>
+                    <m:r>
+                      <a:rPr lang="en-US" altLang="zh-CN" sz="2400">
+                        <a:latin typeface="Cambria Math" panose="02040503050406030204" pitchFamily="18" charset="0"/>
+                      </a:rPr>
+                      <m:t> :</m:t>
+                    </m:r>
+                  </m:oMath>
+                </a14:m>
+                <a:r>
+                  <a:rPr lang="en-US" altLang="zh-CN" sz="2400"/>
+                  <a:t> </a:t>
+                </a:r>
+                <a14:m>
+                  <m:oMath xmlns:m="http://schemas.openxmlformats.org/officeDocument/2006/math">
+                    <m:r>
+                      <m:rPr>
+                        <m:sty m:val="p"/>
+                      </m:rPr>
+                      <a:rPr lang="en-US" altLang="zh-CN" sz="2400">
+                        <a:latin typeface="Cambria Math" panose="02040503050406030204" pitchFamily="18" charset="0"/>
+                      </a:rPr>
+                      <m:t>learning</m:t>
+                    </m:r>
+                    <m:r>
+                      <a:rPr lang="en-US" altLang="zh-CN" sz="2400">
+                        <a:latin typeface="Cambria Math" panose="02040503050406030204" pitchFamily="18" charset="0"/>
+                      </a:rPr>
+                      <m:t> </m:t>
+                    </m:r>
+                    <m:r>
+                      <m:rPr>
+                        <m:sty m:val="p"/>
+                      </m:rPr>
+                      <a:rPr lang="en-US" altLang="zh-CN" sz="2400">
+                        <a:latin typeface="Cambria Math" panose="02040503050406030204" pitchFamily="18" charset="0"/>
+                      </a:rPr>
+                      <m:t>signal</m:t>
+                    </m:r>
+                    <m:r>
+                      <a:rPr lang="en-US" altLang="zh-CN" sz="2400">
+                        <a:latin typeface="Cambria Math" panose="02040503050406030204" pitchFamily="18" charset="0"/>
+                      </a:rPr>
+                      <m:t> (</m:t>
+                    </m:r>
+                    <m:r>
+                      <m:rPr>
+                        <m:sty m:val="p"/>
+                      </m:rPr>
+                      <a:rPr lang="en-US" altLang="zh-CN" sz="2400">
+                        <a:latin typeface="Cambria Math" panose="02040503050406030204" pitchFamily="18" charset="0"/>
+                      </a:rPr>
+                      <m:t>error</m:t>
+                    </m:r>
+                    <m:r>
+                      <a:rPr lang="en-US" altLang="zh-CN" sz="2400">
+                        <a:latin typeface="Cambria Math" panose="02040503050406030204" pitchFamily="18" charset="0"/>
+                      </a:rPr>
+                      <m:t>/</m:t>
+                    </m:r>
+                    <m:r>
+                      <m:rPr>
+                        <m:sty m:val="p"/>
+                      </m:rPr>
+                      <a:rPr lang="en-US" altLang="zh-CN" sz="2400">
+                        <a:latin typeface="Cambria Math" panose="02040503050406030204" pitchFamily="18" charset="0"/>
+                      </a:rPr>
+                      <m:t>reward</m:t>
+                    </m:r>
+                    <m:r>
+                      <a:rPr lang="en-US" altLang="zh-CN" sz="2400">
+                        <a:latin typeface="Cambria Math" panose="02040503050406030204" pitchFamily="18" charset="0"/>
+                      </a:rPr>
+                      <m:t>);</m:t>
+                    </m:r>
+                  </m:oMath>
+                </a14:m>
+                <a:r>
+                  <a:rPr lang="en-US" altLang="zh-CN" sz="2400" i="1">
+                    <a:latin typeface="Cambria Math" panose="02040503050406030204" pitchFamily="18" charset="0"/>
+                    <a:cs typeface="Cambria Math" panose="02040503050406030204" pitchFamily="18" charset="0"/>
+                  </a:rPr>
+                  <a:t>	</a:t>
+                </a:r>
+                <a14:m>
+                  <m:oMath xmlns:m="http://schemas.openxmlformats.org/officeDocument/2006/math">
+                    <m:sSubSup>
+                      <m:sSubSupPr>
+                        <m:ctrlPr>
+                          <a:rPr lang="en-US" altLang="zh-CN" sz="2400" i="1">
+                            <a:latin typeface="Cambria Math" panose="02040503050406030204" pitchFamily="18" charset="0"/>
+                            <a:cs typeface="Cambria Math" panose="02040503050406030204" pitchFamily="18" charset="0"/>
+                          </a:rPr>
+                        </m:ctrlPr>
+                      </m:sSubSupPr>
+                      <m:e>
+                        <m:r>
+                          <a:rPr lang="en-US" altLang="zh-CN" sz="2400" i="1">
+                            <a:latin typeface="Cambria Math" panose="02040503050406030204" pitchFamily="18" charset="0"/>
+                            <a:cs typeface="Cambria Math" panose="02040503050406030204" pitchFamily="18" charset="0"/>
+                          </a:rPr>
+                          <m:t>𝑒</m:t>
+                        </m:r>
+                      </m:e>
+                      <m:sub>
+                        <m:r>
+                          <a:rPr lang="en-US" altLang="zh-CN" sz="2400" i="1">
+                            <a:latin typeface="Cambria Math" panose="02040503050406030204" pitchFamily="18" charset="0"/>
+                            <a:cs typeface="Cambria Math" panose="02040503050406030204" pitchFamily="18" charset="0"/>
+                          </a:rPr>
+                          <m:t>𝑗𝑖</m:t>
+                        </m:r>
+                      </m:sub>
+                      <m:sup>
+                        <m:r>
+                          <a:rPr lang="en-US" altLang="zh-CN" sz="2400" i="1">
+                            <a:latin typeface="Cambria Math" panose="02040503050406030204" pitchFamily="18" charset="0"/>
+                            <a:cs typeface="Cambria Math" panose="02040503050406030204" pitchFamily="18" charset="0"/>
+                          </a:rPr>
+                          <m:t>𝑡</m:t>
+                        </m:r>
+                      </m:sup>
+                    </m:sSubSup>
+                  </m:oMath>
+                </a14:m>
+                <a:r>
+                  <a:rPr lang="en-US" altLang="zh-CN" sz="2400"/>
+                  <a:t>: </a:t>
+                </a:r>
+                <a:r>
+                  <a:rPr lang="en-US" altLang="zh-CN" sz="2400"/>
+                  <a:t>eligibility trace (local history)</a:t>
+                </a:r>
+                <a:endParaRPr lang="en-US" altLang="zh-CN" sz="2400"/>
+              </a:p>
+              <a:p>
+                <a:pPr lvl="2" algn="l">
+                  <a:spcBef>
+                    <a:spcPts val="1000"/>
+                  </a:spcBef>
+                  <a:buClrTx/>
+                  <a:buSzTx/>
+                </a:pPr>
+                <a:endParaRPr lang="en-US" altLang="zh-CN" sz="2400">
+                  <a:latin typeface="Cambria Math" panose="02040503050406030204" pitchFamily="18" charset="0"/>
+                  <a:cs typeface="Cambria Math" panose="02040503050406030204" pitchFamily="18" charset="0"/>
+                </a:endParaRPr>
+              </a:p>
+            </p:txBody>
+          </p:sp>
+        </mc:Choice>
+        <mc:Fallback>
+          <p:sp>
+            <p:nvSpPr>
+              <p:cNvPr id="3" name="Content Placeholder 2"/>
+              <p:cNvSpPr>
+                <a:spLocks noRot="1" noChangeAspect="1" noMove="1" noResize="1" noEditPoints="1" noAdjustHandles="1" noChangeArrowheads="1" noChangeShapeType="1" noTextEdit="1"/>
+              </p:cNvSpPr>
+              <p:nvPr>
+                <p:ph idx="1"/>
+              </p:nvPr>
+            </p:nvSpPr>
+            <p:spPr>
+              <a:blipFill rotWithShape="1">
+                <a:blip r:embed="rId1"/>
+                <a:stretch>
+                  <a:fillRect l="-4" t="-435" r="2" b="3"/>
+                </a:stretch>
+              </a:blipFill>
+            </p:spPr>
+            <p:txBody>
+              <a:bodyPr/>
+              <a:lstStyle/>
+              <a:p>
+                <a:r>
+                  <a:rPr lang="zh-CN" altLang="en-US">
+                    <a:noFill/>
+                  </a:rPr>
+                  <a:t> </a:t>
+                </a:r>
+              </a:p>
+            </p:txBody>
+          </p:sp>
+        </mc:Fallback>
+      </mc:AlternateContent>
       <p:sp>
         <p:nvSpPr>
           <p:cNvPr id="4" name="Footer Placeholder 3"/>
@@ -7816,25 +8455,741 @@
           </a:p>
         </p:txBody>
       </p:sp>
-      <p:sp>
-        <p:nvSpPr>
-          <p:cNvPr id="3" name="Content Placeholder 2"/>
-          <p:cNvSpPr>
-            <a:spLocks noGrp="1"/>
-          </p:cNvSpPr>
-          <p:nvPr>
-            <p:ph idx="1"/>
-          </p:nvPr>
-        </p:nvSpPr>
-        <p:spPr/>
-        <p:txBody>
-          <a:bodyPr/>
-          <a:lstStyle/>
-          <a:p>
-            <a:endParaRPr lang="en-US" dirty="0"/>
-          </a:p>
-        </p:txBody>
-      </p:sp>
+      <mc:AlternateContent xmlns:mc="http://schemas.openxmlformats.org/markup-compatibility/2006">
+        <mc:Choice xmlns:a14="http://schemas.microsoft.com/office/drawing/2010/main" Requires="a14">
+          <p:sp>
+            <p:nvSpPr>
+              <p:cNvPr id="3" name="Content Placeholder 2"/>
+              <p:cNvSpPr>
+                <a:spLocks noGrp="1"/>
+              </p:cNvSpPr>
+              <p:nvPr>
+                <p:ph idx="1"/>
+              </p:nvPr>
+            </p:nvSpPr>
+            <p:spPr/>
+            <p:txBody>
+              <a:bodyPr/>
+              <a:lstStyle/>
+              <a:p>
+                <a:r>
+                  <a:rPr lang="en-US" altLang="zh-CN" dirty="0"/>
+                  <a:t>The First Online Gradient Algorithm:</a:t>
+                </a:r>
+                <a:endParaRPr lang="en-US" altLang="zh-CN" dirty="0"/>
+              </a:p>
+              <a:p>
+                <a:pPr lvl="2"/>
+                <a:r>
+                  <a:rPr lang="en-US" altLang="zh-CN" dirty="0"/>
+                  <a:t>Computes exact gradients without unrolling time.</a:t>
+                </a:r>
+                <a:endParaRPr lang="en-US" altLang="zh-CN" dirty="0"/>
+              </a:p>
+              <a:p>
+                <a:pPr lvl="2"/>
+                <a:r>
+                  <a:rPr lang="en-US" altLang="zh-CN" dirty="0"/>
+                  <a:t>Maintains a sensitivity matrix: </a:t>
+                </a:r>
+                <a14:m>
+                  <m:oMath xmlns:m="http://schemas.openxmlformats.org/officeDocument/2006/math">
+                    <m:sSubSup>
+                      <m:sSubSupPr>
+                        <m:ctrlPr>
+                          <a:rPr lang="en-US" altLang="zh-CN" i="1" dirty="0">
+                            <a:latin typeface="Cambria Math" panose="02040503050406030204" pitchFamily="18" charset="0"/>
+                            <a:cs typeface="Cambria Math" panose="02040503050406030204" pitchFamily="18" charset="0"/>
+                          </a:rPr>
+                        </m:ctrlPr>
+                      </m:sSubSupPr>
+                      <m:e>
+                        <m:r>
+                          <a:rPr lang="en-US" altLang="zh-CN" i="1" dirty="0">
+                            <a:latin typeface="Cambria Math" panose="02040503050406030204" pitchFamily="18" charset="0"/>
+                            <a:cs typeface="Cambria Math" panose="02040503050406030204" pitchFamily="18" charset="0"/>
+                          </a:rPr>
+                          <m:t>𝑝</m:t>
+                        </m:r>
+                      </m:e>
+                      <m:sub>
+                        <m:r>
+                          <a:rPr lang="en-US" altLang="zh-CN" i="1" dirty="0">
+                            <a:latin typeface="Cambria Math" panose="02040503050406030204" pitchFamily="18" charset="0"/>
+                            <a:cs typeface="Cambria Math" panose="02040503050406030204" pitchFamily="18" charset="0"/>
+                          </a:rPr>
+                          <m:t>𝑖𝑗</m:t>
+                        </m:r>
+                      </m:sub>
+                      <m:sup>
+                        <m:r>
+                          <a:rPr lang="en-US" altLang="zh-CN" i="1" dirty="0">
+                            <a:latin typeface="Cambria Math" panose="02040503050406030204" pitchFamily="18" charset="0"/>
+                            <a:cs typeface="Cambria Math" panose="02040503050406030204" pitchFamily="18" charset="0"/>
+                          </a:rPr>
+                          <m:t>𝑘</m:t>
+                        </m:r>
+                      </m:sup>
+                    </m:sSubSup>
+                    <m:r>
+                      <a:rPr lang="en-US" altLang="zh-CN" i="1" dirty="0">
+                        <a:latin typeface="Cambria Math" panose="02040503050406030204" pitchFamily="18" charset="0"/>
+                        <a:cs typeface="Cambria Math" panose="02040503050406030204" pitchFamily="18" charset="0"/>
+                      </a:rPr>
+                      <m:t>(</m:t>
+                    </m:r>
+                    <m:r>
+                      <a:rPr lang="en-US" altLang="zh-CN" i="1" dirty="0">
+                        <a:latin typeface="Cambria Math" panose="02040503050406030204" pitchFamily="18" charset="0"/>
+                        <a:cs typeface="Cambria Math" panose="02040503050406030204" pitchFamily="18" charset="0"/>
+                      </a:rPr>
+                      <m:t>𝑡</m:t>
+                    </m:r>
+                    <m:r>
+                      <a:rPr lang="en-US" altLang="zh-CN" i="1" dirty="0">
+                        <a:latin typeface="Cambria Math" panose="02040503050406030204" pitchFamily="18" charset="0"/>
+                        <a:cs typeface="Cambria Math" panose="02040503050406030204" pitchFamily="18" charset="0"/>
+                      </a:rPr>
+                      <m:t>)=</m:t>
+                    </m:r>
+                    <m:r>
+                      <a:rPr lang="en-US" altLang="zh-CN" i="1" dirty="0">
+                        <a:latin typeface="Cambria Math" panose="02040503050406030204" pitchFamily="18" charset="0"/>
+                        <a:cs typeface="Cambria Math" panose="02040503050406030204" pitchFamily="18" charset="0"/>
+                      </a:rPr>
+                      <m:t>𝜕</m:t>
+                    </m:r>
+                    <m:sSub>
+                      <m:sSubPr>
+                        <m:ctrlPr>
+                          <a:rPr lang="en-US" altLang="zh-CN" i="1" dirty="0">
+                            <a:latin typeface="Cambria Math" panose="02040503050406030204" pitchFamily="18" charset="0"/>
+                            <a:cs typeface="Cambria Math" panose="02040503050406030204" pitchFamily="18" charset="0"/>
+                          </a:rPr>
+                        </m:ctrlPr>
+                      </m:sSubPr>
+                      <m:e>
+                        <m:r>
+                          <a:rPr lang="en-US" altLang="zh-CN" i="1" dirty="0">
+                            <a:latin typeface="Cambria Math" panose="02040503050406030204" pitchFamily="18" charset="0"/>
+                            <a:cs typeface="Cambria Math" panose="02040503050406030204" pitchFamily="18" charset="0"/>
+                          </a:rPr>
+                          <m:t>𝑦</m:t>
+                        </m:r>
+                      </m:e>
+                      <m:sub>
+                        <m:r>
+                          <a:rPr lang="en-US" altLang="zh-CN" i="1" dirty="0">
+                            <a:latin typeface="Cambria Math" panose="02040503050406030204" pitchFamily="18" charset="0"/>
+                            <a:cs typeface="Cambria Math" panose="02040503050406030204" pitchFamily="18" charset="0"/>
+                          </a:rPr>
+                          <m:t>𝑘</m:t>
+                        </m:r>
+                      </m:sub>
+                    </m:sSub>
+                    <m:r>
+                      <a:rPr lang="en-US" altLang="zh-CN" i="1" dirty="0">
+                        <a:latin typeface="Cambria Math" panose="02040503050406030204" pitchFamily="18" charset="0"/>
+                        <a:cs typeface="Cambria Math" panose="02040503050406030204" pitchFamily="18" charset="0"/>
+                      </a:rPr>
+                      <m:t>(</m:t>
+                    </m:r>
+                    <m:r>
+                      <a:rPr lang="en-US" altLang="zh-CN" i="1" dirty="0">
+                        <a:latin typeface="Cambria Math" panose="02040503050406030204" pitchFamily="18" charset="0"/>
+                        <a:cs typeface="Cambria Math" panose="02040503050406030204" pitchFamily="18" charset="0"/>
+                      </a:rPr>
+                      <m:t>𝑡</m:t>
+                    </m:r>
+                    <m:r>
+                      <a:rPr lang="en-US" altLang="zh-CN" i="1" dirty="0">
+                        <a:latin typeface="Cambria Math" panose="02040503050406030204" pitchFamily="18" charset="0"/>
+                        <a:cs typeface="Cambria Math" panose="02040503050406030204" pitchFamily="18" charset="0"/>
+                      </a:rPr>
+                      <m:t>)/</m:t>
+                    </m:r>
+                    <m:r>
+                      <a:rPr lang="en-US" altLang="zh-CN" i="1" dirty="0">
+                        <a:latin typeface="Cambria Math" panose="02040503050406030204" pitchFamily="18" charset="0"/>
+                        <a:cs typeface="Cambria Math" panose="02040503050406030204" pitchFamily="18" charset="0"/>
+                      </a:rPr>
+                      <m:t>𝜕</m:t>
+                    </m:r>
+                    <m:sSub>
+                      <m:sSubPr>
+                        <m:ctrlPr>
+                          <a:rPr lang="en-US" altLang="zh-CN" i="1" dirty="0">
+                            <a:latin typeface="Cambria Math" panose="02040503050406030204" pitchFamily="18" charset="0"/>
+                            <a:cs typeface="Cambria Math" panose="02040503050406030204" pitchFamily="18" charset="0"/>
+                          </a:rPr>
+                        </m:ctrlPr>
+                      </m:sSubPr>
+                      <m:e>
+                        <m:r>
+                          <a:rPr lang="en-US" altLang="zh-CN" i="1" dirty="0">
+                            <a:latin typeface="Cambria Math" panose="02040503050406030204" pitchFamily="18" charset="0"/>
+                            <a:cs typeface="Cambria Math" panose="02040503050406030204" pitchFamily="18" charset="0"/>
+                          </a:rPr>
+                          <m:t>𝑤</m:t>
+                        </m:r>
+                      </m:e>
+                      <m:sub>
+                        <m:r>
+                          <a:rPr lang="en-US" altLang="zh-CN" i="1" dirty="0">
+                            <a:latin typeface="Cambria Math" panose="02040503050406030204" pitchFamily="18" charset="0"/>
+                            <a:cs typeface="Cambria Math" panose="02040503050406030204" pitchFamily="18" charset="0"/>
+                          </a:rPr>
+                          <m:t>𝑖𝑗</m:t>
+                        </m:r>
+                      </m:sub>
+                    </m:sSub>
+                  </m:oMath>
+                </a14:m>
+                <a:endParaRPr lang="en-US" altLang="zh-CN" dirty="0"/>
+              </a:p>
+              <a:p>
+                <a:pPr lvl="2"/>
+                <a:r>
+                  <a:rPr lang="en-US" altLang="zh-CN" dirty="0"/>
+                  <a:t>Gradients flow </a:t>
+                </a:r>
+                <a:r>
+                  <a:rPr lang="en-US" altLang="zh-CN" i="1" dirty="0"/>
+                  <a:t>forward</a:t>
+                </a:r>
+                <a:r>
+                  <a:rPr lang="en-US" altLang="zh-CN" dirty="0"/>
+                  <a:t>, not backward.</a:t>
+                </a:r>
+                <a:endParaRPr lang="en-US" altLang="zh-CN" dirty="0"/>
+              </a:p>
+              <a:p>
+                <a:pPr marL="228600" lvl="1" algn="l">
+                  <a:spcBef>
+                    <a:spcPts val="1000"/>
+                  </a:spcBef>
+                  <a:buClrTx/>
+                  <a:buSzTx/>
+                </a:pPr>
+                <a:r>
+                  <a:rPr lang="en-US" altLang="zh-CN" sz="2800" dirty="0"/>
+                  <a:t>The Core Idea:</a:t>
+                </a:r>
+                <a:endParaRPr lang="en-US" altLang="zh-CN" sz="2800" dirty="0"/>
+              </a:p>
+              <a:p>
+                <a:pPr lvl="2" algn="l">
+                  <a:spcBef>
+                    <a:spcPts val="1000"/>
+                  </a:spcBef>
+                  <a:buClrTx/>
+                  <a:buSzTx/>
+                </a:pPr>
+                <a:r>
+                  <a:rPr lang="en-US" altLang="zh-CN" dirty="0"/>
+                  <a:t>The effect of a weight on future outputs is propagated recursively.</a:t>
+                </a:r>
+                <a:endParaRPr lang="en-US" altLang="zh-CN" dirty="0"/>
+              </a:p>
+              <a:p>
+                <a:pPr lvl="2" algn="l">
+                  <a:spcBef>
+                    <a:spcPts val="1000"/>
+                  </a:spcBef>
+                  <a:buClrTx/>
+                  <a:buSzTx/>
+                </a:pPr>
+                <a:r>
+                  <a:rPr lang="en-US" altLang="zh-CN" dirty="0"/>
+                  <a:t>Weight change = error × accumulated sensitivity.</a:t>
+                </a:r>
+                <a:endParaRPr lang="en-US" altLang="zh-CN" dirty="0"/>
+              </a:p>
+              <a:p>
+                <a:pPr marL="228600" lvl="1" algn="l">
+                  <a:spcBef>
+                    <a:spcPts val="1000"/>
+                  </a:spcBef>
+                  <a:buClrTx/>
+                  <a:buSzTx/>
+                </a:pPr>
+                <a14:m>
+                  <m:oMath xmlns:m="http://schemas.openxmlformats.org/officeDocument/2006/math">
+                    <m:sSubSup>
+                      <m:sSubSupPr>
+                        <m:ctrlPr>
+                          <a:rPr lang="en-US" altLang="zh-CN" sz="2800" i="1" dirty="0">
+                            <a:latin typeface="Cambria Math" panose="02040503050406030204" pitchFamily="18" charset="0"/>
+                            <a:cs typeface="Cambria Math" panose="02040503050406030204" pitchFamily="18" charset="0"/>
+                          </a:rPr>
+                        </m:ctrlPr>
+                      </m:sSubSupPr>
+                      <m:e>
+                        <m:r>
+                          <a:rPr lang="en-US" altLang="zh-CN" sz="2800" i="1" dirty="0">
+                            <a:latin typeface="Cambria Math" panose="02040503050406030204" pitchFamily="18" charset="0"/>
+                            <a:cs typeface="Cambria Math" panose="02040503050406030204" pitchFamily="18" charset="0"/>
+                          </a:rPr>
+                          <m:t>𝑝</m:t>
+                        </m:r>
+                      </m:e>
+                      <m:sub>
+                        <m:r>
+                          <a:rPr lang="en-US" altLang="zh-CN" sz="2800" i="1" dirty="0">
+                            <a:latin typeface="Cambria Math" panose="02040503050406030204" pitchFamily="18" charset="0"/>
+                            <a:cs typeface="Cambria Math" panose="02040503050406030204" pitchFamily="18" charset="0"/>
+                          </a:rPr>
+                          <m:t>𝑖𝑗</m:t>
+                        </m:r>
+                      </m:sub>
+                      <m:sup>
+                        <m:r>
+                          <a:rPr lang="en-US" altLang="zh-CN" sz="2800" i="1" dirty="0">
+                            <a:latin typeface="Cambria Math" panose="02040503050406030204" pitchFamily="18" charset="0"/>
+                            <a:cs typeface="Cambria Math" panose="02040503050406030204" pitchFamily="18" charset="0"/>
+                          </a:rPr>
+                          <m:t>𝑘</m:t>
+                        </m:r>
+                      </m:sup>
+                    </m:sSubSup>
+                    <m:r>
+                      <a:rPr lang="en-US" altLang="zh-CN" sz="2800" i="1" dirty="0">
+                        <a:latin typeface="Cambria Math" panose="02040503050406030204" pitchFamily="18" charset="0"/>
+                        <a:ea typeface="MS Mincho" charset="0"/>
+                        <a:cs typeface="Cambria Math" panose="02040503050406030204" pitchFamily="18" charset="0"/>
+                      </a:rPr>
+                      <m:t>(</m:t>
+                    </m:r>
+                    <m:r>
+                      <a:rPr lang="en-US" altLang="zh-CN" sz="2800" i="1" dirty="0">
+                        <a:latin typeface="Cambria Math" panose="02040503050406030204" pitchFamily="18" charset="0"/>
+                        <a:cs typeface="Cambria Math" panose="02040503050406030204" pitchFamily="18" charset="0"/>
+                      </a:rPr>
+                      <m:t>𝑡</m:t>
+                    </m:r>
+                    <m:r>
+                      <a:rPr lang="en-US" altLang="zh-CN" sz="2800" i="1" dirty="0">
+                        <a:latin typeface="Cambria Math" panose="02040503050406030204" pitchFamily="18" charset="0"/>
+                        <a:ea typeface="MS Mincho" charset="0"/>
+                        <a:cs typeface="Cambria Math" panose="02040503050406030204" pitchFamily="18" charset="0"/>
+                      </a:rPr>
+                      <m:t>+</m:t>
+                    </m:r>
+                    <m:r>
+                      <a:rPr lang="en-US" altLang="zh-CN" sz="2800" i="1" dirty="0">
+                        <a:latin typeface="Cambria Math" panose="02040503050406030204" pitchFamily="18" charset="0"/>
+                        <a:ea typeface="MS Mincho" charset="0"/>
+                        <a:cs typeface="Cambria Math" panose="02040503050406030204" pitchFamily="18" charset="0"/>
+                      </a:rPr>
+                      <m:t>1</m:t>
+                    </m:r>
+                    <m:r>
+                      <a:rPr lang="en-US" altLang="zh-CN" sz="2800" i="1" dirty="0">
+                        <a:latin typeface="Cambria Math" panose="02040503050406030204" pitchFamily="18" charset="0"/>
+                        <a:ea typeface="MS Mincho" charset="0"/>
+                        <a:cs typeface="Cambria Math" panose="02040503050406030204" pitchFamily="18" charset="0"/>
+                      </a:rPr>
+                      <m:t>)=</m:t>
+                    </m:r>
+                    <m:sSub>
+                      <m:sSubPr>
+                        <m:ctrlPr>
+                          <a:rPr lang="en-US" altLang="zh-CN" sz="2800" i="1" dirty="0">
+                            <a:latin typeface="Cambria Math" panose="02040503050406030204" pitchFamily="18" charset="0"/>
+                            <a:cs typeface="Cambria Math" panose="02040503050406030204" pitchFamily="18" charset="0"/>
+                          </a:rPr>
+                        </m:ctrlPr>
+                      </m:sSubPr>
+                      <m:e>
+                        <m:r>
+                          <a:rPr lang="en-US" altLang="zh-CN" sz="2800" i="1" dirty="0">
+                            <a:latin typeface="Cambria Math" panose="02040503050406030204" pitchFamily="18" charset="0"/>
+                            <a:cs typeface="Cambria Math" panose="02040503050406030204" pitchFamily="18" charset="0"/>
+                          </a:rPr>
+                          <m:t>𝑓</m:t>
+                        </m:r>
+                      </m:e>
+                      <m:sub>
+                        <m:r>
+                          <a:rPr lang="en-US" altLang="zh-CN" sz="2800" i="1" dirty="0">
+                            <a:latin typeface="Cambria Math" panose="02040503050406030204" pitchFamily="18" charset="0"/>
+                            <a:cs typeface="Cambria Math" panose="02040503050406030204" pitchFamily="18" charset="0"/>
+                          </a:rPr>
+                          <m:t>𝑘</m:t>
+                        </m:r>
+                      </m:sub>
+                    </m:sSub>
+                    <m:r>
+                      <a:rPr lang="en-US" altLang="zh-CN" sz="2800" i="1" dirty="0">
+                        <a:latin typeface="Cambria Math" panose="02040503050406030204" pitchFamily="18" charset="0"/>
+                        <a:ea typeface="MS Mincho" charset="0"/>
+                        <a:cs typeface="Cambria Math" panose="02040503050406030204" pitchFamily="18" charset="0"/>
+                      </a:rPr>
+                      <m:t>'(</m:t>
+                    </m:r>
+                    <m:sSub>
+                      <m:sSubPr>
+                        <m:ctrlPr>
+                          <a:rPr lang="en-US" altLang="zh-CN" sz="2800" i="1" dirty="0">
+                            <a:latin typeface="Cambria Math" panose="02040503050406030204" pitchFamily="18" charset="0"/>
+                            <a:cs typeface="Cambria Math" panose="02040503050406030204" pitchFamily="18" charset="0"/>
+                          </a:rPr>
+                        </m:ctrlPr>
+                      </m:sSubPr>
+                      <m:e>
+                        <m:r>
+                          <a:rPr lang="en-US" altLang="zh-CN" sz="2800" i="1" dirty="0">
+                            <a:latin typeface="Cambria Math" panose="02040503050406030204" pitchFamily="18" charset="0"/>
+                            <a:cs typeface="Cambria Math" panose="02040503050406030204" pitchFamily="18" charset="0"/>
+                          </a:rPr>
+                          <m:t>𝑠</m:t>
+                        </m:r>
+                      </m:e>
+                      <m:sub>
+                        <m:r>
+                          <a:rPr lang="en-US" altLang="zh-CN" sz="2800" i="1" dirty="0">
+                            <a:latin typeface="Cambria Math" panose="02040503050406030204" pitchFamily="18" charset="0"/>
+                            <a:cs typeface="Cambria Math" panose="02040503050406030204" pitchFamily="18" charset="0"/>
+                          </a:rPr>
+                          <m:t>𝑘</m:t>
+                        </m:r>
+                      </m:sub>
+                    </m:sSub>
+                    <m:r>
+                      <a:rPr lang="en-US" altLang="zh-CN" sz="2800" i="1" dirty="0">
+                        <a:latin typeface="Cambria Math" panose="02040503050406030204" pitchFamily="18" charset="0"/>
+                        <a:ea typeface="MS Mincho" charset="0"/>
+                        <a:cs typeface="Cambria Math" panose="02040503050406030204" pitchFamily="18" charset="0"/>
+                      </a:rPr>
+                      <m:t>(</m:t>
+                    </m:r>
+                    <m:r>
+                      <a:rPr lang="en-US" altLang="zh-CN" sz="2800" i="1" dirty="0">
+                        <a:latin typeface="Cambria Math" panose="02040503050406030204" pitchFamily="18" charset="0"/>
+                        <a:cs typeface="Cambria Math" panose="02040503050406030204" pitchFamily="18" charset="0"/>
+                      </a:rPr>
+                      <m:t>𝑡</m:t>
+                    </m:r>
+                    <m:r>
+                      <a:rPr lang="en-US" altLang="zh-CN" sz="2800" i="1" dirty="0">
+                        <a:latin typeface="Cambria Math" panose="02040503050406030204" pitchFamily="18" charset="0"/>
+                        <a:ea typeface="MS Mincho" charset="0"/>
+                        <a:cs typeface="Cambria Math" panose="02040503050406030204" pitchFamily="18" charset="0"/>
+                      </a:rPr>
+                      <m:t>))</m:t>
+                    </m:r>
+                    <m:d>
+                      <m:dPr>
+                        <m:begChr m:val="["/>
+                        <m:endChr m:val="]"/>
+                        <m:ctrlPr>
+                          <a:rPr lang="en-US" altLang="zh-CN" sz="2800" i="1" dirty="0">
+                            <a:latin typeface="Cambria Math" panose="02040503050406030204" pitchFamily="18" charset="0"/>
+                            <a:cs typeface="Cambria Math" panose="02040503050406030204" pitchFamily="18" charset="0"/>
+                          </a:rPr>
+                        </m:ctrlPr>
+                      </m:dPr>
+                      <m:e>
+                        <m:nary>
+                          <m:naryPr>
+                            <m:chr m:val="∑"/>
+                            <m:limLoc m:val="subSup"/>
+                            <m:supHide m:val="on"/>
+                            <m:ctrlPr>
+                              <a:rPr lang="en-US" altLang="zh-CN" sz="2800" i="1" dirty="0">
+                                <a:latin typeface="Cambria Math" panose="02040503050406030204" pitchFamily="18" charset="0"/>
+                                <a:cs typeface="Cambria Math" panose="02040503050406030204" pitchFamily="18" charset="0"/>
+                              </a:rPr>
+                            </m:ctrlPr>
+                          </m:naryPr>
+                          <m:sub>
+                            <m:r>
+                              <a:rPr lang="en-US" altLang="zh-CN" sz="2800" i="1" dirty="0">
+                                <a:latin typeface="Cambria Math" panose="02040503050406030204" pitchFamily="18" charset="0"/>
+                                <a:cs typeface="Cambria Math" panose="02040503050406030204" pitchFamily="18" charset="0"/>
+                              </a:rPr>
+                              <m:t>𝑙</m:t>
+                            </m:r>
+                          </m:sub>
+                          <m:sup/>
+                          <m:e>
+                            <m:sSub>
+                              <m:sSubPr>
+                                <m:ctrlPr>
+                                  <a:rPr lang="en-US" altLang="zh-CN" sz="2800" i="1" dirty="0">
+                                    <a:latin typeface="Cambria Math" panose="02040503050406030204" pitchFamily="18" charset="0"/>
+                                    <a:cs typeface="Cambria Math" panose="02040503050406030204" pitchFamily="18" charset="0"/>
+                                  </a:rPr>
+                                </m:ctrlPr>
+                              </m:sSubPr>
+                              <m:e>
+                                <m:r>
+                                  <a:rPr lang="en-US" altLang="zh-CN" sz="2800" i="1" dirty="0">
+                                    <a:latin typeface="Cambria Math" panose="02040503050406030204" pitchFamily="18" charset="0"/>
+                                    <a:cs typeface="Cambria Math" panose="02040503050406030204" pitchFamily="18" charset="0"/>
+                                  </a:rPr>
+                                  <m:t>𝑤</m:t>
+                                </m:r>
+                              </m:e>
+                              <m:sub>
+                                <m:r>
+                                  <a:rPr lang="en-US" altLang="zh-CN" sz="2800" i="1" dirty="0">
+                                    <a:latin typeface="Cambria Math" panose="02040503050406030204" pitchFamily="18" charset="0"/>
+                                    <a:cs typeface="Cambria Math" panose="02040503050406030204" pitchFamily="18" charset="0"/>
+                                  </a:rPr>
+                                  <m:t>𝑘𝑙</m:t>
+                                </m:r>
+                              </m:sub>
+                            </m:sSub>
+                          </m:e>
+                        </m:nary>
+                        <m:sSubSup>
+                          <m:sSubSupPr>
+                            <m:ctrlPr>
+                              <a:rPr lang="en-US" altLang="zh-CN" sz="2800" i="1" dirty="0">
+                                <a:latin typeface="Cambria Math" panose="02040503050406030204" pitchFamily="18" charset="0"/>
+                                <a:cs typeface="Cambria Math" panose="02040503050406030204" pitchFamily="18" charset="0"/>
+                              </a:rPr>
+                            </m:ctrlPr>
+                          </m:sSubSupPr>
+                          <m:e>
+                            <m:r>
+                              <a:rPr lang="en-US" altLang="zh-CN" sz="2800" i="1" dirty="0">
+                                <a:latin typeface="Cambria Math" panose="02040503050406030204" pitchFamily="18" charset="0"/>
+                                <a:cs typeface="Cambria Math" panose="02040503050406030204" pitchFamily="18" charset="0"/>
+                              </a:rPr>
+                              <m:t>𝑝</m:t>
+                            </m:r>
+                          </m:e>
+                          <m:sub>
+                            <m:r>
+                              <a:rPr lang="en-US" altLang="zh-CN" sz="2800" i="1" dirty="0">
+                                <a:latin typeface="Cambria Math" panose="02040503050406030204" pitchFamily="18" charset="0"/>
+                                <a:cs typeface="Cambria Math" panose="02040503050406030204" pitchFamily="18" charset="0"/>
+                              </a:rPr>
+                              <m:t>𝑖𝑗</m:t>
+                            </m:r>
+                          </m:sub>
+                          <m:sup>
+                            <m:r>
+                              <a:rPr lang="en-US" altLang="zh-CN" sz="2800" i="1" dirty="0">
+                                <a:latin typeface="Cambria Math" panose="02040503050406030204" pitchFamily="18" charset="0"/>
+                                <a:cs typeface="Cambria Math" panose="02040503050406030204" pitchFamily="18" charset="0"/>
+                              </a:rPr>
+                              <m:t>𝑙</m:t>
+                            </m:r>
+                          </m:sup>
+                        </m:sSubSup>
+                        <m:r>
+                          <a:rPr lang="en-US" altLang="zh-CN" sz="2800" i="1" dirty="0">
+                            <a:latin typeface="Cambria Math" panose="02040503050406030204" pitchFamily="18" charset="0"/>
+                            <a:ea typeface="MS Mincho" charset="0"/>
+                            <a:cs typeface="Cambria Math" panose="02040503050406030204" pitchFamily="18" charset="0"/>
+                          </a:rPr>
+                          <m:t>(</m:t>
+                        </m:r>
+                        <m:r>
+                          <a:rPr lang="en-US" altLang="zh-CN" sz="2800" i="1" dirty="0">
+                            <a:latin typeface="Cambria Math" panose="02040503050406030204" pitchFamily="18" charset="0"/>
+                            <a:cs typeface="Cambria Math" panose="02040503050406030204" pitchFamily="18" charset="0"/>
+                          </a:rPr>
+                          <m:t>𝑡</m:t>
+                        </m:r>
+                        <m:r>
+                          <a:rPr lang="en-US" altLang="zh-CN" sz="2800" i="1" dirty="0">
+                            <a:latin typeface="Cambria Math" panose="02040503050406030204" pitchFamily="18" charset="0"/>
+                            <a:ea typeface="MS Mincho" charset="0"/>
+                            <a:cs typeface="Cambria Math" panose="02040503050406030204" pitchFamily="18" charset="0"/>
+                          </a:rPr>
+                          <m:t>)+</m:t>
+                        </m:r>
+                        <m:sSub>
+                          <m:sSubPr>
+                            <m:ctrlPr>
+                              <a:rPr lang="en-US" altLang="zh-CN" sz="2800" i="1" dirty="0">
+                                <a:latin typeface="Cambria Math" panose="02040503050406030204" pitchFamily="18" charset="0"/>
+                                <a:cs typeface="Cambria Math" panose="02040503050406030204" pitchFamily="18" charset="0"/>
+                              </a:rPr>
+                            </m:ctrlPr>
+                          </m:sSubPr>
+                          <m:e>
+                            <m:r>
+                              <a:rPr lang="en-US" altLang="zh-CN" sz="2800" i="1" dirty="0">
+                                <a:latin typeface="Cambria Math" panose="02040503050406030204" pitchFamily="18" charset="0"/>
+                                <a:ea typeface="MS Mincho" charset="0"/>
+                                <a:cs typeface="Cambria Math" panose="02040503050406030204" pitchFamily="18" charset="0"/>
+                              </a:rPr>
+                              <m:t>𝛿</m:t>
+                            </m:r>
+                          </m:e>
+                          <m:sub>
+                            <m:r>
+                              <a:rPr lang="en-US" altLang="zh-CN" sz="2800" i="1" dirty="0">
+                                <a:latin typeface="Cambria Math" panose="02040503050406030204" pitchFamily="18" charset="0"/>
+                                <a:cs typeface="Cambria Math" panose="02040503050406030204" pitchFamily="18" charset="0"/>
+                              </a:rPr>
+                              <m:t>𝑖𝑘</m:t>
+                            </m:r>
+                          </m:sub>
+                        </m:sSub>
+                        <m:sSub>
+                          <m:sSubPr>
+                            <m:ctrlPr>
+                              <a:rPr lang="en-US" altLang="zh-CN" sz="2800" i="1" dirty="0">
+                                <a:latin typeface="Cambria Math" panose="02040503050406030204" pitchFamily="18" charset="0"/>
+                                <a:cs typeface="Cambria Math" panose="02040503050406030204" pitchFamily="18" charset="0"/>
+                              </a:rPr>
+                            </m:ctrlPr>
+                          </m:sSubPr>
+                          <m:e>
+                            <m:r>
+                              <a:rPr lang="en-US" altLang="zh-CN" sz="2800" i="1" dirty="0">
+                                <a:latin typeface="Cambria Math" panose="02040503050406030204" pitchFamily="18" charset="0"/>
+                                <a:cs typeface="Cambria Math" panose="02040503050406030204" pitchFamily="18" charset="0"/>
+                              </a:rPr>
+                              <m:t>𝑧</m:t>
+                            </m:r>
+                          </m:e>
+                          <m:sub>
+                            <m:r>
+                              <a:rPr lang="en-US" altLang="zh-CN" sz="2800" i="1" dirty="0">
+                                <a:latin typeface="Cambria Math" panose="02040503050406030204" pitchFamily="18" charset="0"/>
+                                <a:cs typeface="Cambria Math" panose="02040503050406030204" pitchFamily="18" charset="0"/>
+                              </a:rPr>
+                              <m:t>𝑗</m:t>
+                            </m:r>
+                          </m:sub>
+                        </m:sSub>
+                        <m:r>
+                          <a:rPr lang="en-US" altLang="zh-CN" sz="2800" i="1" dirty="0">
+                            <a:latin typeface="Cambria Math" panose="02040503050406030204" pitchFamily="18" charset="0"/>
+                            <a:ea typeface="MS Mincho" charset="0"/>
+                            <a:cs typeface="Cambria Math" panose="02040503050406030204" pitchFamily="18" charset="0"/>
+                          </a:rPr>
+                          <m:t>(</m:t>
+                        </m:r>
+                        <m:r>
+                          <a:rPr lang="en-US" altLang="zh-CN" sz="2800" i="1" dirty="0">
+                            <a:latin typeface="Cambria Math" panose="02040503050406030204" pitchFamily="18" charset="0"/>
+                            <a:cs typeface="Cambria Math" panose="02040503050406030204" pitchFamily="18" charset="0"/>
+                          </a:rPr>
+                          <m:t>𝑡</m:t>
+                        </m:r>
+                        <m:r>
+                          <a:rPr lang="en-US" altLang="zh-CN" sz="2800" i="1" dirty="0">
+                            <a:latin typeface="Cambria Math" panose="02040503050406030204" pitchFamily="18" charset="0"/>
+                            <a:ea typeface="MS Mincho" charset="0"/>
+                            <a:cs typeface="Cambria Math" panose="02040503050406030204" pitchFamily="18" charset="0"/>
+                          </a:rPr>
+                          <m:t>)</m:t>
+                        </m:r>
+                      </m:e>
+                    </m:d>
+                  </m:oMath>
+                </a14:m>
+                <a:endParaRPr lang="en-US" altLang="zh-CN" sz="2800" dirty="0"/>
+              </a:p>
+              <a:p>
+                <a:pPr marL="228600" lvl="1" algn="l">
+                  <a:spcBef>
+                    <a:spcPts val="1000"/>
+                  </a:spcBef>
+                  <a:buClrTx/>
+                  <a:buSzTx/>
+                </a:pPr>
+                <a:r>
+                  <a:rPr lang="en-US" altLang="zh-CN" sz="2800" dirty="0"/>
+                  <a:t>The Price: Memory </a:t>
+                </a:r>
+                <a14:m>
+                  <m:oMath xmlns:m="http://schemas.openxmlformats.org/officeDocument/2006/math">
+                    <m:r>
+                      <a:rPr lang="en-US" sz="2800" i="1" dirty="0" smtClean="0">
+                        <a:latin typeface="Cambria Math" panose="02040503050406030204" pitchFamily="18" charset="0"/>
+                      </a:rPr>
+                      <m:t>𝑂</m:t>
+                    </m:r>
+                    <m:r>
+                      <a:rPr lang="en-US" sz="2800" i="1" dirty="0" smtClean="0">
+                        <a:latin typeface="Cambria Math" panose="02040503050406030204" pitchFamily="18" charset="0"/>
+                      </a:rPr>
+                      <m:t>(</m:t>
+                    </m:r>
+                    <m:sSup>
+                      <m:sSupPr>
+                        <m:ctrlPr>
+                          <a:rPr lang="en-US" sz="2800" i="1" dirty="0" smtClean="0">
+                            <a:latin typeface="Cambria Math" panose="02040503050406030204" pitchFamily="18" charset="0"/>
+                            <a:cs typeface="Cambria Math" panose="02040503050406030204" pitchFamily="18" charset="0"/>
+                          </a:rPr>
+                        </m:ctrlPr>
+                      </m:sSupPr>
+                      <m:e>
+                        <m:r>
+                          <a:rPr lang="en-US" sz="2800" i="1" dirty="0" smtClean="0">
+                            <a:latin typeface="Cambria Math" panose="02040503050406030204" pitchFamily="18" charset="0"/>
+                            <a:cs typeface="Cambria Math" panose="02040503050406030204" pitchFamily="18" charset="0"/>
+                          </a:rPr>
+                          <m:t>𝑛</m:t>
+                        </m:r>
+                      </m:e>
+                      <m:sup>
+                        <m:r>
+                          <a:rPr lang="en-US" sz="2800" i="1" dirty="0" smtClean="0">
+                            <a:latin typeface="Cambria Math" panose="02040503050406030204" pitchFamily="18" charset="0"/>
+                            <a:cs typeface="Cambria Math" panose="02040503050406030204" pitchFamily="18" charset="0"/>
+                          </a:rPr>
+                          <m:t>3</m:t>
+                        </m:r>
+                      </m:sup>
+                    </m:sSup>
+                    <m:r>
+                      <a:rPr lang="en-US" sz="2800" i="1" dirty="0" smtClean="0">
+                        <a:latin typeface="Cambria Math" panose="02040503050406030204" pitchFamily="18" charset="0"/>
+                      </a:rPr>
+                      <m:t>)</m:t>
+                    </m:r>
+                  </m:oMath>
+                </a14:m>
+                <a:endParaRPr lang="en-US" altLang="zh-CN" sz="2800" dirty="0"/>
+              </a:p>
+            </p:txBody>
+          </p:sp>
+        </mc:Choice>
+        <mc:Fallback>
+          <p:sp>
+            <p:nvSpPr>
+              <p:cNvPr id="3" name="Content Placeholder 2"/>
+              <p:cNvSpPr>
+                <a:spLocks noRot="1" noChangeAspect="1" noMove="1" noResize="1" noEditPoints="1" noAdjustHandles="1" noChangeArrowheads="1" noChangeShapeType="1" noTextEdit="1"/>
+              </p:cNvSpPr>
+              <p:nvPr>
+                <p:ph idx="1"/>
+              </p:nvPr>
+            </p:nvSpPr>
+            <p:spPr>
+              <a:blipFill rotWithShape="1">
+                <a:blip r:embed="rId1"/>
+                <a:stretch>
+                  <a:fillRect l="-4" t="-3" r="2" b="3"/>
+                </a:stretch>
+              </a:blipFill>
+            </p:spPr>
+            <p:txBody>
+              <a:bodyPr/>
+              <a:lstStyle/>
+              <a:p>
+                <a:r>
+                  <a:rPr lang="zh-CN" altLang="en-US">
+                    <a:noFill/>
+                  </a:rPr>
+                  <a:t> </a:t>
+                </a:r>
+              </a:p>
+            </p:txBody>
+          </p:sp>
+        </mc:Fallback>
+      </mc:AlternateContent>
       <p:sp>
         <p:nvSpPr>
           <p:cNvPr id="4" name="Footer Placeholder 3"/>
@@ -7943,7 +9298,83 @@
           <a:bodyPr/>
           <a:lstStyle/>
           <a:p>
-            <a:endParaRPr lang="en-US" dirty="0"/>
+            <a:r>
+              <a:rPr lang="en-US" altLang="zh-CN" dirty="0"/>
+              <a:t>Bridging Neuroscience and Machine Learning:</a:t>
+            </a:r>
+            <a:endParaRPr lang="en-US" altLang="zh-CN" dirty="0"/>
+          </a:p>
+          <a:p>
+            <a:pPr lvl="2"/>
+            <a:r>
+              <a:rPr lang="en-US" altLang="zh-CN" dirty="0"/>
+              <a:t>The brain doesn’t use BPTT, yet learns long-term dependencies.</a:t>
+            </a:r>
+            <a:endParaRPr lang="en-US" altLang="zh-CN" dirty="0"/>
+          </a:p>
+          <a:p>
+            <a:pPr lvl="2"/>
+            <a:r>
+              <a:rPr lang="en-US" altLang="zh-CN" dirty="0"/>
+              <a:t>e-prop’s insight: let error signals meet historical traces in the present.</a:t>
+            </a:r>
+            <a:endParaRPr lang="en-US" altLang="zh-CN" dirty="0"/>
+          </a:p>
+          <a:p>
+            <a:pPr marL="228600" lvl="2" algn="l">
+              <a:spcBef>
+                <a:spcPts val="1000"/>
+              </a:spcBef>
+              <a:buClrTx/>
+              <a:buSzTx/>
+            </a:pPr>
+            <a:r>
+              <a:rPr lang="en-US" altLang="zh-CN" sz="2800" dirty="0"/>
+              <a:t>How It Works:</a:t>
+            </a:r>
+            <a:endParaRPr lang="en-US" altLang="zh-CN" sz="2800" dirty="0"/>
+          </a:p>
+          <a:p>
+            <a:pPr lvl="2" algn="l">
+              <a:spcBef>
+                <a:spcPts val="500"/>
+              </a:spcBef>
+              <a:buClrTx/>
+              <a:buSzTx/>
+            </a:pPr>
+            <a:r>
+              <a:rPr lang="en-US" altLang="zh-CN" sz="2000" dirty="0"/>
+              <a:t>Eligibility traces carry the past forward.</a:t>
+            </a:r>
+            <a:endParaRPr lang="en-US" altLang="zh-CN" sz="2000" dirty="0"/>
+          </a:p>
+          <a:p>
+            <a:pPr lvl="2" algn="l">
+              <a:spcBef>
+                <a:spcPts val="500"/>
+              </a:spcBef>
+              <a:buClrTx/>
+              <a:buSzTx/>
+            </a:pPr>
+            <a:r>
+              <a:rPr lang="en-US" altLang="zh-CN" sz="2000" dirty="0"/>
+              <a:t>Learning signals (errors) arrive from the top.</a:t>
+            </a:r>
+            <a:endParaRPr lang="en-US" altLang="zh-CN" sz="2000" dirty="0"/>
+          </a:p>
+          <a:p>
+            <a:pPr lvl="2" algn="l">
+              <a:spcBef>
+                <a:spcPts val="500"/>
+              </a:spcBef>
+              <a:buClrTx/>
+              <a:buSzTx/>
+            </a:pPr>
+            <a:r>
+              <a:rPr lang="en-US" altLang="zh-CN" sz="2000" dirty="0"/>
+              <a:t>Weight update = learning signal × eligibility trace.</a:t>
+            </a:r>
+            <a:endParaRPr lang="en-US" altLang="zh-CN" sz="2000" dirty="0"/>
           </a:p>
         </p:txBody>
       </p:sp>
@@ -8050,25 +9481,1338 @@
           </a:p>
         </p:txBody>
       </p:sp>
-      <p:sp>
-        <p:nvSpPr>
-          <p:cNvPr id="3" name="Content Placeholder 2"/>
-          <p:cNvSpPr>
-            <a:spLocks noGrp="1"/>
-          </p:cNvSpPr>
-          <p:nvPr>
-            <p:ph idx="1"/>
-          </p:nvPr>
-        </p:nvSpPr>
-        <p:spPr/>
-        <p:txBody>
-          <a:bodyPr/>
-          <a:lstStyle/>
-          <a:p>
-            <a:endParaRPr lang="en-US" dirty="0"/>
-          </a:p>
-        </p:txBody>
-      </p:sp>
+      <mc:AlternateContent xmlns:mc="http://schemas.openxmlformats.org/markup-compatibility/2006">
+        <mc:Choice xmlns:a14="http://schemas.microsoft.com/office/drawing/2010/main" Requires="a14">
+          <p:sp>
+            <p:nvSpPr>
+              <p:cNvPr id="3" name="Content Placeholder 2"/>
+              <p:cNvSpPr>
+                <a:spLocks noGrp="1"/>
+              </p:cNvSpPr>
+              <p:nvPr>
+                <p:ph idx="1"/>
+              </p:nvPr>
+            </p:nvSpPr>
+            <p:spPr>
+              <a:xfrm>
+                <a:off x="193675" y="1127760"/>
+                <a:ext cx="11805285" cy="5172075"/>
+              </a:xfrm>
+            </p:spPr>
+            <p:txBody>
+              <a:bodyPr>
+                <a:normAutofit lnSpcReduction="10000"/>
+              </a:bodyPr>
+              <a:lstStyle/>
+              <a:p>
+                <a:r>
+                  <a:rPr lang="en-US" altLang="zh-CN" dirty="0"/>
+                  <a:t>The Problem: Previous online algorithms still need </a:t>
+                </a:r>
+                <a14:m>
+                  <m:oMath xmlns:m="http://schemas.openxmlformats.org/officeDocument/2006/math">
+                    <m:r>
+                      <a:rPr lang="en-US" i="1" dirty="0" smtClean="0">
+                        <a:latin typeface="Cambria Math" panose="02040503050406030204" pitchFamily="18" charset="0"/>
+                      </a:rPr>
+                      <m:t>𝑂</m:t>
+                    </m:r>
+                    <m:r>
+                      <a:rPr lang="en-US" i="1" dirty="0" smtClean="0">
+                        <a:latin typeface="Cambria Math" panose="02040503050406030204" pitchFamily="18" charset="0"/>
+                      </a:rPr>
+                      <m:t>(</m:t>
+                    </m:r>
+                    <m:sSup>
+                      <m:sSupPr>
+                        <m:ctrlPr>
+                          <a:rPr lang="en-US" i="1" dirty="0" smtClean="0">
+                            <a:latin typeface="Cambria Math" panose="02040503050406030204" pitchFamily="18" charset="0"/>
+                            <a:cs typeface="Cambria Math" panose="02040503050406030204" pitchFamily="18" charset="0"/>
+                          </a:rPr>
+                        </m:ctrlPr>
+                      </m:sSupPr>
+                      <m:e>
+                        <m:r>
+                          <a:rPr lang="en-US" i="1" dirty="0" smtClean="0">
+                            <a:latin typeface="Cambria Math" panose="02040503050406030204" pitchFamily="18" charset="0"/>
+                            <a:cs typeface="Cambria Math" panose="02040503050406030204" pitchFamily="18" charset="0"/>
+                          </a:rPr>
+                          <m:t>𝑛</m:t>
+                        </m:r>
+                      </m:e>
+                      <m:sup>
+                        <m:r>
+                          <a:rPr lang="en-US" i="1" dirty="0" smtClean="0">
+                            <a:latin typeface="Cambria Math" panose="02040503050406030204" pitchFamily="18" charset="0"/>
+                            <a:cs typeface="Cambria Math" panose="02040503050406030204" pitchFamily="18" charset="0"/>
+                          </a:rPr>
+                          <m:t>2</m:t>
+                        </m:r>
+                      </m:sup>
+                    </m:sSup>
+                    <m:r>
+                      <a:rPr lang="en-US" i="1" dirty="0" smtClean="0">
+                        <a:latin typeface="Cambria Math" panose="02040503050406030204" pitchFamily="18" charset="0"/>
+                      </a:rPr>
+                      <m:t>)</m:t>
+                    </m:r>
+                  </m:oMath>
+                </a14:m>
+                <a:r>
+                  <a:rPr lang="en-US" altLang="zh-CN" dirty="0"/>
+                  <a:t> memory</a:t>
+                </a:r>
+                <a:endParaRPr lang="en-US" altLang="zh-CN" dirty="0"/>
+              </a:p>
+              <a:p>
+                <a:r>
+                  <a:rPr lang="en-US" altLang="zh-CN" dirty="0"/>
+                  <a:t>OTTT’s Answer: Track only presynaptic activity — </a:t>
+                </a:r>
+                <a14:m>
+                  <m:oMath xmlns:m="http://schemas.openxmlformats.org/officeDocument/2006/math">
+                    <m:r>
+                      <a:rPr lang="en-US" i="1" dirty="0" smtClean="0">
+                        <a:latin typeface="Cambria Math" panose="02040503050406030204" pitchFamily="18" charset="0"/>
+                      </a:rPr>
+                      <m:t>𝑂</m:t>
+                    </m:r>
+                    <m:r>
+                      <a:rPr lang="en-US" i="1" dirty="0" smtClean="0">
+                        <a:latin typeface="Cambria Math" panose="02040503050406030204" pitchFamily="18" charset="0"/>
+                      </a:rPr>
+                      <m:t>(</m:t>
+                    </m:r>
+                    <m:r>
+                      <a:rPr lang="en-US" i="1" dirty="0" smtClean="0">
+                        <a:latin typeface="Cambria Math" panose="02040503050406030204" pitchFamily="18" charset="0"/>
+                      </a:rPr>
+                      <m:t>𝑛</m:t>
+                    </m:r>
+                    <m:r>
+                      <a:rPr lang="en-US" i="1" dirty="0" smtClean="0">
+                        <a:latin typeface="Cambria Math" panose="02040503050406030204" pitchFamily="18" charset="0"/>
+                      </a:rPr>
+                      <m:t>)</m:t>
+                    </m:r>
+                  </m:oMath>
+                </a14:m>
+                <a:r>
+                  <a:rPr lang="en-US" altLang="zh-CN" dirty="0"/>
+                  <a:t> memory.\</a:t>
+                </a:r>
+                <a:endParaRPr lang="en-US" altLang="zh-CN" dirty="0"/>
+              </a:p>
+              <a:p>
+                <a:r>
+                  <a:rPr lang="en-US" altLang="zh-CN" dirty="0"/>
+                  <a:t>BPTT’s temporal dependency has two paths:</a:t>
+                </a:r>
+                <a:endParaRPr lang="en-US" altLang="zh-CN" dirty="0"/>
+              </a:p>
+              <a:p>
+                <a:pPr lvl="1"/>
+                <a:r>
+                  <a:rPr lang="en-US" altLang="zh-CN" sz="2000" dirty="0"/>
+                  <a:t>Direct path: </a:t>
+                </a:r>
+                <a14:m>
+                  <m:oMath xmlns:m="http://schemas.openxmlformats.org/officeDocument/2006/math">
+                    <m:f>
+                      <m:fPr>
+                        <m:ctrlPr>
+                          <a:rPr lang="en-US" altLang="zh-CN" sz="2000" dirty="0"/>
+                        </m:ctrlPr>
+                      </m:fPr>
+                      <m:num>
+                        <m:r>
+                          <a:rPr lang="en-US" altLang="zh-CN" sz="2000" dirty="0">
+                            <a:latin typeface="Cambria Math" panose="02040503050406030204" pitchFamily="18" charset="0"/>
+                          </a:rPr>
+                          <m:t>𝜕</m:t>
+                        </m:r>
+                        <m:sSup>
+                          <m:sSupPr>
+                            <m:ctrlPr>
+                              <a:rPr lang="en-US" altLang="zh-CN" sz="2000" dirty="0"/>
+                            </m:ctrlPr>
+                          </m:sSupPr>
+                          <m:e>
+                            <m:r>
+                              <a:rPr lang="en-US" altLang="zh-CN" sz="2000" dirty="0">
+                                <a:latin typeface="Cambria Math" panose="02040503050406030204" pitchFamily="18" charset="0"/>
+                              </a:rPr>
+                              <m:t>𝐮</m:t>
+                            </m:r>
+                          </m:e>
+                          <m:sup>
+                            <m:r>
+                              <a:rPr lang="en-US" altLang="zh-CN" sz="2000" dirty="0">
+                                <a:latin typeface="Cambria Math" panose="02040503050406030204" pitchFamily="18" charset="0"/>
+                              </a:rPr>
+                              <m:t>𝑙</m:t>
+                            </m:r>
+                            <m:r>
+                              <a:rPr lang="en-US" altLang="zh-CN" sz="2000" dirty="0">
+                                <a:latin typeface="Cambria Math" panose="02040503050406030204" pitchFamily="18" charset="0"/>
+                              </a:rPr>
+                              <m:t>+</m:t>
+                            </m:r>
+                            <m:r>
+                              <a:rPr lang="en-US" altLang="zh-CN" sz="2000" dirty="0">
+                                <a:latin typeface="Cambria Math" panose="02040503050406030204" pitchFamily="18" charset="0"/>
+                              </a:rPr>
+                              <m:t>1</m:t>
+                            </m:r>
+                          </m:sup>
+                        </m:sSup>
+                        <m:r>
+                          <a:rPr lang="en-US" altLang="zh-CN" sz="2000" dirty="0">
+                            <a:latin typeface="Cambria Math" panose="02040503050406030204" pitchFamily="18" charset="0"/>
+                          </a:rPr>
+                          <m:t>[</m:t>
+                        </m:r>
+                        <m:r>
+                          <a:rPr lang="en-US" altLang="zh-CN" sz="2000" dirty="0">
+                            <a:latin typeface="Cambria Math" panose="02040503050406030204" pitchFamily="18" charset="0"/>
+                          </a:rPr>
+                          <m:t>𝑖</m:t>
+                        </m:r>
+                        <m:r>
+                          <a:rPr lang="en-US" altLang="zh-CN" sz="2000" dirty="0">
+                            <a:latin typeface="Cambria Math" panose="02040503050406030204" pitchFamily="18" charset="0"/>
+                          </a:rPr>
+                          <m:t>+</m:t>
+                        </m:r>
+                        <m:r>
+                          <a:rPr lang="en-US" altLang="zh-CN" sz="2000" dirty="0">
+                            <a:latin typeface="Cambria Math" panose="02040503050406030204" pitchFamily="18" charset="0"/>
+                          </a:rPr>
+                          <m:t>1</m:t>
+                        </m:r>
+                        <m:r>
+                          <a:rPr lang="en-US" altLang="zh-CN" sz="2000" dirty="0">
+                            <a:latin typeface="Cambria Math" panose="02040503050406030204" pitchFamily="18" charset="0"/>
+                          </a:rPr>
+                          <m:t>]</m:t>
+                        </m:r>
+                      </m:num>
+                      <m:den>
+                        <m:r>
+                          <a:rPr lang="en-US" altLang="zh-CN" sz="2000" dirty="0">
+                            <a:latin typeface="Cambria Math" panose="02040503050406030204" pitchFamily="18" charset="0"/>
+                          </a:rPr>
+                          <m:t>𝜕</m:t>
+                        </m:r>
+                        <m:sSup>
+                          <m:sSupPr>
+                            <m:ctrlPr>
+                              <a:rPr lang="en-US" altLang="zh-CN" sz="2000" dirty="0"/>
+                            </m:ctrlPr>
+                          </m:sSupPr>
+                          <m:e>
+                            <m:r>
+                              <a:rPr lang="en-US" altLang="zh-CN" sz="2000" dirty="0">
+                                <a:latin typeface="Cambria Math" panose="02040503050406030204" pitchFamily="18" charset="0"/>
+                              </a:rPr>
+                              <m:t>𝐮</m:t>
+                            </m:r>
+                          </m:e>
+                          <m:sup>
+                            <m:r>
+                              <a:rPr lang="en-US" altLang="zh-CN" sz="2000" dirty="0">
+                                <a:latin typeface="Cambria Math" panose="02040503050406030204" pitchFamily="18" charset="0"/>
+                              </a:rPr>
+                              <m:t>𝑙</m:t>
+                            </m:r>
+                            <m:r>
+                              <a:rPr lang="en-US" altLang="zh-CN" sz="2000" dirty="0">
+                                <a:latin typeface="Cambria Math" panose="02040503050406030204" pitchFamily="18" charset="0"/>
+                              </a:rPr>
+                              <m:t>+</m:t>
+                            </m:r>
+                            <m:r>
+                              <a:rPr lang="en-US" altLang="zh-CN" sz="2000" dirty="0">
+                                <a:latin typeface="Cambria Math" panose="02040503050406030204" pitchFamily="18" charset="0"/>
+                              </a:rPr>
+                              <m:t>1</m:t>
+                            </m:r>
+                          </m:sup>
+                        </m:sSup>
+                        <m:r>
+                          <a:rPr lang="en-US" altLang="zh-CN" sz="2000" dirty="0">
+                            <a:latin typeface="Cambria Math" panose="02040503050406030204" pitchFamily="18" charset="0"/>
+                          </a:rPr>
+                          <m:t>[</m:t>
+                        </m:r>
+                        <m:r>
+                          <a:rPr lang="en-US" altLang="zh-CN" sz="2000" dirty="0">
+                            <a:latin typeface="Cambria Math" panose="02040503050406030204" pitchFamily="18" charset="0"/>
+                          </a:rPr>
+                          <m:t>𝑖</m:t>
+                        </m:r>
+                        <m:r>
+                          <a:rPr lang="en-US" altLang="zh-CN" sz="2000" dirty="0">
+                            <a:latin typeface="Cambria Math" panose="02040503050406030204" pitchFamily="18" charset="0"/>
+                          </a:rPr>
+                          <m:t>]</m:t>
+                        </m:r>
+                      </m:den>
+                    </m:f>
+                    <m:r>
+                      <a:rPr lang="en-US" altLang="zh-CN" sz="2000" dirty="0">
+                        <a:latin typeface="Cambria Math" panose="02040503050406030204" pitchFamily="18" charset="0"/>
+                      </a:rPr>
+                      <m:t>=</m:t>
+                    </m:r>
+                    <m:r>
+                      <a:rPr lang="en-US" altLang="zh-CN" sz="2000" dirty="0">
+                        <a:latin typeface="Cambria Math" panose="02040503050406030204" pitchFamily="18" charset="0"/>
+                      </a:rPr>
+                      <m:t>𝜆</m:t>
+                    </m:r>
+                    <m:r>
+                      <a:rPr lang="en-US" altLang="zh-CN" sz="2000" dirty="0">
+                        <a:latin typeface="Cambria Math" panose="02040503050406030204" pitchFamily="18" charset="0"/>
+                      </a:rPr>
+                      <m:t>𝐈</m:t>
+                    </m:r>
+                  </m:oMath>
+                </a14:m>
+                <a:r>
+                  <a:rPr lang="en-US" altLang="zh-CN" sz="2000" dirty="0"/>
+                  <a:t> (leakage)</a:t>
+                </a:r>
+                <a:endParaRPr lang="en-US" altLang="zh-CN" sz="2000" dirty="0"/>
+              </a:p>
+              <a:p>
+                <a:pPr lvl="1"/>
+                <a:r>
+                  <a:rPr lang="en-US" altLang="zh-CN" sz="2000" dirty="0"/>
+                  <a:t>Spike path: </a:t>
+                </a:r>
+                <a14:m>
+                  <m:oMath xmlns:m="http://schemas.openxmlformats.org/officeDocument/2006/math">
+                    <m:f>
+                      <m:fPr>
+                        <m:ctrlPr>
+                          <a:rPr lang="en-US" altLang="zh-CN" sz="2000" dirty="0"/>
+                        </m:ctrlPr>
+                      </m:fPr>
+                      <m:num>
+                        <m:r>
+                          <a:rPr lang="en-US" altLang="zh-CN" sz="2000" dirty="0">
+                            <a:latin typeface="Cambria Math" panose="02040503050406030204" pitchFamily="18" charset="0"/>
+                          </a:rPr>
+                          <m:t>𝜕</m:t>
+                        </m:r>
+                        <m:sSup>
+                          <m:sSupPr>
+                            <m:ctrlPr>
+                              <a:rPr lang="en-US" altLang="zh-CN" sz="2000" dirty="0"/>
+                            </m:ctrlPr>
+                          </m:sSupPr>
+                          <m:e>
+                            <m:r>
+                              <a:rPr lang="en-US" altLang="zh-CN" sz="2000" dirty="0">
+                                <a:latin typeface="Cambria Math" panose="02040503050406030204" pitchFamily="18" charset="0"/>
+                              </a:rPr>
+                              <m:t>𝐮</m:t>
+                            </m:r>
+                          </m:e>
+                          <m:sup>
+                            <m:r>
+                              <a:rPr lang="en-US" altLang="zh-CN" sz="2000" dirty="0">
+                                <a:latin typeface="Cambria Math" panose="02040503050406030204" pitchFamily="18" charset="0"/>
+                              </a:rPr>
+                              <m:t>𝑙</m:t>
+                            </m:r>
+                            <m:r>
+                              <a:rPr lang="en-US" altLang="zh-CN" sz="2000" dirty="0">
+                                <a:latin typeface="Cambria Math" panose="02040503050406030204" pitchFamily="18" charset="0"/>
+                              </a:rPr>
+                              <m:t>+</m:t>
+                            </m:r>
+                            <m:r>
+                              <a:rPr lang="en-US" altLang="zh-CN" sz="2000" dirty="0">
+                                <a:latin typeface="Cambria Math" panose="02040503050406030204" pitchFamily="18" charset="0"/>
+                              </a:rPr>
+                              <m:t>1</m:t>
+                            </m:r>
+                          </m:sup>
+                        </m:sSup>
+                        <m:r>
+                          <a:rPr lang="en-US" altLang="zh-CN" sz="2000" dirty="0">
+                            <a:latin typeface="Cambria Math" panose="02040503050406030204" pitchFamily="18" charset="0"/>
+                          </a:rPr>
+                          <m:t>[</m:t>
+                        </m:r>
+                        <m:r>
+                          <a:rPr lang="en-US" altLang="zh-CN" sz="2000" dirty="0">
+                            <a:latin typeface="Cambria Math" panose="02040503050406030204" pitchFamily="18" charset="0"/>
+                          </a:rPr>
+                          <m:t>𝑖</m:t>
+                        </m:r>
+                        <m:r>
+                          <a:rPr lang="en-US" altLang="zh-CN" sz="2000" dirty="0">
+                            <a:latin typeface="Cambria Math" panose="02040503050406030204" pitchFamily="18" charset="0"/>
+                          </a:rPr>
+                          <m:t>+</m:t>
+                        </m:r>
+                        <m:r>
+                          <a:rPr lang="en-US" altLang="zh-CN" sz="2000" dirty="0">
+                            <a:latin typeface="Cambria Math" panose="02040503050406030204" pitchFamily="18" charset="0"/>
+                          </a:rPr>
+                          <m:t>1</m:t>
+                        </m:r>
+                        <m:r>
+                          <a:rPr lang="en-US" altLang="zh-CN" sz="2000" dirty="0">
+                            <a:latin typeface="Cambria Math" panose="02040503050406030204" pitchFamily="18" charset="0"/>
+                          </a:rPr>
+                          <m:t>]</m:t>
+                        </m:r>
+                      </m:num>
+                      <m:den>
+                        <m:r>
+                          <a:rPr lang="en-US" altLang="zh-CN" sz="2000" dirty="0">
+                            <a:latin typeface="Cambria Math" panose="02040503050406030204" pitchFamily="18" charset="0"/>
+                          </a:rPr>
+                          <m:t>𝜕</m:t>
+                        </m:r>
+                        <m:sSup>
+                          <m:sSupPr>
+                            <m:ctrlPr>
+                              <a:rPr lang="en-US" altLang="zh-CN" sz="2000" dirty="0"/>
+                            </m:ctrlPr>
+                          </m:sSupPr>
+                          <m:e>
+                            <m:r>
+                              <a:rPr lang="en-US" altLang="zh-CN" sz="2000" dirty="0">
+                                <a:latin typeface="Cambria Math" panose="02040503050406030204" pitchFamily="18" charset="0"/>
+                              </a:rPr>
+                              <m:t>𝐬</m:t>
+                            </m:r>
+                          </m:e>
+                          <m:sup>
+                            <m:r>
+                              <a:rPr lang="en-US" altLang="zh-CN" sz="2000" dirty="0">
+                                <a:latin typeface="Cambria Math" panose="02040503050406030204" pitchFamily="18" charset="0"/>
+                              </a:rPr>
+                              <m:t>𝑙</m:t>
+                            </m:r>
+                            <m:r>
+                              <a:rPr lang="en-US" altLang="zh-CN" sz="2000" dirty="0">
+                                <a:latin typeface="Cambria Math" panose="02040503050406030204" pitchFamily="18" charset="0"/>
+                              </a:rPr>
+                              <m:t>+</m:t>
+                            </m:r>
+                            <m:r>
+                              <a:rPr lang="en-US" altLang="zh-CN" sz="2000" dirty="0">
+                                <a:latin typeface="Cambria Math" panose="02040503050406030204" pitchFamily="18" charset="0"/>
+                              </a:rPr>
+                              <m:t>1</m:t>
+                            </m:r>
+                          </m:sup>
+                        </m:sSup>
+                        <m:r>
+                          <a:rPr lang="en-US" altLang="zh-CN" sz="2000" dirty="0">
+                            <a:latin typeface="Cambria Math" panose="02040503050406030204" pitchFamily="18" charset="0"/>
+                          </a:rPr>
+                          <m:t>[</m:t>
+                        </m:r>
+                        <m:r>
+                          <a:rPr lang="en-US" altLang="zh-CN" sz="2000" dirty="0">
+                            <a:latin typeface="Cambria Math" panose="02040503050406030204" pitchFamily="18" charset="0"/>
+                          </a:rPr>
+                          <m:t>𝑖</m:t>
+                        </m:r>
+                        <m:r>
+                          <a:rPr lang="en-US" altLang="zh-CN" sz="2000" dirty="0">
+                            <a:latin typeface="Cambria Math" panose="02040503050406030204" pitchFamily="18" charset="0"/>
+                          </a:rPr>
+                          <m:t>]</m:t>
+                        </m:r>
+                      </m:den>
+                    </m:f>
+                    <m:r>
+                      <a:rPr lang="en-US" altLang="zh-CN" sz="2000" dirty="0">
+                        <a:latin typeface="Cambria Math" panose="02040503050406030204" pitchFamily="18" charset="0"/>
+                      </a:rPr>
+                      <m:t>⋅</m:t>
+                    </m:r>
+                    <m:f>
+                      <m:fPr>
+                        <m:ctrlPr>
+                          <a:rPr lang="en-US" altLang="zh-CN" sz="2000" dirty="0"/>
+                        </m:ctrlPr>
+                      </m:fPr>
+                      <m:num>
+                        <m:r>
+                          <a:rPr lang="en-US" altLang="zh-CN" sz="2000" dirty="0">
+                            <a:latin typeface="Cambria Math" panose="02040503050406030204" pitchFamily="18" charset="0"/>
+                          </a:rPr>
+                          <m:t>𝜕</m:t>
+                        </m:r>
+                        <m:sSup>
+                          <m:sSupPr>
+                            <m:ctrlPr>
+                              <a:rPr lang="en-US" altLang="zh-CN" sz="2000" dirty="0"/>
+                            </m:ctrlPr>
+                          </m:sSupPr>
+                          <m:e>
+                            <m:r>
+                              <a:rPr lang="en-US" altLang="zh-CN" sz="2000" dirty="0">
+                                <a:latin typeface="Cambria Math" panose="02040503050406030204" pitchFamily="18" charset="0"/>
+                              </a:rPr>
+                              <m:t>𝐬</m:t>
+                            </m:r>
+                          </m:e>
+                          <m:sup>
+                            <m:r>
+                              <a:rPr lang="en-US" altLang="zh-CN" sz="2000" dirty="0">
+                                <a:latin typeface="Cambria Math" panose="02040503050406030204" pitchFamily="18" charset="0"/>
+                              </a:rPr>
+                              <m:t>𝑙</m:t>
+                            </m:r>
+                            <m:r>
+                              <a:rPr lang="en-US" altLang="zh-CN" sz="2000" dirty="0">
+                                <a:latin typeface="Cambria Math" panose="02040503050406030204" pitchFamily="18" charset="0"/>
+                              </a:rPr>
+                              <m:t>+</m:t>
+                            </m:r>
+                            <m:r>
+                              <a:rPr lang="en-US" altLang="zh-CN" sz="2000" dirty="0">
+                                <a:latin typeface="Cambria Math" panose="02040503050406030204" pitchFamily="18" charset="0"/>
+                              </a:rPr>
+                              <m:t>1</m:t>
+                            </m:r>
+                          </m:sup>
+                        </m:sSup>
+                        <m:r>
+                          <a:rPr lang="en-US" altLang="zh-CN" sz="2000" dirty="0">
+                            <a:latin typeface="Cambria Math" panose="02040503050406030204" pitchFamily="18" charset="0"/>
+                          </a:rPr>
+                          <m:t>[</m:t>
+                        </m:r>
+                        <m:r>
+                          <a:rPr lang="en-US" altLang="zh-CN" sz="2000" dirty="0">
+                            <a:latin typeface="Cambria Math" panose="02040503050406030204" pitchFamily="18" charset="0"/>
+                          </a:rPr>
+                          <m:t>𝑖</m:t>
+                        </m:r>
+                        <m:r>
+                          <a:rPr lang="en-US" altLang="zh-CN" sz="2000" dirty="0">
+                            <a:latin typeface="Cambria Math" panose="02040503050406030204" pitchFamily="18" charset="0"/>
+                          </a:rPr>
+                          <m:t>]</m:t>
+                        </m:r>
+                      </m:num>
+                      <m:den>
+                        <m:r>
+                          <a:rPr lang="en-US" altLang="zh-CN" sz="2000" dirty="0">
+                            <a:latin typeface="Cambria Math" panose="02040503050406030204" pitchFamily="18" charset="0"/>
+                          </a:rPr>
+                          <m:t>𝜕</m:t>
+                        </m:r>
+                        <m:sSup>
+                          <m:sSupPr>
+                            <m:ctrlPr>
+                              <a:rPr lang="en-US" altLang="zh-CN" sz="2000" dirty="0"/>
+                            </m:ctrlPr>
+                          </m:sSupPr>
+                          <m:e>
+                            <m:r>
+                              <a:rPr lang="en-US" altLang="zh-CN" sz="2000" dirty="0">
+                                <a:latin typeface="Cambria Math" panose="02040503050406030204" pitchFamily="18" charset="0"/>
+                              </a:rPr>
+                              <m:t>𝐮</m:t>
+                            </m:r>
+                          </m:e>
+                          <m:sup>
+                            <m:r>
+                              <a:rPr lang="en-US" altLang="zh-CN" sz="2000" dirty="0">
+                                <a:latin typeface="Cambria Math" panose="02040503050406030204" pitchFamily="18" charset="0"/>
+                              </a:rPr>
+                              <m:t>𝑙</m:t>
+                            </m:r>
+                            <m:r>
+                              <a:rPr lang="en-US" altLang="zh-CN" sz="2000" dirty="0">
+                                <a:latin typeface="Cambria Math" panose="02040503050406030204" pitchFamily="18" charset="0"/>
+                              </a:rPr>
+                              <m:t>+</m:t>
+                            </m:r>
+                            <m:r>
+                              <a:rPr lang="en-US" altLang="zh-CN" sz="2000" dirty="0">
+                                <a:latin typeface="Cambria Math" panose="02040503050406030204" pitchFamily="18" charset="0"/>
+                              </a:rPr>
+                              <m:t>1</m:t>
+                            </m:r>
+                          </m:sup>
+                        </m:sSup>
+                        <m:r>
+                          <a:rPr lang="en-US" altLang="zh-CN" sz="2000" dirty="0">
+                            <a:latin typeface="Cambria Math" panose="02040503050406030204" pitchFamily="18" charset="0"/>
+                          </a:rPr>
+                          <m:t>[</m:t>
+                        </m:r>
+                        <m:r>
+                          <a:rPr lang="en-US" altLang="zh-CN" sz="2000" dirty="0">
+                            <a:latin typeface="Cambria Math" panose="02040503050406030204" pitchFamily="18" charset="0"/>
+                          </a:rPr>
+                          <m:t>𝑖</m:t>
+                        </m:r>
+                        <m:r>
+                          <a:rPr lang="en-US" altLang="zh-CN" sz="2000" dirty="0">
+                            <a:latin typeface="Cambria Math" panose="02040503050406030204" pitchFamily="18" charset="0"/>
+                          </a:rPr>
+                          <m:t>]</m:t>
+                        </m:r>
+                      </m:den>
+                    </m:f>
+                  </m:oMath>
+                </a14:m>
+                <a:r>
+                  <a:rPr lang="en-US" altLang="zh-CN" sz="2000" dirty="0"/>
+                  <a:t>(reset via spikes)</a:t>
+                </a:r>
+                <a:endParaRPr lang="en-US" altLang="zh-CN" sz="2000" dirty="0"/>
+              </a:p>
+              <a:p>
+                <a:pPr lvl="1"/>
+                <a:r>
+                  <a:rPr lang="en-US" altLang="zh-CN" sz="2000" dirty="0"/>
+                  <a:t>OTTT drops the spike path because </a:t>
+                </a:r>
+                <a14:m>
+                  <m:oMath xmlns:m="http://schemas.openxmlformats.org/officeDocument/2006/math">
+                    <m:f>
+                      <m:fPr>
+                        <m:ctrlPr>
+                          <a:rPr lang="en-US" altLang="zh-CN" sz="2000" i="1" dirty="0">
+                            <a:latin typeface="Cambria Math" panose="02040503050406030204" pitchFamily="18" charset="0"/>
+                            <a:cs typeface="Cambria Math" panose="02040503050406030204" pitchFamily="18" charset="0"/>
+                            <a:sym typeface="+mn-ea"/>
+                          </a:rPr>
+                        </m:ctrlPr>
+                      </m:fPr>
+                      <m:num>
+                        <m:r>
+                          <a:rPr lang="en-US" altLang="zh-CN" sz="2000" i="1" dirty="0">
+                            <a:latin typeface="Cambria Math" panose="02040503050406030204" pitchFamily="18" charset="0"/>
+                            <a:cs typeface="Cambria Math" panose="02040503050406030204" pitchFamily="18" charset="0"/>
+                            <a:sym typeface="+mn-ea"/>
+                          </a:rPr>
+                          <m:t>𝜕</m:t>
+                        </m:r>
+                        <m:r>
+                          <a:rPr lang="en-US" altLang="zh-CN" sz="2000" i="1" dirty="0">
+                            <a:latin typeface="Cambria Math" panose="02040503050406030204" pitchFamily="18" charset="0"/>
+                            <a:cs typeface="Cambria Math" panose="02040503050406030204" pitchFamily="18" charset="0"/>
+                            <a:sym typeface="+mn-ea"/>
+                          </a:rPr>
+                          <m:t>𝐬</m:t>
+                        </m:r>
+                      </m:num>
+                      <m:den>
+                        <m:r>
+                          <a:rPr lang="en-US" altLang="zh-CN" sz="2000" i="1" dirty="0">
+                            <a:latin typeface="Cambria Math" panose="02040503050406030204" pitchFamily="18" charset="0"/>
+                            <a:cs typeface="Cambria Math" panose="02040503050406030204" pitchFamily="18" charset="0"/>
+                            <a:sym typeface="+mn-ea"/>
+                          </a:rPr>
+                          <m:t>𝜕</m:t>
+                        </m:r>
+                        <m:r>
+                          <a:rPr lang="en-US" altLang="zh-CN" sz="2000" i="1" dirty="0">
+                            <a:latin typeface="Cambria Math" panose="02040503050406030204" pitchFamily="18" charset="0"/>
+                            <a:cs typeface="Cambria Math" panose="02040503050406030204" pitchFamily="18" charset="0"/>
+                            <a:sym typeface="+mn-ea"/>
+                          </a:rPr>
+                          <m:t>𝐮</m:t>
+                        </m:r>
+                      </m:den>
+                    </m:f>
+                  </m:oMath>
+                </a14:m>
+                <a:r>
+                  <a:rPr lang="en-US" altLang="zh-CN" sz="2000" dirty="0"/>
+                  <a:t> (derivative of Heaviside) is 0 almost everywhere.</a:t>
+                </a:r>
+                <a:endParaRPr lang="en-US" altLang="zh-CN" sz="2000" dirty="0"/>
+              </a:p>
+              <a:p>
+                <a:pPr lvl="1"/>
+                <a:r>
+                  <a:rPr lang="en-US" altLang="zh-CN" sz="2000" dirty="0"/>
+                  <a:t>Result: </a:t>
+                </a:r>
+                <a14:m>
+                  <m:oMath xmlns:m="http://schemas.openxmlformats.org/officeDocument/2006/math">
+                    <m:nary>
+                      <m:naryPr>
+                        <m:chr m:val="∏"/>
+                        <m:limLoc m:val="subSup"/>
+                        <m:subHide m:val="on"/>
+                        <m:supHide m:val="on"/>
+                        <m:ctrlPr>
+                          <a:rPr lang="en-US" altLang="zh-CN" sz="2000" i="1" dirty="0">
+                            <a:latin typeface="Cambria Math" panose="02040503050406030204" pitchFamily="18" charset="0"/>
+                            <a:cs typeface="Cambria Math" panose="02040503050406030204" pitchFamily="18" charset="0"/>
+                            <a:sym typeface="+mn-ea"/>
+                          </a:rPr>
+                        </m:ctrlPr>
+                      </m:naryPr>
+                      <m:sub/>
+                      <m:sup/>
+                      <m:e>
+                        <m:r>
+                          <a:rPr lang="en-US" altLang="zh-CN" sz="2000" i="1" dirty="0">
+                            <a:latin typeface="Cambria Math" panose="02040503050406030204" pitchFamily="18" charset="0"/>
+                            <a:cs typeface="Cambria Math" panose="02040503050406030204" pitchFamily="18" charset="0"/>
+                            <a:sym typeface="+mn-ea"/>
+                          </a:rPr>
+                          <m:t>(</m:t>
+                        </m:r>
+                      </m:e>
+                    </m:nary>
+                    <m:r>
+                      <a:rPr lang="en-US" altLang="zh-CN" sz="2000" i="1" dirty="0">
+                        <a:latin typeface="Cambria Math" panose="02040503050406030204" pitchFamily="18" charset="0"/>
+                        <a:cs typeface="Cambria Math" panose="02040503050406030204" pitchFamily="18" charset="0"/>
+                        <a:sym typeface="+mn-ea"/>
+                      </a:rPr>
+                      <m:t>𝜆</m:t>
+                    </m:r>
+                    <m:r>
+                      <a:rPr lang="en-US" altLang="zh-CN" sz="2000" i="1" dirty="0">
+                        <a:latin typeface="Cambria Math" panose="02040503050406030204" pitchFamily="18" charset="0"/>
+                        <a:cs typeface="Cambria Math" panose="02040503050406030204" pitchFamily="18" charset="0"/>
+                        <a:sym typeface="+mn-ea"/>
+                      </a:rPr>
+                      <m:t>+</m:t>
+                    </m:r>
+                    <m:r>
+                      <a:rPr lang="en-US" altLang="zh-CN" sz="2000" i="1" dirty="0">
+                        <a:latin typeface="Cambria Math" panose="02040503050406030204" pitchFamily="18" charset="0"/>
+                        <a:cs typeface="Cambria Math" panose="02040503050406030204" pitchFamily="18" charset="0"/>
+                        <a:sym typeface="+mn-ea"/>
+                      </a:rPr>
+                      <m:t>0</m:t>
+                    </m:r>
+                    <m:r>
+                      <a:rPr lang="en-US" altLang="zh-CN" sz="2000" i="1" dirty="0">
+                        <a:latin typeface="Cambria Math" panose="02040503050406030204" pitchFamily="18" charset="0"/>
+                        <a:cs typeface="Cambria Math" panose="02040503050406030204" pitchFamily="18" charset="0"/>
+                        <a:sym typeface="+mn-ea"/>
+                      </a:rPr>
+                      <m:t>)=</m:t>
+                    </m:r>
+                    <m:sSup>
+                      <m:sSupPr>
+                        <m:ctrlPr>
+                          <a:rPr lang="en-US" altLang="zh-CN" sz="2000" i="1" dirty="0">
+                            <a:latin typeface="Cambria Math" panose="02040503050406030204" pitchFamily="18" charset="0"/>
+                            <a:cs typeface="Cambria Math" panose="02040503050406030204" pitchFamily="18" charset="0"/>
+                            <a:sym typeface="+mn-ea"/>
+                          </a:rPr>
+                        </m:ctrlPr>
+                      </m:sSupPr>
+                      <m:e>
+                        <m:r>
+                          <a:rPr lang="en-US" altLang="zh-CN" sz="2000" i="1" dirty="0">
+                            <a:latin typeface="Cambria Math" panose="02040503050406030204" pitchFamily="18" charset="0"/>
+                            <a:cs typeface="Cambria Math" panose="02040503050406030204" pitchFamily="18" charset="0"/>
+                            <a:sym typeface="+mn-ea"/>
+                          </a:rPr>
+                          <m:t>𝜆</m:t>
+                        </m:r>
+                      </m:e>
+                      <m:sup>
+                        <m:r>
+                          <a:rPr lang="en-US" altLang="zh-CN" sz="2000" i="1" dirty="0">
+                            <a:latin typeface="Cambria Math" panose="02040503050406030204" pitchFamily="18" charset="0"/>
+                            <a:cs typeface="Cambria Math" panose="02040503050406030204" pitchFamily="18" charset="0"/>
+                            <a:sym typeface="+mn-ea"/>
+                          </a:rPr>
+                          <m:t>𝑡</m:t>
+                        </m:r>
+                        <m:r>
+                          <a:rPr lang="en-US" altLang="zh-CN" sz="2000" i="1" dirty="0">
+                            <a:latin typeface="Cambria Math" panose="02040503050406030204" pitchFamily="18" charset="0"/>
+                            <a:cs typeface="Cambria Math" panose="02040503050406030204" pitchFamily="18" charset="0"/>
+                            <a:sym typeface="+mn-ea"/>
+                          </a:rPr>
+                          <m:t>−</m:t>
+                        </m:r>
+                        <m:r>
+                          <a:rPr lang="en-US" altLang="zh-CN" sz="2000" i="1" dirty="0">
+                            <a:latin typeface="Cambria Math" panose="02040503050406030204" pitchFamily="18" charset="0"/>
+                            <a:cs typeface="Cambria Math" panose="02040503050406030204" pitchFamily="18" charset="0"/>
+                            <a:sym typeface="+mn-ea"/>
+                          </a:rPr>
+                          <m:t>𝜏</m:t>
+                        </m:r>
+                      </m:sup>
+                    </m:sSup>
+                  </m:oMath>
+                </a14:m>
+                <a:r>
+                  <a:rPr lang="en-US" altLang="zh-CN" sz="2000" dirty="0"/>
+                  <a:t> — a simple exponential decay</a:t>
+                </a:r>
+                <a:endParaRPr lang="en-US" altLang="zh-CN" sz="2000" dirty="0"/>
+              </a:p>
+              <a:p>
+                <a:pPr marL="228600" lvl="1" algn="l">
+                  <a:spcBef>
+                    <a:spcPts val="1000"/>
+                  </a:spcBef>
+                  <a:buClrTx/>
+                  <a:buSzTx/>
+                </a:pPr>
+                <a:r>
+                  <a:rPr lang="en-US" altLang="zh-CN" sz="2800" dirty="0"/>
+                  <a:t>Core Update:</a:t>
+                </a:r>
+                <a:endParaRPr lang="en-US" altLang="zh-CN" sz="2800" dirty="0"/>
+              </a:p>
+              <a:p>
+                <a:pPr marL="228600" lvl="1" algn="l">
+                  <a:spcBef>
+                    <a:spcPts val="1000"/>
+                  </a:spcBef>
+                  <a:buClrTx/>
+                  <a:buSzTx/>
+                </a:pPr>
+                <a14:m>
+                  <m:oMath xmlns:m="http://schemas.openxmlformats.org/officeDocument/2006/math">
+                    <m:sSup>
+                      <m:sSupPr>
+                        <m:ctrlPr>
+                          <a:rPr lang="en-US" altLang="zh-CN" sz="2800" i="1" dirty="0">
+                            <a:latin typeface="Cambria Math" panose="02040503050406030204" pitchFamily="18" charset="0"/>
+                            <a:cs typeface="Cambria Math" panose="02040503050406030204" pitchFamily="18" charset="0"/>
+                          </a:rPr>
+                        </m:ctrlPr>
+                      </m:sSupPr>
+                      <m:e>
+                        <m:acc>
+                          <m:accPr>
+                            <m:ctrlPr>
+                              <a:rPr lang="en-US" altLang="zh-CN" sz="2800" i="1" dirty="0">
+                                <a:latin typeface="Cambria Math" panose="02040503050406030204" pitchFamily="18" charset="0"/>
+                                <a:cs typeface="Cambria Math" panose="02040503050406030204" pitchFamily="18" charset="0"/>
+                              </a:rPr>
+                            </m:ctrlPr>
+                          </m:accPr>
+                          <m:e>
+                            <m:r>
+                              <a:rPr lang="en-US" altLang="zh-CN" sz="2800" i="1" dirty="0">
+                                <a:latin typeface="Cambria Math" panose="02040503050406030204" pitchFamily="18" charset="0"/>
+                                <a:cs typeface="Cambria Math" panose="02040503050406030204" pitchFamily="18" charset="0"/>
+                              </a:rPr>
+                              <m:t>𝐚</m:t>
+                            </m:r>
+                          </m:e>
+                        </m:acc>
+                      </m:e>
+                      <m:sup>
+                        <m:r>
+                          <a:rPr lang="en-US" altLang="zh-CN" sz="2800" i="1" dirty="0">
+                            <a:latin typeface="Cambria Math" panose="02040503050406030204" pitchFamily="18" charset="0"/>
+                            <a:cs typeface="Cambria Math" panose="02040503050406030204" pitchFamily="18" charset="0"/>
+                          </a:rPr>
+                          <m:t>𝑙</m:t>
+                        </m:r>
+                      </m:sup>
+                    </m:sSup>
+                    <m:r>
+                      <a:rPr lang="en-US" altLang="zh-CN" sz="2800" i="1" dirty="0">
+                        <a:latin typeface="Cambria Math" panose="02040503050406030204" pitchFamily="18" charset="0"/>
+                        <a:ea typeface="MS Mincho" charset="0"/>
+                        <a:cs typeface="Cambria Math" panose="02040503050406030204" pitchFamily="18" charset="0"/>
+                      </a:rPr>
+                      <m:t>[</m:t>
+                    </m:r>
+                    <m:r>
+                      <a:rPr lang="en-US" altLang="zh-CN" sz="2800" i="1" dirty="0">
+                        <a:latin typeface="Cambria Math" panose="02040503050406030204" pitchFamily="18" charset="0"/>
+                        <a:cs typeface="Cambria Math" panose="02040503050406030204" pitchFamily="18" charset="0"/>
+                      </a:rPr>
+                      <m:t>𝑡</m:t>
+                    </m:r>
+                    <m:r>
+                      <a:rPr lang="en-US" altLang="zh-CN" sz="2800" i="1" dirty="0">
+                        <a:latin typeface="Cambria Math" panose="02040503050406030204" pitchFamily="18" charset="0"/>
+                        <a:ea typeface="MS Mincho" charset="0"/>
+                        <a:cs typeface="Cambria Math" panose="02040503050406030204" pitchFamily="18" charset="0"/>
+                      </a:rPr>
+                      <m:t>+</m:t>
+                    </m:r>
+                    <m:r>
+                      <a:rPr lang="en-US" altLang="zh-CN" sz="2800" i="1" dirty="0">
+                        <a:latin typeface="Cambria Math" panose="02040503050406030204" pitchFamily="18" charset="0"/>
+                        <a:ea typeface="MS Mincho" charset="0"/>
+                        <a:cs typeface="Cambria Math" panose="02040503050406030204" pitchFamily="18" charset="0"/>
+                      </a:rPr>
+                      <m:t>1</m:t>
+                    </m:r>
+                    <m:r>
+                      <a:rPr lang="en-US" altLang="zh-CN" sz="2800" i="1" dirty="0">
+                        <a:latin typeface="Cambria Math" panose="02040503050406030204" pitchFamily="18" charset="0"/>
+                        <a:ea typeface="MS Mincho" charset="0"/>
+                        <a:cs typeface="Cambria Math" panose="02040503050406030204" pitchFamily="18" charset="0"/>
+                      </a:rPr>
+                      <m:t>]=</m:t>
+                    </m:r>
+                    <m:r>
+                      <a:rPr lang="en-US" altLang="zh-CN" sz="2800" i="1" dirty="0">
+                        <a:latin typeface="Cambria Math" panose="02040503050406030204" pitchFamily="18" charset="0"/>
+                        <a:ea typeface="MS Mincho" charset="0"/>
+                        <a:cs typeface="Cambria Math" panose="02040503050406030204" pitchFamily="18" charset="0"/>
+                      </a:rPr>
+                      <m:t>𝜆</m:t>
+                    </m:r>
+                    <m:sSup>
+                      <m:sSupPr>
+                        <m:ctrlPr>
+                          <a:rPr lang="en-US" altLang="zh-CN" sz="2800" i="1" dirty="0">
+                            <a:latin typeface="Cambria Math" panose="02040503050406030204" pitchFamily="18" charset="0"/>
+                            <a:cs typeface="Cambria Math" panose="02040503050406030204" pitchFamily="18" charset="0"/>
+                          </a:rPr>
+                        </m:ctrlPr>
+                      </m:sSupPr>
+                      <m:e>
+                        <m:acc>
+                          <m:accPr>
+                            <m:ctrlPr>
+                              <a:rPr lang="en-US" altLang="zh-CN" sz="2800" i="1" dirty="0">
+                                <a:latin typeface="Cambria Math" panose="02040503050406030204" pitchFamily="18" charset="0"/>
+                                <a:cs typeface="Cambria Math" panose="02040503050406030204" pitchFamily="18" charset="0"/>
+                              </a:rPr>
+                            </m:ctrlPr>
+                          </m:accPr>
+                          <m:e>
+                            <m:r>
+                              <a:rPr lang="en-US" altLang="zh-CN" sz="2800" i="1" dirty="0">
+                                <a:latin typeface="Cambria Math" panose="02040503050406030204" pitchFamily="18" charset="0"/>
+                                <a:cs typeface="Cambria Math" panose="02040503050406030204" pitchFamily="18" charset="0"/>
+                              </a:rPr>
+                              <m:t>𝐚</m:t>
+                            </m:r>
+                          </m:e>
+                        </m:acc>
+                      </m:e>
+                      <m:sup>
+                        <m:r>
+                          <a:rPr lang="en-US" altLang="zh-CN" sz="2800" i="1" dirty="0">
+                            <a:latin typeface="Cambria Math" panose="02040503050406030204" pitchFamily="18" charset="0"/>
+                            <a:cs typeface="Cambria Math" panose="02040503050406030204" pitchFamily="18" charset="0"/>
+                          </a:rPr>
+                          <m:t>𝑙</m:t>
+                        </m:r>
+                      </m:sup>
+                    </m:sSup>
+                    <m:r>
+                      <a:rPr lang="en-US" altLang="zh-CN" sz="2800" i="1" dirty="0">
+                        <a:latin typeface="Cambria Math" panose="02040503050406030204" pitchFamily="18" charset="0"/>
+                        <a:ea typeface="MS Mincho" charset="0"/>
+                        <a:cs typeface="Cambria Math" panose="02040503050406030204" pitchFamily="18" charset="0"/>
+                      </a:rPr>
+                      <m:t>[</m:t>
+                    </m:r>
+                    <m:r>
+                      <a:rPr lang="en-US" altLang="zh-CN" sz="2800" i="1" dirty="0">
+                        <a:latin typeface="Cambria Math" panose="02040503050406030204" pitchFamily="18" charset="0"/>
+                        <a:cs typeface="Cambria Math" panose="02040503050406030204" pitchFamily="18" charset="0"/>
+                      </a:rPr>
+                      <m:t>𝑡</m:t>
+                    </m:r>
+                    <m:r>
+                      <a:rPr lang="en-US" altLang="zh-CN" sz="2800" i="1" dirty="0">
+                        <a:latin typeface="Cambria Math" panose="02040503050406030204" pitchFamily="18" charset="0"/>
+                        <a:ea typeface="MS Mincho" charset="0"/>
+                        <a:cs typeface="Cambria Math" panose="02040503050406030204" pitchFamily="18" charset="0"/>
+                      </a:rPr>
+                      <m:t>]+</m:t>
+                    </m:r>
+                    <m:sSup>
+                      <m:sSupPr>
+                        <m:ctrlPr>
+                          <a:rPr lang="en-US" altLang="zh-CN" sz="2800" i="1" dirty="0">
+                            <a:latin typeface="Cambria Math" panose="02040503050406030204" pitchFamily="18" charset="0"/>
+                            <a:cs typeface="Cambria Math" panose="02040503050406030204" pitchFamily="18" charset="0"/>
+                          </a:rPr>
+                        </m:ctrlPr>
+                      </m:sSupPr>
+                      <m:e>
+                        <m:r>
+                          <a:rPr lang="en-US" altLang="zh-CN" sz="2800" i="1" dirty="0">
+                            <a:latin typeface="Cambria Math" panose="02040503050406030204" pitchFamily="18" charset="0"/>
+                            <a:cs typeface="Cambria Math" panose="02040503050406030204" pitchFamily="18" charset="0"/>
+                          </a:rPr>
+                          <m:t>𝐬</m:t>
+                        </m:r>
+                      </m:e>
+                      <m:sup>
+                        <m:r>
+                          <a:rPr lang="en-US" altLang="zh-CN" sz="2800" i="1" dirty="0">
+                            <a:latin typeface="Cambria Math" panose="02040503050406030204" pitchFamily="18" charset="0"/>
+                            <a:cs typeface="Cambria Math" panose="02040503050406030204" pitchFamily="18" charset="0"/>
+                          </a:rPr>
+                          <m:t>𝑙</m:t>
+                        </m:r>
+                      </m:sup>
+                    </m:sSup>
+                    <m:r>
+                      <a:rPr lang="en-US" altLang="zh-CN" sz="2800" i="1" dirty="0">
+                        <a:latin typeface="Cambria Math" panose="02040503050406030204" pitchFamily="18" charset="0"/>
+                        <a:ea typeface="MS Mincho" charset="0"/>
+                        <a:cs typeface="Cambria Math" panose="02040503050406030204" pitchFamily="18" charset="0"/>
+                      </a:rPr>
+                      <m:t>[</m:t>
+                    </m:r>
+                    <m:r>
+                      <a:rPr lang="en-US" altLang="zh-CN" sz="2800" i="1" dirty="0">
+                        <a:latin typeface="Cambria Math" panose="02040503050406030204" pitchFamily="18" charset="0"/>
+                        <a:cs typeface="Cambria Math" panose="02040503050406030204" pitchFamily="18" charset="0"/>
+                      </a:rPr>
+                      <m:t>𝑡</m:t>
+                    </m:r>
+                    <m:r>
+                      <a:rPr lang="en-US" altLang="zh-CN" sz="2800" i="1" dirty="0">
+                        <a:latin typeface="Cambria Math" panose="02040503050406030204" pitchFamily="18" charset="0"/>
+                        <a:ea typeface="MS Mincho" charset="0"/>
+                        <a:cs typeface="Cambria Math" panose="02040503050406030204" pitchFamily="18" charset="0"/>
+                      </a:rPr>
+                      <m:t>+</m:t>
+                    </m:r>
+                    <m:r>
+                      <a:rPr lang="en-US" altLang="zh-CN" sz="2800" i="1" dirty="0">
+                        <a:latin typeface="Cambria Math" panose="02040503050406030204" pitchFamily="18" charset="0"/>
+                        <a:ea typeface="MS Mincho" charset="0"/>
+                        <a:cs typeface="Cambria Math" panose="02040503050406030204" pitchFamily="18" charset="0"/>
+                      </a:rPr>
+                      <m:t>1</m:t>
+                    </m:r>
+                    <m:r>
+                      <a:rPr lang="en-US" altLang="zh-CN" sz="2800" i="1" dirty="0">
+                        <a:latin typeface="Cambria Math" panose="02040503050406030204" pitchFamily="18" charset="0"/>
+                        <a:ea typeface="MS Mincho" charset="0"/>
+                        <a:cs typeface="Cambria Math" panose="02040503050406030204" pitchFamily="18" charset="0"/>
+                      </a:rPr>
+                      <m:t>], </m:t>
+                    </m:r>
+                    <m:sSub>
+                      <m:sSubPr>
+                        <m:ctrlPr>
+                          <a:rPr lang="en-US" altLang="zh-CN" sz="2800" i="1" dirty="0">
+                            <a:latin typeface="Cambria Math" panose="02040503050406030204" pitchFamily="18" charset="0"/>
+                            <a:cs typeface="Cambria Math" panose="02040503050406030204" pitchFamily="18" charset="0"/>
+                          </a:rPr>
+                        </m:ctrlPr>
+                      </m:sSubPr>
+                      <m:e>
+                        <m:r>
+                          <a:rPr lang="en-US" altLang="zh-CN" sz="2800" i="1" dirty="0">
+                            <a:latin typeface="Cambria Math" panose="02040503050406030204" pitchFamily="18" charset="0"/>
+                            <a:ea typeface="MS Mincho" charset="0"/>
+                            <a:cs typeface="Cambria Math" panose="02040503050406030204" pitchFamily="18" charset="0"/>
+                          </a:rPr>
+                          <m:t>𝛻</m:t>
+                        </m:r>
+                      </m:e>
+                      <m:sub>
+                        <m:sSup>
+                          <m:sSupPr>
+                            <m:ctrlPr>
+                              <a:rPr lang="en-US" altLang="zh-CN" sz="2800" i="1" dirty="0">
+                                <a:latin typeface="Cambria Math" panose="02040503050406030204" pitchFamily="18" charset="0"/>
+                                <a:cs typeface="Cambria Math" panose="02040503050406030204" pitchFamily="18" charset="0"/>
+                              </a:rPr>
+                            </m:ctrlPr>
+                          </m:sSupPr>
+                          <m:e>
+                            <m:r>
+                              <a:rPr lang="en-US" altLang="zh-CN" sz="2800" i="1" dirty="0">
+                                <a:latin typeface="Cambria Math" panose="02040503050406030204" pitchFamily="18" charset="0"/>
+                                <a:cs typeface="Cambria Math" panose="02040503050406030204" pitchFamily="18" charset="0"/>
+                              </a:rPr>
+                              <m:t>𝐖</m:t>
+                            </m:r>
+                          </m:e>
+                          <m:sup>
+                            <m:r>
+                              <a:rPr lang="en-US" altLang="zh-CN" sz="2800" i="1" dirty="0">
+                                <a:latin typeface="Cambria Math" panose="02040503050406030204" pitchFamily="18" charset="0"/>
+                                <a:cs typeface="Cambria Math" panose="02040503050406030204" pitchFamily="18" charset="0"/>
+                              </a:rPr>
+                              <m:t>𝑙</m:t>
+                            </m:r>
+                          </m:sup>
+                        </m:sSup>
+                      </m:sub>
+                    </m:sSub>
+                    <m:r>
+                      <a:rPr lang="en-US" altLang="zh-CN" sz="2800" i="1" dirty="0">
+                        <a:latin typeface="Cambria Math" panose="02040503050406030204" pitchFamily="18" charset="0"/>
+                        <a:cs typeface="Cambria Math" panose="02040503050406030204" pitchFamily="18" charset="0"/>
+                      </a:rPr>
+                      <m:t>𝐿</m:t>
+                    </m:r>
+                    <m:r>
+                      <a:rPr lang="en-US" altLang="zh-CN" sz="2800" i="1" dirty="0">
+                        <a:latin typeface="Cambria Math" panose="02040503050406030204" pitchFamily="18" charset="0"/>
+                        <a:ea typeface="MS Mincho" charset="0"/>
+                        <a:cs typeface="Cambria Math" panose="02040503050406030204" pitchFamily="18" charset="0"/>
+                      </a:rPr>
+                      <m:t>[</m:t>
+                    </m:r>
+                    <m:r>
+                      <a:rPr lang="en-US" altLang="zh-CN" sz="2800" i="1" dirty="0">
+                        <a:latin typeface="Cambria Math" panose="02040503050406030204" pitchFamily="18" charset="0"/>
+                        <a:cs typeface="Cambria Math" panose="02040503050406030204" pitchFamily="18" charset="0"/>
+                      </a:rPr>
+                      <m:t>𝑡</m:t>
+                    </m:r>
+                    <m:r>
+                      <a:rPr lang="en-US" altLang="zh-CN" sz="2800" i="1" dirty="0">
+                        <a:latin typeface="Cambria Math" panose="02040503050406030204" pitchFamily="18" charset="0"/>
+                        <a:ea typeface="MS Mincho" charset="0"/>
+                        <a:cs typeface="Cambria Math" panose="02040503050406030204" pitchFamily="18" charset="0"/>
+                      </a:rPr>
+                      <m:t>]=</m:t>
+                    </m:r>
+                    <m:sSub>
+                      <m:sSubPr>
+                        <m:ctrlPr>
+                          <a:rPr lang="en-US" altLang="zh-CN" sz="2800" i="1" dirty="0">
+                            <a:latin typeface="Cambria Math" panose="02040503050406030204" pitchFamily="18" charset="0"/>
+                            <a:cs typeface="Cambria Math" panose="02040503050406030204" pitchFamily="18" charset="0"/>
+                          </a:rPr>
+                        </m:ctrlPr>
+                      </m:sSubPr>
+                      <m:e>
+                        <m:r>
+                          <a:rPr lang="en-US" altLang="zh-CN" sz="2800" i="1" dirty="0">
+                            <a:latin typeface="Cambria Math" panose="02040503050406030204" pitchFamily="18" charset="0"/>
+                            <a:cs typeface="Cambria Math" panose="02040503050406030204" pitchFamily="18" charset="0"/>
+                          </a:rPr>
+                          <m:t>𝐠</m:t>
+                        </m:r>
+                      </m:e>
+                      <m:sub>
+                        <m:sSup>
+                          <m:sSupPr>
+                            <m:ctrlPr>
+                              <a:rPr lang="en-US" altLang="zh-CN" sz="2800" i="1" dirty="0">
+                                <a:latin typeface="Cambria Math" panose="02040503050406030204" pitchFamily="18" charset="0"/>
+                                <a:cs typeface="Cambria Math" panose="02040503050406030204" pitchFamily="18" charset="0"/>
+                              </a:rPr>
+                            </m:ctrlPr>
+                          </m:sSupPr>
+                          <m:e>
+                            <m:r>
+                              <a:rPr lang="en-US" altLang="zh-CN" sz="2800" i="1" dirty="0">
+                                <a:latin typeface="Cambria Math" panose="02040503050406030204" pitchFamily="18" charset="0"/>
+                                <a:cs typeface="Cambria Math" panose="02040503050406030204" pitchFamily="18" charset="0"/>
+                              </a:rPr>
+                              <m:t>𝐮</m:t>
+                            </m:r>
+                          </m:e>
+                          <m:sup>
+                            <m:r>
+                              <a:rPr lang="en-US" altLang="zh-CN" sz="2800" i="1" dirty="0">
+                                <a:latin typeface="Cambria Math" panose="02040503050406030204" pitchFamily="18" charset="0"/>
+                                <a:cs typeface="Cambria Math" panose="02040503050406030204" pitchFamily="18" charset="0"/>
+                              </a:rPr>
+                              <m:t>𝑙</m:t>
+                            </m:r>
+                            <m:r>
+                              <a:rPr lang="en-US" altLang="zh-CN" sz="2800" i="1" dirty="0">
+                                <a:latin typeface="Cambria Math" panose="02040503050406030204" pitchFamily="18" charset="0"/>
+                                <a:ea typeface="MS Mincho" charset="0"/>
+                                <a:cs typeface="Cambria Math" panose="02040503050406030204" pitchFamily="18" charset="0"/>
+                              </a:rPr>
+                              <m:t>+</m:t>
+                            </m:r>
+                            <m:r>
+                              <a:rPr lang="en-US" altLang="zh-CN" sz="2800" i="1" dirty="0">
+                                <a:latin typeface="Cambria Math" panose="02040503050406030204" pitchFamily="18" charset="0"/>
+                                <a:ea typeface="MS Mincho" charset="0"/>
+                                <a:cs typeface="Cambria Math" panose="02040503050406030204" pitchFamily="18" charset="0"/>
+                              </a:rPr>
+                              <m:t>1</m:t>
+                            </m:r>
+                          </m:sup>
+                        </m:sSup>
+                      </m:sub>
+                    </m:sSub>
+                    <m:r>
+                      <a:rPr lang="en-US" altLang="zh-CN" sz="2800" i="1" dirty="0">
+                        <a:latin typeface="Cambria Math" panose="02040503050406030204" pitchFamily="18" charset="0"/>
+                        <a:ea typeface="MS Mincho" charset="0"/>
+                        <a:cs typeface="Cambria Math" panose="02040503050406030204" pitchFamily="18" charset="0"/>
+                      </a:rPr>
+                      <m:t>[</m:t>
+                    </m:r>
+                    <m:r>
+                      <a:rPr lang="en-US" altLang="zh-CN" sz="2800" i="1" dirty="0">
+                        <a:latin typeface="Cambria Math" panose="02040503050406030204" pitchFamily="18" charset="0"/>
+                        <a:cs typeface="Cambria Math" panose="02040503050406030204" pitchFamily="18" charset="0"/>
+                      </a:rPr>
+                      <m:t>𝑡</m:t>
+                    </m:r>
+                    <m:r>
+                      <a:rPr lang="en-US" altLang="zh-CN" sz="2800" i="1" dirty="0">
+                        <a:latin typeface="Cambria Math" panose="02040503050406030204" pitchFamily="18" charset="0"/>
+                        <a:ea typeface="MS Mincho" charset="0"/>
+                        <a:cs typeface="Cambria Math" panose="02040503050406030204" pitchFamily="18" charset="0"/>
+                      </a:rPr>
+                      <m:t>]⋅(</m:t>
+                    </m:r>
+                    <m:sSup>
+                      <m:sSupPr>
+                        <m:ctrlPr>
+                          <a:rPr lang="en-US" altLang="zh-CN" sz="2800" i="1" dirty="0">
+                            <a:latin typeface="Cambria Math" panose="02040503050406030204" pitchFamily="18" charset="0"/>
+                            <a:cs typeface="Cambria Math" panose="02040503050406030204" pitchFamily="18" charset="0"/>
+                          </a:rPr>
+                        </m:ctrlPr>
+                      </m:sSupPr>
+                      <m:e>
+                        <m:acc>
+                          <m:accPr>
+                            <m:ctrlPr>
+                              <a:rPr lang="en-US" altLang="zh-CN" sz="2800" i="1" dirty="0">
+                                <a:latin typeface="Cambria Math" panose="02040503050406030204" pitchFamily="18" charset="0"/>
+                                <a:cs typeface="Cambria Math" panose="02040503050406030204" pitchFamily="18" charset="0"/>
+                              </a:rPr>
+                            </m:ctrlPr>
+                          </m:accPr>
+                          <m:e>
+                            <m:r>
+                              <a:rPr lang="en-US" altLang="zh-CN" sz="2800" i="1" dirty="0">
+                                <a:latin typeface="Cambria Math" panose="02040503050406030204" pitchFamily="18" charset="0"/>
+                                <a:cs typeface="Cambria Math" panose="02040503050406030204" pitchFamily="18" charset="0"/>
+                              </a:rPr>
+                              <m:t>𝐚</m:t>
+                            </m:r>
+                          </m:e>
+                        </m:acc>
+                      </m:e>
+                      <m:sup>
+                        <m:r>
+                          <a:rPr lang="en-US" altLang="zh-CN" sz="2800" i="1" dirty="0">
+                            <a:latin typeface="Cambria Math" panose="02040503050406030204" pitchFamily="18" charset="0"/>
+                            <a:cs typeface="Cambria Math" panose="02040503050406030204" pitchFamily="18" charset="0"/>
+                          </a:rPr>
+                          <m:t>𝑙</m:t>
+                        </m:r>
+                      </m:sup>
+                    </m:sSup>
+                    <m:r>
+                      <a:rPr lang="en-US" altLang="zh-CN" sz="2800" i="1" dirty="0">
+                        <a:latin typeface="Cambria Math" panose="02040503050406030204" pitchFamily="18" charset="0"/>
+                        <a:ea typeface="MS Mincho" charset="0"/>
+                        <a:cs typeface="Cambria Math" panose="02040503050406030204" pitchFamily="18" charset="0"/>
+                      </a:rPr>
+                      <m:t>[</m:t>
+                    </m:r>
+                    <m:r>
+                      <a:rPr lang="en-US" altLang="zh-CN" sz="2800" i="1" dirty="0">
+                        <a:latin typeface="Cambria Math" panose="02040503050406030204" pitchFamily="18" charset="0"/>
+                        <a:cs typeface="Cambria Math" panose="02040503050406030204" pitchFamily="18" charset="0"/>
+                      </a:rPr>
+                      <m:t>𝑡</m:t>
+                    </m:r>
+                    <m:r>
+                      <a:rPr lang="en-US" altLang="zh-CN" sz="2800" i="1" dirty="0">
+                        <a:latin typeface="Cambria Math" panose="02040503050406030204" pitchFamily="18" charset="0"/>
+                        <a:ea typeface="MS Mincho" charset="0"/>
+                        <a:cs typeface="Cambria Math" panose="02040503050406030204" pitchFamily="18" charset="0"/>
+                      </a:rPr>
+                      <m:t>]</m:t>
+                    </m:r>
+                    <m:sSup>
+                      <m:sSupPr>
+                        <m:ctrlPr>
+                          <a:rPr lang="en-US" altLang="zh-CN" sz="2800" i="1" dirty="0">
+                            <a:latin typeface="Cambria Math" panose="02040503050406030204" pitchFamily="18" charset="0"/>
+                            <a:cs typeface="Cambria Math" panose="02040503050406030204" pitchFamily="18" charset="0"/>
+                          </a:rPr>
+                        </m:ctrlPr>
+                      </m:sSupPr>
+                      <m:e>
+                        <m:r>
+                          <a:rPr lang="en-US" altLang="zh-CN" sz="2800" i="1" dirty="0">
+                            <a:latin typeface="Cambria Math" panose="02040503050406030204" pitchFamily="18" charset="0"/>
+                            <a:ea typeface="MS Mincho" charset="0"/>
+                            <a:cs typeface="Cambria Math" panose="02040503050406030204" pitchFamily="18" charset="0"/>
+                          </a:rPr>
+                          <m:t>)</m:t>
+                        </m:r>
+                      </m:e>
+                      <m:sup>
+                        <m:r>
+                          <a:rPr lang="en-US" altLang="zh-CN" sz="2800" i="1" dirty="0">
+                            <a:latin typeface="Cambria Math" panose="02040503050406030204" pitchFamily="18" charset="0"/>
+                            <a:ea typeface="MS Mincho" charset="0"/>
+                            <a:cs typeface="Cambria Math" panose="02040503050406030204" pitchFamily="18" charset="0"/>
+                          </a:rPr>
+                          <m:t>⊤</m:t>
+                        </m:r>
+                      </m:sup>
+                    </m:sSup>
+                  </m:oMath>
+                </a14:m>
+                <a:endParaRPr lang="en-US" altLang="zh-CN" sz="2800" i="1" dirty="0">
+                  <a:latin typeface="Cambria Math" panose="02040503050406030204" pitchFamily="18" charset="0"/>
+                  <a:cs typeface="Cambria Math" panose="02040503050406030204" pitchFamily="18" charset="0"/>
+                </a:endParaRPr>
+              </a:p>
+            </p:txBody>
+          </p:sp>
+        </mc:Choice>
+        <mc:Fallback>
+          <p:sp>
+            <p:nvSpPr>
+              <p:cNvPr id="3" name="Content Placeholder 2"/>
+              <p:cNvSpPr>
+                <a:spLocks noRot="1" noChangeAspect="1" noMove="1" noResize="1" noEditPoints="1" noAdjustHandles="1" noChangeArrowheads="1" noChangeShapeType="1" noTextEdit="1"/>
+              </p:cNvSpPr>
+              <p:nvPr>
+                <p:ph idx="1"/>
+              </p:nvPr>
+            </p:nvSpPr>
+            <p:spPr>
+              <a:xfrm>
+                <a:off x="193675" y="1127760"/>
+                <a:ext cx="11805285" cy="5172075"/>
+              </a:xfrm>
+              <a:blipFill rotWithShape="1">
+                <a:blip r:embed="rId1"/>
+                <a:stretch>
+                  <a:fillRect t="-135"/>
+                </a:stretch>
+              </a:blipFill>
+            </p:spPr>
+            <p:txBody>
+              <a:bodyPr/>
+              <a:lstStyle/>
+              <a:p>
+                <a:r>
+                  <a:rPr lang="zh-CN" altLang="en-US">
+                    <a:noFill/>
+                  </a:rPr>
+                  <a:t> </a:t>
+                </a:r>
+              </a:p>
+            </p:txBody>
+          </p:sp>
+        </mc:Fallback>
+      </mc:AlternateContent>
       <p:sp>
         <p:nvSpPr>
           <p:cNvPr id="4" name="Footer Placeholder 3"/>
@@ -8177,25 +10921,1073 @@
           </a:p>
         </p:txBody>
       </p:sp>
-      <p:sp>
-        <p:nvSpPr>
-          <p:cNvPr id="3" name="Content Placeholder 2"/>
-          <p:cNvSpPr>
-            <a:spLocks noGrp="1"/>
-          </p:cNvSpPr>
-          <p:nvPr>
-            <p:ph idx="1"/>
-          </p:nvPr>
-        </p:nvSpPr>
-        <p:spPr/>
-        <p:txBody>
-          <a:bodyPr/>
-          <a:lstStyle/>
-          <a:p>
-            <a:endParaRPr lang="en-US" dirty="0"/>
-          </a:p>
-        </p:txBody>
-      </p:sp>
+      <mc:AlternateContent xmlns:mc="http://schemas.openxmlformats.org/markup-compatibility/2006">
+        <mc:Choice xmlns:a14="http://schemas.microsoft.com/office/drawing/2010/main" Requires="a14">
+          <p:sp>
+            <p:nvSpPr>
+              <p:cNvPr id="3" name="Content Placeholder 2"/>
+              <p:cNvSpPr>
+                <a:spLocks noGrp="1"/>
+              </p:cNvSpPr>
+              <p:nvPr>
+                <p:ph idx="1"/>
+              </p:nvPr>
+            </p:nvSpPr>
+            <p:spPr/>
+            <p:txBody>
+              <a:bodyPr>
+                <a:normAutofit/>
+              </a:bodyPr>
+              <a:lstStyle/>
+              <a:p>
+                <a:r>
+                  <a:rPr lang="en-US" altLang="zh-CN" dirty="0"/>
+                  <a:t>OTTT's Assumption Questioned:</a:t>
+                </a:r>
+                <a:endParaRPr lang="en-US" altLang="zh-CN" dirty="0"/>
+              </a:p>
+              <a:p>
+                <a:pPr lvl="1"/>
+                <a:r>
+                  <a:rPr lang="en-US" altLang="zh-CN" dirty="0"/>
+                  <a:t>OTTT uses fixed decay </a:t>
+                </a:r>
+                <a14:m>
+                  <m:oMath xmlns:m="http://schemas.openxmlformats.org/officeDocument/2006/math">
+                    <m:r>
+                      <a:rPr lang="en-US" altLang="zh-CN" i="1" dirty="0">
+                        <a:latin typeface="Cambria Math" panose="02040503050406030204" pitchFamily="18" charset="0"/>
+                        <a:cs typeface="Cambria Math" panose="02040503050406030204" pitchFamily="18" charset="0"/>
+                      </a:rPr>
+                      <m:t>𝜆</m:t>
+                    </m:r>
+                  </m:oMath>
+                </a14:m>
+                <a:r>
+                  <a:rPr lang="en-US" altLang="zh-CN" dirty="0"/>
+                  <a:t>.</a:t>
+                </a:r>
+                <a:endParaRPr lang="en-US" altLang="zh-CN" dirty="0"/>
+              </a:p>
+              <a:p>
+                <a:pPr lvl="1"/>
+                <a:r>
+                  <a:rPr lang="en-US" altLang="zh-CN" dirty="0"/>
+                  <a:t>NDOT: decay should depend on the neuron's actual state</a:t>
+                </a:r>
+                <a:endParaRPr lang="en-US" altLang="zh-CN" dirty="0"/>
+              </a:p>
+              <a:p>
+                <a:pPr marL="228600" lvl="1" algn="l">
+                  <a:spcBef>
+                    <a:spcPts val="1000"/>
+                  </a:spcBef>
+                  <a:buClrTx/>
+                  <a:buSzTx/>
+                </a:pPr>
+                <a:r>
+                  <a:rPr lang="en-US" altLang="zh-CN" sz="2800" dirty="0"/>
+                  <a:t>The Continuous-Time Insight:</a:t>
+                </a:r>
+                <a:endParaRPr lang="en-US" altLang="zh-CN" sz="2800" dirty="0"/>
+              </a:p>
+              <a:p>
+                <a:pPr lvl="1" algn="l">
+                  <a:spcBef>
+                    <a:spcPts val="500"/>
+                  </a:spcBef>
+                  <a:buClrTx/>
+                  <a:buSzTx/>
+                </a:pPr>
+                <a:r>
+                  <a:rPr lang="en-US" altLang="zh-CN" sz="2400" dirty="0"/>
+                  <a:t>From LIF dynamics: </a:t>
+                </a:r>
+                <a14:m>
+                  <m:oMath xmlns:m="http://schemas.openxmlformats.org/officeDocument/2006/math">
+                    <m:r>
+                      <a:rPr lang="en-US" altLang="zh-CN" sz="2400" i="1" dirty="0">
+                        <a:latin typeface="Cambria Math" panose="02040503050406030204" pitchFamily="18" charset="0"/>
+                        <a:cs typeface="Cambria Math" panose="02040503050406030204" pitchFamily="18" charset="0"/>
+                      </a:rPr>
+                      <m:t>𝑒</m:t>
+                    </m:r>
+                    <m:r>
+                      <a:rPr lang="en-US" altLang="zh-CN" sz="2400" i="1" dirty="0">
+                        <a:latin typeface="Cambria Math" panose="02040503050406030204" pitchFamily="18" charset="0"/>
+                        <a:cs typeface="Cambria Math" panose="02040503050406030204" pitchFamily="18" charset="0"/>
+                      </a:rPr>
+                      <m:t>(</m:t>
+                    </m:r>
+                    <m:r>
+                      <a:rPr lang="en-US" altLang="zh-CN" sz="2400" i="1" dirty="0">
+                        <a:latin typeface="Cambria Math" panose="02040503050406030204" pitchFamily="18" charset="0"/>
+                        <a:cs typeface="Cambria Math" panose="02040503050406030204" pitchFamily="18" charset="0"/>
+                      </a:rPr>
+                      <m:t>𝑡</m:t>
+                    </m:r>
+                    <m:r>
+                      <a:rPr lang="en-US" altLang="zh-CN" sz="2400" i="1" dirty="0">
+                        <a:latin typeface="Cambria Math" panose="02040503050406030204" pitchFamily="18" charset="0"/>
+                        <a:cs typeface="Cambria Math" panose="02040503050406030204" pitchFamily="18" charset="0"/>
+                      </a:rPr>
+                      <m:t>) = </m:t>
+                    </m:r>
+                    <m:r>
+                      <a:rPr lang="en-US" altLang="zh-CN" sz="2400" i="1" dirty="0">
+                        <a:latin typeface="Cambria Math" panose="02040503050406030204" pitchFamily="18" charset="0"/>
+                        <a:cs typeface="Cambria Math" panose="02040503050406030204" pitchFamily="18" charset="0"/>
+                      </a:rPr>
+                      <m:t>𝑢</m:t>
+                    </m:r>
+                    <m:r>
+                      <a:rPr lang="en-US" altLang="zh-CN" sz="2400" i="1" dirty="0">
+                        <a:latin typeface="Cambria Math" panose="02040503050406030204" pitchFamily="18" charset="0"/>
+                        <a:cs typeface="Cambria Math" panose="02040503050406030204" pitchFamily="18" charset="0"/>
+                      </a:rPr>
+                      <m:t>'(</m:t>
+                    </m:r>
+                    <m:r>
+                      <a:rPr lang="en-US" altLang="zh-CN" sz="2400" i="1" dirty="0">
+                        <a:latin typeface="Cambria Math" panose="02040503050406030204" pitchFamily="18" charset="0"/>
+                        <a:cs typeface="Cambria Math" panose="02040503050406030204" pitchFamily="18" charset="0"/>
+                      </a:rPr>
+                      <m:t>𝑡</m:t>
+                    </m:r>
+                    <m:r>
+                      <a:rPr lang="en-US" altLang="zh-CN" sz="2400" i="1" dirty="0">
+                        <a:latin typeface="Cambria Math" panose="02040503050406030204" pitchFamily="18" charset="0"/>
+                        <a:cs typeface="Cambria Math" panose="02040503050406030204" pitchFamily="18" charset="0"/>
+                      </a:rPr>
+                      <m:t>+</m:t>
+                    </m:r>
+                    <m:r>
+                      <a:rPr lang="en-US" altLang="zh-CN" sz="2400" i="1" dirty="0">
+                        <a:latin typeface="Cambria Math" panose="02040503050406030204" pitchFamily="18" charset="0"/>
+                        <a:cs typeface="Cambria Math" panose="02040503050406030204" pitchFamily="18" charset="0"/>
+                      </a:rPr>
+                      <m:t>1</m:t>
+                    </m:r>
+                    <m:r>
+                      <a:rPr lang="en-US" altLang="zh-CN" sz="2400" i="1" dirty="0">
+                        <a:latin typeface="Cambria Math" panose="02040503050406030204" pitchFamily="18" charset="0"/>
+                        <a:cs typeface="Cambria Math" panose="02040503050406030204" pitchFamily="18" charset="0"/>
+                      </a:rPr>
+                      <m:t>)/</m:t>
+                    </m:r>
+                    <m:r>
+                      <a:rPr lang="en-US" altLang="zh-CN" sz="2400" i="1" dirty="0">
+                        <a:latin typeface="Cambria Math" panose="02040503050406030204" pitchFamily="18" charset="0"/>
+                        <a:cs typeface="Cambria Math" panose="02040503050406030204" pitchFamily="18" charset="0"/>
+                      </a:rPr>
+                      <m:t>𝑢</m:t>
+                    </m:r>
+                    <m:r>
+                      <a:rPr lang="en-US" altLang="zh-CN" sz="2400" i="1" dirty="0">
+                        <a:latin typeface="Cambria Math" panose="02040503050406030204" pitchFamily="18" charset="0"/>
+                        <a:cs typeface="Cambria Math" panose="02040503050406030204" pitchFamily="18" charset="0"/>
+                      </a:rPr>
+                      <m:t>'(</m:t>
+                    </m:r>
+                    <m:r>
+                      <a:rPr lang="en-US" altLang="zh-CN" sz="2400" i="1" dirty="0">
+                        <a:latin typeface="Cambria Math" panose="02040503050406030204" pitchFamily="18" charset="0"/>
+                        <a:cs typeface="Cambria Math" panose="02040503050406030204" pitchFamily="18" charset="0"/>
+                      </a:rPr>
+                      <m:t>𝑡</m:t>
+                    </m:r>
+                    <m:r>
+                      <a:rPr lang="en-US" altLang="zh-CN" sz="2400" i="1" dirty="0">
+                        <a:latin typeface="Cambria Math" panose="02040503050406030204" pitchFamily="18" charset="0"/>
+                        <a:cs typeface="Cambria Math" panose="02040503050406030204" pitchFamily="18" charset="0"/>
+                      </a:rPr>
+                      <m:t>)</m:t>
+                    </m:r>
+                  </m:oMath>
+                </a14:m>
+                <a:endParaRPr lang="en-US" altLang="zh-CN" sz="2400" i="1" dirty="0">
+                  <a:latin typeface="Cambria Math" panose="02040503050406030204" pitchFamily="18" charset="0"/>
+                  <a:cs typeface="Cambria Math" panose="02040503050406030204" pitchFamily="18" charset="0"/>
+                </a:endParaRPr>
+              </a:p>
+              <a:p>
+                <a:pPr lvl="1" algn="l">
+                  <a:spcBef>
+                    <a:spcPts val="500"/>
+                  </a:spcBef>
+                  <a:buClrTx/>
+                  <a:buSzTx/>
+                </a:pPr>
+                <a:r>
+                  <a:rPr lang="en-US" altLang="zh-CN" sz="2400" dirty="0"/>
+                  <a:t>Discrete version: </a:t>
+                </a:r>
+                <a14:m>
+                  <m:oMath xmlns:m="http://schemas.openxmlformats.org/officeDocument/2006/math">
+                    <m:sSup>
+                      <m:sSupPr>
+                        <m:ctrlPr>
+                          <a:rPr lang="en-US" altLang="zh-CN" i="1" dirty="0">
+                            <a:latin typeface="Cambria Math" panose="02040503050406030204" pitchFamily="18" charset="0"/>
+                            <a:cs typeface="Cambria Math" panose="02040503050406030204" pitchFamily="18" charset="0"/>
+                            <a:sym typeface="+mn-ea"/>
+                          </a:rPr>
+                        </m:ctrlPr>
+                      </m:sSupPr>
+                      <m:e>
+                        <m:r>
+                          <a:rPr lang="en-US" altLang="zh-CN" i="1" dirty="0">
+                            <a:latin typeface="Cambria Math" panose="02040503050406030204" pitchFamily="18" charset="0"/>
+                            <a:cs typeface="Cambria Math" panose="02040503050406030204" pitchFamily="18" charset="0"/>
+                            <a:sym typeface="+mn-ea"/>
+                          </a:rPr>
+                          <m:t>𝑒</m:t>
+                        </m:r>
+                      </m:e>
+                      <m:sup>
+                        <m:r>
+                          <a:rPr lang="en-US" altLang="zh-CN" i="1" dirty="0">
+                            <a:latin typeface="Cambria Math" panose="02040503050406030204" pitchFamily="18" charset="0"/>
+                            <a:cs typeface="Cambria Math" panose="02040503050406030204" pitchFamily="18" charset="0"/>
+                            <a:sym typeface="+mn-ea"/>
+                          </a:rPr>
+                          <m:t>𝑙</m:t>
+                        </m:r>
+                      </m:sup>
+                    </m:sSup>
+                    <m:r>
+                      <a:rPr lang="en-US" altLang="zh-CN" i="1" dirty="0">
+                        <a:latin typeface="Cambria Math" panose="02040503050406030204" pitchFamily="18" charset="0"/>
+                        <a:cs typeface="Cambria Math" panose="02040503050406030204" pitchFamily="18" charset="0"/>
+                        <a:sym typeface="+mn-ea"/>
+                      </a:rPr>
+                      <m:t>[</m:t>
+                    </m:r>
+                    <m:r>
+                      <a:rPr lang="en-US" altLang="zh-CN" i="1" dirty="0">
+                        <a:latin typeface="Cambria Math" panose="02040503050406030204" pitchFamily="18" charset="0"/>
+                        <a:cs typeface="Cambria Math" panose="02040503050406030204" pitchFamily="18" charset="0"/>
+                        <a:sym typeface="+mn-ea"/>
+                      </a:rPr>
+                      <m:t>𝑡</m:t>
+                    </m:r>
+                    <m:r>
+                      <a:rPr lang="en-US" altLang="zh-CN" i="1" dirty="0">
+                        <a:latin typeface="Cambria Math" panose="02040503050406030204" pitchFamily="18" charset="0"/>
+                        <a:cs typeface="Cambria Math" panose="02040503050406030204" pitchFamily="18" charset="0"/>
+                        <a:sym typeface="+mn-ea"/>
+                      </a:rPr>
+                      <m:t>]=(</m:t>
+                    </m:r>
+                    <m:sSup>
+                      <m:sSupPr>
+                        <m:ctrlPr>
+                          <a:rPr lang="en-US" altLang="zh-CN" i="1" dirty="0">
+                            <a:latin typeface="Cambria Math" panose="02040503050406030204" pitchFamily="18" charset="0"/>
+                            <a:cs typeface="Cambria Math" panose="02040503050406030204" pitchFamily="18" charset="0"/>
+                            <a:sym typeface="+mn-ea"/>
+                          </a:rPr>
+                        </m:ctrlPr>
+                      </m:sSupPr>
+                      <m:e>
+                        <m:r>
+                          <a:rPr lang="en-US" altLang="zh-CN" i="1" dirty="0">
+                            <a:latin typeface="Cambria Math" panose="02040503050406030204" pitchFamily="18" charset="0"/>
+                            <a:cs typeface="Cambria Math" panose="02040503050406030204" pitchFamily="18" charset="0"/>
+                            <a:sym typeface="+mn-ea"/>
+                          </a:rPr>
+                          <m:t>𝑢</m:t>
+                        </m:r>
+                      </m:e>
+                      <m:sup>
+                        <m:r>
+                          <a:rPr lang="en-US" altLang="zh-CN" i="1" dirty="0">
+                            <a:latin typeface="Cambria Math" panose="02040503050406030204" pitchFamily="18" charset="0"/>
+                            <a:cs typeface="Cambria Math" panose="02040503050406030204" pitchFamily="18" charset="0"/>
+                            <a:sym typeface="+mn-ea"/>
+                          </a:rPr>
+                          <m:t>𝑙</m:t>
+                        </m:r>
+                      </m:sup>
+                    </m:sSup>
+                    <m:r>
+                      <a:rPr lang="en-US" altLang="zh-CN" i="1" dirty="0">
+                        <a:latin typeface="Cambria Math" panose="02040503050406030204" pitchFamily="18" charset="0"/>
+                        <a:cs typeface="Cambria Math" panose="02040503050406030204" pitchFamily="18" charset="0"/>
+                        <a:sym typeface="+mn-ea"/>
+                      </a:rPr>
+                      <m:t>[</m:t>
+                    </m:r>
+                    <m:r>
+                      <a:rPr lang="en-US" altLang="zh-CN" i="1" dirty="0">
+                        <a:latin typeface="Cambria Math" panose="02040503050406030204" pitchFamily="18" charset="0"/>
+                        <a:cs typeface="Cambria Math" panose="02040503050406030204" pitchFamily="18" charset="0"/>
+                        <a:sym typeface="+mn-ea"/>
+                      </a:rPr>
+                      <m:t>𝑡</m:t>
+                    </m:r>
+                    <m:r>
+                      <a:rPr lang="en-US" altLang="zh-CN" i="1" dirty="0">
+                        <a:latin typeface="Cambria Math" panose="02040503050406030204" pitchFamily="18" charset="0"/>
+                        <a:cs typeface="Cambria Math" panose="02040503050406030204" pitchFamily="18" charset="0"/>
+                        <a:sym typeface="+mn-ea"/>
+                      </a:rPr>
+                      <m:t>]−</m:t>
+                    </m:r>
+                    <m:sSub>
+                      <m:sSubPr>
+                        <m:ctrlPr>
+                          <a:rPr lang="en-US" altLang="zh-CN" i="1" dirty="0">
+                            <a:latin typeface="Cambria Math" panose="02040503050406030204" pitchFamily="18" charset="0"/>
+                            <a:cs typeface="Cambria Math" panose="02040503050406030204" pitchFamily="18" charset="0"/>
+                            <a:sym typeface="+mn-ea"/>
+                          </a:rPr>
+                        </m:ctrlPr>
+                      </m:sSubPr>
+                      <m:e>
+                        <m:r>
+                          <a:rPr lang="en-US" altLang="zh-CN" i="1" dirty="0">
+                            <a:latin typeface="Cambria Math" panose="02040503050406030204" pitchFamily="18" charset="0"/>
+                            <a:cs typeface="Cambria Math" panose="02040503050406030204" pitchFamily="18" charset="0"/>
+                            <a:sym typeface="+mn-ea"/>
+                          </a:rPr>
+                          <m:t>𝑉</m:t>
+                        </m:r>
+                      </m:e>
+                      <m:sub>
+                        <m:r>
+                          <a:rPr lang="en-US" altLang="zh-CN" i="1" dirty="0">
+                            <a:latin typeface="Cambria Math" panose="02040503050406030204" pitchFamily="18" charset="0"/>
+                            <a:cs typeface="Cambria Math" panose="02040503050406030204" pitchFamily="18" charset="0"/>
+                            <a:sym typeface="+mn-ea"/>
+                          </a:rPr>
+                          <m:t>𝑡ℎ</m:t>
+                        </m:r>
+                      </m:sub>
+                    </m:sSub>
+                    <m:sSup>
+                      <m:sSupPr>
+                        <m:ctrlPr>
+                          <a:rPr lang="en-US" altLang="zh-CN" i="1" dirty="0">
+                            <a:latin typeface="Cambria Math" panose="02040503050406030204" pitchFamily="18" charset="0"/>
+                            <a:cs typeface="Cambria Math" panose="02040503050406030204" pitchFamily="18" charset="0"/>
+                            <a:sym typeface="+mn-ea"/>
+                          </a:rPr>
+                        </m:ctrlPr>
+                      </m:sSupPr>
+                      <m:e>
+                        <m:r>
+                          <a:rPr lang="en-US" altLang="zh-CN" i="1" dirty="0">
+                            <a:latin typeface="Cambria Math" panose="02040503050406030204" pitchFamily="18" charset="0"/>
+                            <a:cs typeface="Cambria Math" panose="02040503050406030204" pitchFamily="18" charset="0"/>
+                            <a:sym typeface="+mn-ea"/>
+                          </a:rPr>
+                          <m:t>𝑠</m:t>
+                        </m:r>
+                      </m:e>
+                      <m:sup>
+                        <m:r>
+                          <a:rPr lang="en-US" altLang="zh-CN" i="1" dirty="0">
+                            <a:latin typeface="Cambria Math" panose="02040503050406030204" pitchFamily="18" charset="0"/>
+                            <a:cs typeface="Cambria Math" panose="02040503050406030204" pitchFamily="18" charset="0"/>
+                            <a:sym typeface="+mn-ea"/>
+                          </a:rPr>
+                          <m:t>𝑙</m:t>
+                        </m:r>
+                      </m:sup>
+                    </m:sSup>
+                    <m:r>
+                      <a:rPr lang="en-US" altLang="zh-CN" i="1" dirty="0">
+                        <a:latin typeface="Cambria Math" panose="02040503050406030204" pitchFamily="18" charset="0"/>
+                        <a:cs typeface="Cambria Math" panose="02040503050406030204" pitchFamily="18" charset="0"/>
+                        <a:sym typeface="+mn-ea"/>
+                      </a:rPr>
+                      <m:t>[</m:t>
+                    </m:r>
+                    <m:r>
+                      <a:rPr lang="en-US" altLang="zh-CN" i="1" dirty="0">
+                        <a:latin typeface="Cambria Math" panose="02040503050406030204" pitchFamily="18" charset="0"/>
+                        <a:cs typeface="Cambria Math" panose="02040503050406030204" pitchFamily="18" charset="0"/>
+                        <a:sym typeface="+mn-ea"/>
+                      </a:rPr>
+                      <m:t>𝑡</m:t>
+                    </m:r>
+                    <m:r>
+                      <a:rPr lang="en-US" altLang="zh-CN" i="1" dirty="0">
+                        <a:latin typeface="Cambria Math" panose="02040503050406030204" pitchFamily="18" charset="0"/>
+                        <a:cs typeface="Cambria Math" panose="02040503050406030204" pitchFamily="18" charset="0"/>
+                        <a:sym typeface="+mn-ea"/>
+                      </a:rPr>
+                      <m:t>])/(</m:t>
+                    </m:r>
+                    <m:sSup>
+                      <m:sSupPr>
+                        <m:ctrlPr>
+                          <a:rPr lang="en-US" altLang="zh-CN" i="1" dirty="0">
+                            <a:latin typeface="Cambria Math" panose="02040503050406030204" pitchFamily="18" charset="0"/>
+                            <a:cs typeface="Cambria Math" panose="02040503050406030204" pitchFamily="18" charset="0"/>
+                            <a:sym typeface="+mn-ea"/>
+                          </a:rPr>
+                        </m:ctrlPr>
+                      </m:sSupPr>
+                      <m:e>
+                        <m:r>
+                          <a:rPr lang="en-US" altLang="zh-CN" i="1" dirty="0">
+                            <a:latin typeface="Cambria Math" panose="02040503050406030204" pitchFamily="18" charset="0"/>
+                            <a:cs typeface="Cambria Math" panose="02040503050406030204" pitchFamily="18" charset="0"/>
+                            <a:sym typeface="+mn-ea"/>
+                          </a:rPr>
+                          <m:t>𝑢</m:t>
+                        </m:r>
+                      </m:e>
+                      <m:sup>
+                        <m:r>
+                          <a:rPr lang="en-US" altLang="zh-CN" i="1" dirty="0">
+                            <a:latin typeface="Cambria Math" panose="02040503050406030204" pitchFamily="18" charset="0"/>
+                            <a:cs typeface="Cambria Math" panose="02040503050406030204" pitchFamily="18" charset="0"/>
+                            <a:sym typeface="+mn-ea"/>
+                          </a:rPr>
+                          <m:t>𝑙</m:t>
+                        </m:r>
+                      </m:sup>
+                    </m:sSup>
+                    <m:r>
+                      <a:rPr lang="en-US" altLang="zh-CN" i="1" dirty="0">
+                        <a:latin typeface="Cambria Math" panose="02040503050406030204" pitchFamily="18" charset="0"/>
+                        <a:cs typeface="Cambria Math" panose="02040503050406030204" pitchFamily="18" charset="0"/>
+                        <a:sym typeface="+mn-ea"/>
+                      </a:rPr>
+                      <m:t>[</m:t>
+                    </m:r>
+                    <m:r>
+                      <a:rPr lang="en-US" altLang="zh-CN" i="1" dirty="0">
+                        <a:latin typeface="Cambria Math" panose="02040503050406030204" pitchFamily="18" charset="0"/>
+                        <a:cs typeface="Cambria Math" panose="02040503050406030204" pitchFamily="18" charset="0"/>
+                        <a:sym typeface="+mn-ea"/>
+                      </a:rPr>
+                      <m:t>𝑡</m:t>
+                    </m:r>
+                    <m:r>
+                      <a:rPr lang="en-US" altLang="zh-CN" i="1" dirty="0">
+                        <a:latin typeface="Cambria Math" panose="02040503050406030204" pitchFamily="18" charset="0"/>
+                        <a:cs typeface="Cambria Math" panose="02040503050406030204" pitchFamily="18" charset="0"/>
+                        <a:sym typeface="+mn-ea"/>
+                      </a:rPr>
+                      <m:t>−</m:t>
+                    </m:r>
+                    <m:r>
+                      <a:rPr lang="en-US" altLang="zh-CN" i="1" dirty="0">
+                        <a:latin typeface="Cambria Math" panose="02040503050406030204" pitchFamily="18" charset="0"/>
+                        <a:cs typeface="Cambria Math" panose="02040503050406030204" pitchFamily="18" charset="0"/>
+                        <a:sym typeface="+mn-ea"/>
+                      </a:rPr>
+                      <m:t>1</m:t>
+                    </m:r>
+                    <m:r>
+                      <a:rPr lang="en-US" altLang="zh-CN" i="1" dirty="0">
+                        <a:latin typeface="Cambria Math" panose="02040503050406030204" pitchFamily="18" charset="0"/>
+                        <a:cs typeface="Cambria Math" panose="02040503050406030204" pitchFamily="18" charset="0"/>
+                        <a:sym typeface="+mn-ea"/>
+                      </a:rPr>
+                      <m:t>]−</m:t>
+                    </m:r>
+                    <m:sSub>
+                      <m:sSubPr>
+                        <m:ctrlPr>
+                          <a:rPr lang="en-US" altLang="zh-CN" i="1" dirty="0">
+                            <a:latin typeface="Cambria Math" panose="02040503050406030204" pitchFamily="18" charset="0"/>
+                            <a:cs typeface="Cambria Math" panose="02040503050406030204" pitchFamily="18" charset="0"/>
+                            <a:sym typeface="+mn-ea"/>
+                          </a:rPr>
+                        </m:ctrlPr>
+                      </m:sSubPr>
+                      <m:e>
+                        <m:r>
+                          <a:rPr lang="en-US" altLang="zh-CN" i="1" dirty="0">
+                            <a:latin typeface="Cambria Math" panose="02040503050406030204" pitchFamily="18" charset="0"/>
+                            <a:cs typeface="Cambria Math" panose="02040503050406030204" pitchFamily="18" charset="0"/>
+                            <a:sym typeface="+mn-ea"/>
+                          </a:rPr>
+                          <m:t>𝑉</m:t>
+                        </m:r>
+                      </m:e>
+                      <m:sub>
+                        <m:r>
+                          <a:rPr lang="en-US" altLang="zh-CN" i="1" dirty="0">
+                            <a:latin typeface="Cambria Math" panose="02040503050406030204" pitchFamily="18" charset="0"/>
+                            <a:cs typeface="Cambria Math" panose="02040503050406030204" pitchFamily="18" charset="0"/>
+                            <a:sym typeface="+mn-ea"/>
+                          </a:rPr>
+                          <m:t>𝑡ℎ</m:t>
+                        </m:r>
+                      </m:sub>
+                    </m:sSub>
+                    <m:sSup>
+                      <m:sSupPr>
+                        <m:ctrlPr>
+                          <a:rPr lang="en-US" altLang="zh-CN" i="1" dirty="0">
+                            <a:latin typeface="Cambria Math" panose="02040503050406030204" pitchFamily="18" charset="0"/>
+                            <a:cs typeface="Cambria Math" panose="02040503050406030204" pitchFamily="18" charset="0"/>
+                            <a:sym typeface="+mn-ea"/>
+                          </a:rPr>
+                        </m:ctrlPr>
+                      </m:sSupPr>
+                      <m:e>
+                        <m:r>
+                          <a:rPr lang="en-US" altLang="zh-CN" i="1" dirty="0">
+                            <a:latin typeface="Cambria Math" panose="02040503050406030204" pitchFamily="18" charset="0"/>
+                            <a:cs typeface="Cambria Math" panose="02040503050406030204" pitchFamily="18" charset="0"/>
+                            <a:sym typeface="+mn-ea"/>
+                          </a:rPr>
+                          <m:t>𝑠</m:t>
+                        </m:r>
+                      </m:e>
+                      <m:sup>
+                        <m:r>
+                          <a:rPr lang="en-US" altLang="zh-CN" i="1" dirty="0">
+                            <a:latin typeface="Cambria Math" panose="02040503050406030204" pitchFamily="18" charset="0"/>
+                            <a:cs typeface="Cambria Math" panose="02040503050406030204" pitchFamily="18" charset="0"/>
+                            <a:sym typeface="+mn-ea"/>
+                          </a:rPr>
+                          <m:t>𝑙</m:t>
+                        </m:r>
+                      </m:sup>
+                    </m:sSup>
+                    <m:r>
+                      <a:rPr lang="en-US" altLang="zh-CN" i="1" dirty="0">
+                        <a:latin typeface="Cambria Math" panose="02040503050406030204" pitchFamily="18" charset="0"/>
+                        <a:cs typeface="Cambria Math" panose="02040503050406030204" pitchFamily="18" charset="0"/>
+                        <a:sym typeface="+mn-ea"/>
+                      </a:rPr>
+                      <m:t>[</m:t>
+                    </m:r>
+                    <m:r>
+                      <a:rPr lang="en-US" altLang="zh-CN" i="1" dirty="0">
+                        <a:latin typeface="Cambria Math" panose="02040503050406030204" pitchFamily="18" charset="0"/>
+                        <a:cs typeface="Cambria Math" panose="02040503050406030204" pitchFamily="18" charset="0"/>
+                        <a:sym typeface="+mn-ea"/>
+                      </a:rPr>
+                      <m:t>𝑡</m:t>
+                    </m:r>
+                    <m:r>
+                      <a:rPr lang="en-US" altLang="zh-CN" i="1" dirty="0">
+                        <a:latin typeface="Cambria Math" panose="02040503050406030204" pitchFamily="18" charset="0"/>
+                        <a:cs typeface="Cambria Math" panose="02040503050406030204" pitchFamily="18" charset="0"/>
+                        <a:sym typeface="+mn-ea"/>
+                      </a:rPr>
+                      <m:t>−</m:t>
+                    </m:r>
+                    <m:r>
+                      <a:rPr lang="en-US" altLang="zh-CN" i="1" dirty="0">
+                        <a:latin typeface="Cambria Math" panose="02040503050406030204" pitchFamily="18" charset="0"/>
+                        <a:cs typeface="Cambria Math" panose="02040503050406030204" pitchFamily="18" charset="0"/>
+                        <a:sym typeface="+mn-ea"/>
+                      </a:rPr>
+                      <m:t>1</m:t>
+                    </m:r>
+                    <m:r>
+                      <a:rPr lang="en-US" altLang="zh-CN" i="1" dirty="0">
+                        <a:latin typeface="Cambria Math" panose="02040503050406030204" pitchFamily="18" charset="0"/>
+                        <a:cs typeface="Cambria Math" panose="02040503050406030204" pitchFamily="18" charset="0"/>
+                        <a:sym typeface="+mn-ea"/>
+                      </a:rPr>
+                      <m:t>])</m:t>
+                    </m:r>
+                  </m:oMath>
+                </a14:m>
+                <a:r>
+                  <a:rPr lang="en-US" altLang="zh-CN" sz="2400" dirty="0"/>
+                  <a:t>.</a:t>
+                </a:r>
+                <a:endParaRPr lang="en-US" altLang="zh-CN" sz="2400" dirty="0"/>
+              </a:p>
+              <a:p>
+                <a:pPr marL="228600" lvl="1" algn="l">
+                  <a:spcBef>
+                    <a:spcPts val="1000"/>
+                  </a:spcBef>
+                  <a:buClrTx/>
+                  <a:buSzTx/>
+                </a:pPr>
+                <a:r>
+                  <a:rPr lang="en-US" altLang="zh-CN" sz="2800" dirty="0"/>
+                  <a:t>Core Update:</a:t>
+                </a:r>
+                <a:endParaRPr lang="en-US" altLang="zh-CN" sz="2800" dirty="0"/>
+              </a:p>
+              <a:p>
+                <a:pPr marL="0" lvl="1" algn="l">
+                  <a:spcBef>
+                    <a:spcPts val="1000"/>
+                  </a:spcBef>
+                  <a:buClrTx/>
+                  <a:buSzTx/>
+                </a:pPr>
+                <a14:m>
+                  <m:oMath xmlns:m="http://schemas.openxmlformats.org/officeDocument/2006/math">
+                    <m:sSup>
+                      <m:sSupPr>
+                        <m:ctrlPr>
+                          <a:rPr lang="en-US" altLang="zh-CN" sz="2800" i="1" dirty="0">
+                            <a:latin typeface="Cambria Math" panose="02040503050406030204" pitchFamily="18" charset="0"/>
+                            <a:cs typeface="Cambria Math" panose="02040503050406030204" pitchFamily="18" charset="0"/>
+                            <a:sym typeface="+mn-ea"/>
+                          </a:rPr>
+                        </m:ctrlPr>
+                      </m:sSupPr>
+                      <m:e>
+                        <m:acc>
+                          <m:accPr>
+                            <m:ctrlPr>
+                              <a:rPr lang="en-US" altLang="zh-CN" sz="2800" i="1" dirty="0">
+                                <a:latin typeface="Cambria Math" panose="02040503050406030204" pitchFamily="18" charset="0"/>
+                                <a:cs typeface="Cambria Math" panose="02040503050406030204" pitchFamily="18" charset="0"/>
+                                <a:sym typeface="+mn-ea"/>
+                              </a:rPr>
+                            </m:ctrlPr>
+                          </m:accPr>
+                          <m:e>
+                            <m:r>
+                              <a:rPr lang="en-US" altLang="zh-CN" sz="2800" i="1" dirty="0">
+                                <a:latin typeface="Cambria Math" panose="02040503050406030204" pitchFamily="18" charset="0"/>
+                                <a:cs typeface="Cambria Math" panose="02040503050406030204" pitchFamily="18" charset="0"/>
+                                <a:sym typeface="+mn-ea"/>
+                              </a:rPr>
+                              <m:t>𝑎</m:t>
+                            </m:r>
+                          </m:e>
+                        </m:acc>
+                      </m:e>
+                      <m:sup>
+                        <m:r>
+                          <a:rPr lang="en-US" altLang="zh-CN" sz="2800" i="1" dirty="0">
+                            <a:latin typeface="Cambria Math" panose="02040503050406030204" pitchFamily="18" charset="0"/>
+                            <a:cs typeface="Cambria Math" panose="02040503050406030204" pitchFamily="18" charset="0"/>
+                            <a:sym typeface="+mn-ea"/>
+                          </a:rPr>
+                          <m:t>𝑙</m:t>
+                        </m:r>
+                        <m:r>
+                          <a:rPr lang="en-US" altLang="zh-CN" sz="2800" i="1" dirty="0">
+                            <a:latin typeface="Cambria Math" panose="02040503050406030204" pitchFamily="18" charset="0"/>
+                            <a:cs typeface="Cambria Math" panose="02040503050406030204" pitchFamily="18" charset="0"/>
+                            <a:sym typeface="+mn-ea"/>
+                          </a:rPr>
+                          <m:t>−</m:t>
+                        </m:r>
+                        <m:r>
+                          <a:rPr lang="en-US" altLang="zh-CN" sz="2800" i="1" dirty="0">
+                            <a:latin typeface="Cambria Math" panose="02040503050406030204" pitchFamily="18" charset="0"/>
+                            <a:cs typeface="Cambria Math" panose="02040503050406030204" pitchFamily="18" charset="0"/>
+                            <a:sym typeface="+mn-ea"/>
+                          </a:rPr>
+                          <m:t>1</m:t>
+                        </m:r>
+                      </m:sup>
+                    </m:sSup>
+                    <m:r>
+                      <a:rPr lang="en-US" altLang="zh-CN" sz="2800" i="1" dirty="0">
+                        <a:latin typeface="Cambria Math" panose="02040503050406030204" pitchFamily="18" charset="0"/>
+                        <a:cs typeface="Cambria Math" panose="02040503050406030204" pitchFamily="18" charset="0"/>
+                        <a:sym typeface="+mn-ea"/>
+                      </a:rPr>
+                      <m:t>[</m:t>
+                    </m:r>
+                    <m:r>
+                      <a:rPr lang="en-US" altLang="zh-CN" sz="2800" i="1" dirty="0">
+                        <a:latin typeface="Cambria Math" panose="02040503050406030204" pitchFamily="18" charset="0"/>
+                        <a:cs typeface="Cambria Math" panose="02040503050406030204" pitchFamily="18" charset="0"/>
+                        <a:sym typeface="+mn-ea"/>
+                      </a:rPr>
+                      <m:t>𝑡</m:t>
+                    </m:r>
+                    <m:r>
+                      <a:rPr lang="en-US" altLang="zh-CN" sz="2800" i="1" dirty="0">
+                        <a:latin typeface="Cambria Math" panose="02040503050406030204" pitchFamily="18" charset="0"/>
+                        <a:cs typeface="Cambria Math" panose="02040503050406030204" pitchFamily="18" charset="0"/>
+                        <a:sym typeface="+mn-ea"/>
+                      </a:rPr>
+                      <m:t>]=</m:t>
+                    </m:r>
+                    <m:sSup>
+                      <m:sSupPr>
+                        <m:ctrlPr>
+                          <a:rPr lang="en-US" altLang="zh-CN" sz="2800" i="1" dirty="0">
+                            <a:latin typeface="Cambria Math" panose="02040503050406030204" pitchFamily="18" charset="0"/>
+                            <a:cs typeface="Cambria Math" panose="02040503050406030204" pitchFamily="18" charset="0"/>
+                            <a:sym typeface="+mn-ea"/>
+                          </a:rPr>
+                        </m:ctrlPr>
+                      </m:sSupPr>
+                      <m:e>
+                        <m:r>
+                          <a:rPr lang="en-US" altLang="zh-CN" sz="2800" i="1" dirty="0">
+                            <a:latin typeface="Cambria Math" panose="02040503050406030204" pitchFamily="18" charset="0"/>
+                            <a:cs typeface="Cambria Math" panose="02040503050406030204" pitchFamily="18" charset="0"/>
+                            <a:sym typeface="+mn-ea"/>
+                          </a:rPr>
+                          <m:t>𝑒</m:t>
+                        </m:r>
+                      </m:e>
+                      <m:sup>
+                        <m:r>
+                          <a:rPr lang="en-US" altLang="zh-CN" sz="2800" i="1" dirty="0">
+                            <a:latin typeface="Cambria Math" panose="02040503050406030204" pitchFamily="18" charset="0"/>
+                            <a:cs typeface="Cambria Math" panose="02040503050406030204" pitchFamily="18" charset="0"/>
+                            <a:sym typeface="+mn-ea"/>
+                          </a:rPr>
+                          <m:t>𝑙</m:t>
+                        </m:r>
+                        <m:r>
+                          <a:rPr lang="en-US" altLang="zh-CN" sz="2800" i="1" dirty="0">
+                            <a:latin typeface="Cambria Math" panose="02040503050406030204" pitchFamily="18" charset="0"/>
+                            <a:cs typeface="Cambria Math" panose="02040503050406030204" pitchFamily="18" charset="0"/>
+                            <a:sym typeface="+mn-ea"/>
+                          </a:rPr>
+                          <m:t>−</m:t>
+                        </m:r>
+                        <m:r>
+                          <a:rPr lang="en-US" altLang="zh-CN" sz="2800" i="1" dirty="0">
+                            <a:latin typeface="Cambria Math" panose="02040503050406030204" pitchFamily="18" charset="0"/>
+                            <a:cs typeface="Cambria Math" panose="02040503050406030204" pitchFamily="18" charset="0"/>
+                            <a:sym typeface="+mn-ea"/>
+                          </a:rPr>
+                          <m:t>1</m:t>
+                        </m:r>
+                      </m:sup>
+                    </m:sSup>
+                    <m:r>
+                      <a:rPr lang="en-US" altLang="zh-CN" sz="2800" i="1" dirty="0">
+                        <a:latin typeface="Cambria Math" panose="02040503050406030204" pitchFamily="18" charset="0"/>
+                        <a:cs typeface="Cambria Math" panose="02040503050406030204" pitchFamily="18" charset="0"/>
+                        <a:sym typeface="+mn-ea"/>
+                      </a:rPr>
+                      <m:t>[</m:t>
+                    </m:r>
+                    <m:r>
+                      <a:rPr lang="en-US" altLang="zh-CN" sz="2800" i="1" dirty="0">
+                        <a:latin typeface="Cambria Math" panose="02040503050406030204" pitchFamily="18" charset="0"/>
+                        <a:cs typeface="Cambria Math" panose="02040503050406030204" pitchFamily="18" charset="0"/>
+                        <a:sym typeface="+mn-ea"/>
+                      </a:rPr>
+                      <m:t>𝑡</m:t>
+                    </m:r>
+                    <m:r>
+                      <a:rPr lang="en-US" altLang="zh-CN" sz="2800" i="1" dirty="0">
+                        <a:latin typeface="Cambria Math" panose="02040503050406030204" pitchFamily="18" charset="0"/>
+                        <a:cs typeface="Cambria Math" panose="02040503050406030204" pitchFamily="18" charset="0"/>
+                        <a:sym typeface="+mn-ea"/>
+                      </a:rPr>
+                      <m:t>−</m:t>
+                    </m:r>
+                    <m:r>
+                      <a:rPr lang="en-US" altLang="zh-CN" sz="2800" i="1" dirty="0">
+                        <a:latin typeface="Cambria Math" panose="02040503050406030204" pitchFamily="18" charset="0"/>
+                        <a:cs typeface="Cambria Math" panose="02040503050406030204" pitchFamily="18" charset="0"/>
+                        <a:sym typeface="+mn-ea"/>
+                      </a:rPr>
+                      <m:t>1</m:t>
+                    </m:r>
+                    <m:r>
+                      <a:rPr lang="en-US" altLang="zh-CN" sz="2800" i="1" dirty="0">
+                        <a:latin typeface="Cambria Math" panose="02040503050406030204" pitchFamily="18" charset="0"/>
+                        <a:cs typeface="Cambria Math" panose="02040503050406030204" pitchFamily="18" charset="0"/>
+                        <a:sym typeface="+mn-ea"/>
+                      </a:rPr>
+                      <m:t>]⊙</m:t>
+                    </m:r>
+                    <m:sSup>
+                      <m:sSupPr>
+                        <m:ctrlPr>
+                          <a:rPr lang="en-US" altLang="zh-CN" sz="2800" i="1" dirty="0">
+                            <a:latin typeface="Cambria Math" panose="02040503050406030204" pitchFamily="18" charset="0"/>
+                            <a:cs typeface="Cambria Math" panose="02040503050406030204" pitchFamily="18" charset="0"/>
+                            <a:sym typeface="+mn-ea"/>
+                          </a:rPr>
+                        </m:ctrlPr>
+                      </m:sSupPr>
+                      <m:e>
+                        <m:acc>
+                          <m:accPr>
+                            <m:ctrlPr>
+                              <a:rPr lang="en-US" altLang="zh-CN" sz="2800" i="1" dirty="0">
+                                <a:latin typeface="Cambria Math" panose="02040503050406030204" pitchFamily="18" charset="0"/>
+                                <a:cs typeface="Cambria Math" panose="02040503050406030204" pitchFamily="18" charset="0"/>
+                                <a:sym typeface="+mn-ea"/>
+                              </a:rPr>
+                            </m:ctrlPr>
+                          </m:accPr>
+                          <m:e>
+                            <m:r>
+                              <a:rPr lang="en-US" altLang="zh-CN" sz="2800" i="1" dirty="0">
+                                <a:latin typeface="Cambria Math" panose="02040503050406030204" pitchFamily="18" charset="0"/>
+                                <a:cs typeface="Cambria Math" panose="02040503050406030204" pitchFamily="18" charset="0"/>
+                                <a:sym typeface="+mn-ea"/>
+                              </a:rPr>
+                              <m:t>𝑎</m:t>
+                            </m:r>
+                          </m:e>
+                        </m:acc>
+                      </m:e>
+                      <m:sup>
+                        <m:r>
+                          <a:rPr lang="en-US" altLang="zh-CN" sz="2800" i="1" dirty="0">
+                            <a:latin typeface="Cambria Math" panose="02040503050406030204" pitchFamily="18" charset="0"/>
+                            <a:cs typeface="Cambria Math" panose="02040503050406030204" pitchFamily="18" charset="0"/>
+                            <a:sym typeface="+mn-ea"/>
+                          </a:rPr>
+                          <m:t>𝑙</m:t>
+                        </m:r>
+                        <m:r>
+                          <a:rPr lang="en-US" altLang="zh-CN" sz="2800" i="1" dirty="0">
+                            <a:latin typeface="Cambria Math" panose="02040503050406030204" pitchFamily="18" charset="0"/>
+                            <a:cs typeface="Cambria Math" panose="02040503050406030204" pitchFamily="18" charset="0"/>
+                            <a:sym typeface="+mn-ea"/>
+                          </a:rPr>
+                          <m:t>−</m:t>
+                        </m:r>
+                        <m:r>
+                          <a:rPr lang="en-US" altLang="zh-CN" sz="2800" i="1" dirty="0">
+                            <a:latin typeface="Cambria Math" panose="02040503050406030204" pitchFamily="18" charset="0"/>
+                            <a:cs typeface="Cambria Math" panose="02040503050406030204" pitchFamily="18" charset="0"/>
+                            <a:sym typeface="+mn-ea"/>
+                          </a:rPr>
+                          <m:t>1</m:t>
+                        </m:r>
+                      </m:sup>
+                    </m:sSup>
+                    <m:r>
+                      <a:rPr lang="en-US" altLang="zh-CN" sz="2800" i="1" dirty="0">
+                        <a:latin typeface="Cambria Math" panose="02040503050406030204" pitchFamily="18" charset="0"/>
+                        <a:cs typeface="Cambria Math" panose="02040503050406030204" pitchFamily="18" charset="0"/>
+                        <a:sym typeface="+mn-ea"/>
+                      </a:rPr>
+                      <m:t>[</m:t>
+                    </m:r>
+                    <m:r>
+                      <a:rPr lang="en-US" altLang="zh-CN" sz="2800" i="1" dirty="0">
+                        <a:latin typeface="Cambria Math" panose="02040503050406030204" pitchFamily="18" charset="0"/>
+                        <a:cs typeface="Cambria Math" panose="02040503050406030204" pitchFamily="18" charset="0"/>
+                        <a:sym typeface="+mn-ea"/>
+                      </a:rPr>
+                      <m:t>𝑡</m:t>
+                    </m:r>
+                    <m:r>
+                      <a:rPr lang="en-US" altLang="zh-CN" sz="2800" i="1" dirty="0">
+                        <a:latin typeface="Cambria Math" panose="02040503050406030204" pitchFamily="18" charset="0"/>
+                        <a:cs typeface="Cambria Math" panose="02040503050406030204" pitchFamily="18" charset="0"/>
+                        <a:sym typeface="+mn-ea"/>
+                      </a:rPr>
+                      <m:t>−</m:t>
+                    </m:r>
+                    <m:r>
+                      <a:rPr lang="en-US" altLang="zh-CN" sz="2800" i="1" dirty="0">
+                        <a:latin typeface="Cambria Math" panose="02040503050406030204" pitchFamily="18" charset="0"/>
+                        <a:cs typeface="Cambria Math" panose="02040503050406030204" pitchFamily="18" charset="0"/>
+                        <a:sym typeface="+mn-ea"/>
+                      </a:rPr>
+                      <m:t>1</m:t>
+                    </m:r>
+                    <m:r>
+                      <a:rPr lang="en-US" altLang="zh-CN" sz="2800" i="1" dirty="0">
+                        <a:latin typeface="Cambria Math" panose="02040503050406030204" pitchFamily="18" charset="0"/>
+                        <a:cs typeface="Cambria Math" panose="02040503050406030204" pitchFamily="18" charset="0"/>
+                        <a:sym typeface="+mn-ea"/>
+                      </a:rPr>
+                      <m:t>]+</m:t>
+                    </m:r>
+                    <m:sSup>
+                      <m:sSupPr>
+                        <m:ctrlPr>
+                          <a:rPr lang="en-US" altLang="zh-CN" sz="2800" i="1" dirty="0">
+                            <a:latin typeface="Cambria Math" panose="02040503050406030204" pitchFamily="18" charset="0"/>
+                            <a:cs typeface="Cambria Math" panose="02040503050406030204" pitchFamily="18" charset="0"/>
+                            <a:sym typeface="+mn-ea"/>
+                          </a:rPr>
+                        </m:ctrlPr>
+                      </m:sSupPr>
+                      <m:e>
+                        <m:r>
+                          <a:rPr lang="en-US" altLang="zh-CN" sz="2800" i="1" dirty="0">
+                            <a:latin typeface="Cambria Math" panose="02040503050406030204" pitchFamily="18" charset="0"/>
+                            <a:cs typeface="Cambria Math" panose="02040503050406030204" pitchFamily="18" charset="0"/>
+                            <a:sym typeface="+mn-ea"/>
+                          </a:rPr>
+                          <m:t>𝑠</m:t>
+                        </m:r>
+                      </m:e>
+                      <m:sup>
+                        <m:r>
+                          <a:rPr lang="en-US" altLang="zh-CN" sz="2800" i="1" dirty="0">
+                            <a:latin typeface="Cambria Math" panose="02040503050406030204" pitchFamily="18" charset="0"/>
+                            <a:cs typeface="Cambria Math" panose="02040503050406030204" pitchFamily="18" charset="0"/>
+                            <a:sym typeface="+mn-ea"/>
+                          </a:rPr>
+                          <m:t>𝑙</m:t>
+                        </m:r>
+                        <m:r>
+                          <a:rPr lang="en-US" altLang="zh-CN" sz="2800" i="1" dirty="0">
+                            <a:latin typeface="Cambria Math" panose="02040503050406030204" pitchFamily="18" charset="0"/>
+                            <a:cs typeface="Cambria Math" panose="02040503050406030204" pitchFamily="18" charset="0"/>
+                            <a:sym typeface="+mn-ea"/>
+                          </a:rPr>
+                          <m:t>−</m:t>
+                        </m:r>
+                        <m:r>
+                          <a:rPr lang="en-US" altLang="zh-CN" sz="2800" i="1" dirty="0">
+                            <a:latin typeface="Cambria Math" panose="02040503050406030204" pitchFamily="18" charset="0"/>
+                            <a:cs typeface="Cambria Math" panose="02040503050406030204" pitchFamily="18" charset="0"/>
+                            <a:sym typeface="+mn-ea"/>
+                          </a:rPr>
+                          <m:t>1</m:t>
+                        </m:r>
+                      </m:sup>
+                    </m:sSup>
+                    <m:r>
+                      <a:rPr lang="en-US" altLang="zh-CN" sz="2800" i="1" dirty="0">
+                        <a:latin typeface="Cambria Math" panose="02040503050406030204" pitchFamily="18" charset="0"/>
+                        <a:cs typeface="Cambria Math" panose="02040503050406030204" pitchFamily="18" charset="0"/>
+                        <a:sym typeface="+mn-ea"/>
+                      </a:rPr>
+                      <m:t>[</m:t>
+                    </m:r>
+                    <m:r>
+                      <a:rPr lang="en-US" altLang="zh-CN" sz="2800" i="1" dirty="0">
+                        <a:latin typeface="Cambria Math" panose="02040503050406030204" pitchFamily="18" charset="0"/>
+                        <a:cs typeface="Cambria Math" panose="02040503050406030204" pitchFamily="18" charset="0"/>
+                        <a:sym typeface="+mn-ea"/>
+                      </a:rPr>
+                      <m:t>𝑡</m:t>
+                    </m:r>
+                    <m:r>
+                      <a:rPr lang="en-US" altLang="zh-CN" sz="2800" i="1" dirty="0">
+                        <a:latin typeface="Cambria Math" panose="02040503050406030204" pitchFamily="18" charset="0"/>
+                        <a:cs typeface="Cambria Math" panose="02040503050406030204" pitchFamily="18" charset="0"/>
+                        <a:sym typeface="+mn-ea"/>
+                      </a:rPr>
+                      <m:t>]</m:t>
+                    </m:r>
+                  </m:oMath>
+                </a14:m>
+                <a:endParaRPr lang="en-US" altLang="zh-CN" sz="2800" dirty="0"/>
+              </a:p>
+              <a:p>
+                <a:pPr lvl="1" algn="l">
+                  <a:spcBef>
+                    <a:spcPts val="500"/>
+                  </a:spcBef>
+                  <a:buClrTx/>
+                  <a:buSzTx/>
+                </a:pPr>
+                <a:r>
+                  <a:rPr lang="en-US" altLang="zh-CN" sz="2400" dirty="0"/>
+                  <a:t>Dynamic </a:t>
+                </a:r>
+                <a14:m>
+                  <m:oMath xmlns:m="http://schemas.openxmlformats.org/officeDocument/2006/math">
+                    <m:r>
+                      <a:rPr lang="en-US" altLang="zh-CN" sz="2400" i="1" dirty="0">
+                        <a:latin typeface="Cambria Math" panose="02040503050406030204" pitchFamily="18" charset="0"/>
+                        <a:cs typeface="Cambria Math" panose="02040503050406030204" pitchFamily="18" charset="0"/>
+                      </a:rPr>
+                      <m:t>𝑒</m:t>
+                    </m:r>
+                  </m:oMath>
+                </a14:m>
+                <a:r>
+                  <a:rPr lang="en-US" altLang="zh-CN" sz="2400" dirty="0"/>
+                  <a:t> replaces fixed </a:t>
+                </a:r>
+                <a14:m>
+                  <m:oMath xmlns:m="http://schemas.openxmlformats.org/officeDocument/2006/math">
+                    <m:r>
+                      <a:rPr lang="en-US" altLang="zh-CN" sz="2400" i="1" dirty="0">
+                        <a:latin typeface="Cambria Math" panose="02040503050406030204" pitchFamily="18" charset="0"/>
+                        <a:cs typeface="Cambria Math" panose="02040503050406030204" pitchFamily="18" charset="0"/>
+                      </a:rPr>
+                      <m:t>𝜆</m:t>
+                    </m:r>
+                  </m:oMath>
+                </a14:m>
+                <a:r>
+                  <a:rPr lang="en-US" altLang="zh-CN" sz="2400" dirty="0"/>
+                  <a:t>. Same </a:t>
+                </a:r>
+                <a14:m>
+                  <m:oMath xmlns:m="http://schemas.openxmlformats.org/officeDocument/2006/math">
+                    <m:r>
+                      <a:rPr lang="en-US" altLang="zh-CN" sz="2400" i="1" dirty="0">
+                        <a:latin typeface="Cambria Math" panose="02040503050406030204" pitchFamily="18" charset="0"/>
+                        <a:cs typeface="Cambria Math" panose="02040503050406030204" pitchFamily="18" charset="0"/>
+                      </a:rPr>
+                      <m:t>𝒪</m:t>
+                    </m:r>
+                    <m:r>
+                      <a:rPr lang="en-US" altLang="zh-CN" sz="2400" i="1" dirty="0">
+                        <a:latin typeface="Cambria Math" panose="02040503050406030204" pitchFamily="18" charset="0"/>
+                        <a:cs typeface="Cambria Math" panose="02040503050406030204" pitchFamily="18" charset="0"/>
+                      </a:rPr>
+                      <m:t>(</m:t>
+                    </m:r>
+                    <m:r>
+                      <a:rPr lang="en-US" altLang="zh-CN" sz="2400" i="1" dirty="0">
+                        <a:latin typeface="Cambria Math" panose="02040503050406030204" pitchFamily="18" charset="0"/>
+                        <a:cs typeface="Cambria Math" panose="02040503050406030204" pitchFamily="18" charset="0"/>
+                      </a:rPr>
+                      <m:t>𝑛</m:t>
+                    </m:r>
+                    <m:r>
+                      <a:rPr lang="en-US" altLang="zh-CN" sz="2400" i="1" dirty="0">
+                        <a:latin typeface="Cambria Math" panose="02040503050406030204" pitchFamily="18" charset="0"/>
+                        <a:cs typeface="Cambria Math" panose="02040503050406030204" pitchFamily="18" charset="0"/>
+                      </a:rPr>
+                      <m:t>)</m:t>
+                    </m:r>
+                  </m:oMath>
+                </a14:m>
+                <a:r>
+                  <a:rPr lang="en-US" altLang="zh-CN" sz="2400" dirty="0"/>
+                  <a:t> memory, higher accuracy.</a:t>
+                </a:r>
+                <a:endParaRPr lang="en-US" altLang="zh-CN" sz="2400" dirty="0"/>
+              </a:p>
+            </p:txBody>
+          </p:sp>
+        </mc:Choice>
+        <mc:Fallback>
+          <p:sp>
+            <p:nvSpPr>
+              <p:cNvPr id="3" name="Content Placeholder 2"/>
+              <p:cNvSpPr>
+                <a:spLocks noRot="1" noChangeAspect="1" noMove="1" noResize="1" noEditPoints="1" noAdjustHandles="1" noChangeArrowheads="1" noChangeShapeType="1" noTextEdit="1"/>
+              </p:cNvSpPr>
+              <p:nvPr>
+                <p:ph idx="1"/>
+              </p:nvPr>
+            </p:nvSpPr>
+            <p:spPr>
+              <a:blipFill rotWithShape="1">
+                <a:blip r:embed="rId1"/>
+                <a:stretch>
+                  <a:fillRect l="-4" t="-3" r="2" b="3"/>
+                </a:stretch>
+              </a:blipFill>
+            </p:spPr>
+            <p:txBody>
+              <a:bodyPr/>
+              <a:lstStyle/>
+              <a:p>
+                <a:r>
+                  <a:rPr lang="zh-CN" altLang="en-US">
+                    <a:noFill/>
+                  </a:rPr>
+                  <a:t> </a:t>
+                </a:r>
+              </a:p>
+            </p:txBody>
+          </p:sp>
+        </mc:Fallback>
+      </mc:AlternateContent>
       <p:sp>
         <p:nvSpPr>
           <p:cNvPr id="4" name="Footer Placeholder 3"/>
@@ -8306,25 +12098,867 @@
           </a:p>
         </p:txBody>
       </p:sp>
-      <p:sp>
-        <p:nvSpPr>
-          <p:cNvPr id="3" name="Content Placeholder 2"/>
-          <p:cNvSpPr>
-            <a:spLocks noGrp="1"/>
-          </p:cNvSpPr>
-          <p:nvPr>
-            <p:ph idx="1"/>
-          </p:nvPr>
-        </p:nvSpPr>
-        <p:spPr/>
-        <p:txBody>
-          <a:bodyPr/>
-          <a:lstStyle/>
-          <a:p>
-            <a:endParaRPr lang="en-US" dirty="0"/>
-          </a:p>
-        </p:txBody>
-      </p:sp>
+      <mc:AlternateContent xmlns:mc="http://schemas.openxmlformats.org/markup-compatibility/2006">
+        <mc:Choice xmlns:a14="http://schemas.microsoft.com/office/drawing/2010/main" Requires="a14">
+          <p:sp>
+            <p:nvSpPr>
+              <p:cNvPr id="3" name="Content Placeholder 2"/>
+              <p:cNvSpPr>
+                <a:spLocks noGrp="1"/>
+              </p:cNvSpPr>
+              <p:nvPr>
+                <p:ph idx="1"/>
+              </p:nvPr>
+            </p:nvSpPr>
+            <p:spPr/>
+            <p:txBody>
+              <a:bodyPr/>
+              <a:lstStyle/>
+              <a:p>
+                <a:r>
+                  <a:rPr lang="en-US" altLang="zh-CN" dirty="0"/>
+                  <a:t>Beyond Causality:</a:t>
+                </a:r>
+                <a:endParaRPr lang="en-US" altLang="zh-CN" dirty="0"/>
+              </a:p>
+              <a:p>
+                <a:pPr lvl="1"/>
+                <a:r>
+                  <a:rPr lang="en-US" altLang="zh-CN" sz="2000" dirty="0"/>
+                  <a:t>BPTT only uses causal relations (pre → post).</a:t>
+                </a:r>
+                <a:endParaRPr lang="en-US" altLang="zh-CN" sz="2000" dirty="0"/>
+              </a:p>
+              <a:p>
+                <a:pPr lvl="1"/>
+                <a:r>
+                  <a:rPr lang="en-US" altLang="zh-CN" sz="2000" dirty="0"/>
+                  <a:t>STDP can also reward synchrony (post → pre).</a:t>
+                </a:r>
+                <a:endParaRPr lang="en-US" altLang="zh-CN" sz="2000" dirty="0"/>
+              </a:p>
+              <a:p>
+                <a:pPr lvl="1"/>
+                <a:r>
+                  <a:rPr lang="en-US" altLang="zh-CN" sz="2000" dirty="0"/>
+                  <a:t>S-TLLR: learn from both.</a:t>
+                </a:r>
+                <a:endParaRPr lang="en-US" altLang="zh-CN" sz="2000" dirty="0"/>
+              </a:p>
+              <a:p>
+                <a:pPr marL="228600" lvl="1" algn="l">
+                  <a:spcBef>
+                    <a:spcPts val="1000"/>
+                  </a:spcBef>
+                  <a:buClrTx/>
+                  <a:buSzTx/>
+                </a:pPr>
+                <a:r>
+                  <a:rPr lang="en-US" altLang="zh-CN" sz="2800" dirty="0"/>
+                  <a:t>The Non-Causal Term:</a:t>
+                </a:r>
+                <a:endParaRPr lang="en-US" altLang="zh-CN" sz="2800" dirty="0"/>
+              </a:p>
+              <a:p>
+                <a:pPr lvl="1" algn="l">
+                  <a:spcBef>
+                    <a:spcPts val="500"/>
+                  </a:spcBef>
+                  <a:buClrTx/>
+                  <a:buSzTx/>
+                </a:pPr>
+                <a:r>
+                  <a:rPr lang="en-US" altLang="zh-CN" sz="2000" dirty="0"/>
+                  <a:t>Parameter </a:t>
+                </a:r>
+                <a14:m>
+                  <m:oMath xmlns:m="http://schemas.openxmlformats.org/officeDocument/2006/math">
+                    <m:sSub>
+                      <m:sSubPr>
+                        <m:ctrlPr>
+                          <a:rPr lang="en-US" altLang="zh-CN" sz="2000" i="1" dirty="0">
+                            <a:latin typeface="Cambria Math" panose="02040503050406030204" pitchFamily="18" charset="0"/>
+                            <a:cs typeface="Cambria Math" panose="02040503050406030204" pitchFamily="18" charset="0"/>
+                          </a:rPr>
+                        </m:ctrlPr>
+                      </m:sSubPr>
+                      <m:e>
+                        <m:r>
+                          <a:rPr lang="en-US" altLang="zh-CN" sz="2000" i="1" dirty="0">
+                            <a:latin typeface="Cambria Math" panose="02040503050406030204" pitchFamily="18" charset="0"/>
+                            <a:cs typeface="Cambria Math" panose="02040503050406030204" pitchFamily="18" charset="0"/>
+                          </a:rPr>
+                          <m:t>𝛼</m:t>
+                        </m:r>
+                      </m:e>
+                      <m:sub>
+                        <m:r>
+                          <a:rPr lang="en-US" altLang="zh-CN" sz="2000" i="1" dirty="0">
+                            <a:latin typeface="Cambria Math" panose="02040503050406030204" pitchFamily="18" charset="0"/>
+                            <a:cs typeface="Cambria Math" panose="02040503050406030204" pitchFamily="18" charset="0"/>
+                          </a:rPr>
+                          <m:t>𝑝𝑜𝑠𝑡</m:t>
+                        </m:r>
+                      </m:sub>
+                    </m:sSub>
+                  </m:oMath>
+                </a14:m>
+                <a:r>
+                  <a:rPr lang="en-US" altLang="zh-CN" sz="2000" dirty="0"/>
+                  <a:t>controls non-causal reward.</a:t>
+                </a:r>
+                <a:endParaRPr lang="en-US" altLang="zh-CN" sz="2000" dirty="0"/>
+              </a:p>
+              <a:p>
+                <a:pPr lvl="1" algn="l">
+                  <a:spcBef>
+                    <a:spcPts val="500"/>
+                  </a:spcBef>
+                  <a:buClrTx/>
+                  <a:buSzTx/>
+                </a:pPr>
+                <a14:m>
+                  <m:oMath xmlns:m="http://schemas.openxmlformats.org/officeDocument/2006/math">
+                    <m:sSub>
+                      <m:sSubPr>
+                        <m:ctrlPr>
+                          <a:rPr lang="en-US" altLang="zh-CN" sz="2000" i="1" dirty="0">
+                            <a:latin typeface="Cambria Math" panose="02040503050406030204" pitchFamily="18" charset="0"/>
+                            <a:cs typeface="Cambria Math" panose="02040503050406030204" pitchFamily="18" charset="0"/>
+                          </a:rPr>
+                        </m:ctrlPr>
+                      </m:sSubPr>
+                      <m:e>
+                        <m:r>
+                          <a:rPr lang="en-US" altLang="zh-CN" sz="2000" i="1" dirty="0">
+                            <a:latin typeface="Cambria Math" panose="02040503050406030204" pitchFamily="18" charset="0"/>
+                            <a:cs typeface="Cambria Math" panose="02040503050406030204" pitchFamily="18" charset="0"/>
+                          </a:rPr>
+                          <m:t>𝛼</m:t>
+                        </m:r>
+                      </m:e>
+                      <m:sub>
+                        <m:r>
+                          <a:rPr lang="en-US" altLang="zh-CN" sz="2000" i="1" dirty="0">
+                            <a:latin typeface="Cambria Math" panose="02040503050406030204" pitchFamily="18" charset="0"/>
+                            <a:cs typeface="Cambria Math" panose="02040503050406030204" pitchFamily="18" charset="0"/>
+                          </a:rPr>
+                          <m:t>𝑝𝑜𝑠𝑡</m:t>
+                        </m:r>
+                      </m:sub>
+                    </m:sSub>
+                    <m:r>
+                      <a:rPr lang="en-US" altLang="zh-CN" sz="2000" i="1" dirty="0">
+                        <a:latin typeface="Cambria Math" panose="02040503050406030204" pitchFamily="18" charset="0"/>
+                        <a:cs typeface="Cambria Math" panose="02040503050406030204" pitchFamily="18" charset="0"/>
+                      </a:rPr>
+                      <m:t>&gt;</m:t>
+                    </m:r>
+                    <m:r>
+                      <a:rPr lang="en-US" altLang="zh-CN" sz="2000" i="1" dirty="0">
+                        <a:latin typeface="Cambria Math" panose="02040503050406030204" pitchFamily="18" charset="0"/>
+                        <a:cs typeface="Cambria Math" panose="02040503050406030204" pitchFamily="18" charset="0"/>
+                      </a:rPr>
+                      <m:t>0</m:t>
+                    </m:r>
+                  </m:oMath>
+                </a14:m>
+                <a:r>
+                  <a:rPr lang="en-US" altLang="zh-CN" sz="2000" dirty="0"/>
+                  <a:t>: reward synchrony; </a:t>
+                </a:r>
+                <a14:m>
+                  <m:oMath xmlns:m="http://schemas.openxmlformats.org/officeDocument/2006/math">
+                    <m:sSub>
+                      <m:sSubPr>
+                        <m:ctrlPr>
+                          <a:rPr lang="en-US" altLang="zh-CN" sz="2000" i="1" dirty="0">
+                            <a:latin typeface="Cambria Math" panose="02040503050406030204" pitchFamily="18" charset="0"/>
+                            <a:cs typeface="Cambria Math" panose="02040503050406030204" pitchFamily="18" charset="0"/>
+                          </a:rPr>
+                        </m:ctrlPr>
+                      </m:sSubPr>
+                      <m:e>
+                        <m:r>
+                          <a:rPr lang="en-US" altLang="zh-CN" sz="2000" i="1" dirty="0">
+                            <a:latin typeface="Cambria Math" panose="02040503050406030204" pitchFamily="18" charset="0"/>
+                            <a:cs typeface="Cambria Math" panose="02040503050406030204" pitchFamily="18" charset="0"/>
+                          </a:rPr>
+                          <m:t>𝛼</m:t>
+                        </m:r>
+                      </m:e>
+                      <m:sub>
+                        <m:r>
+                          <a:rPr lang="en-US" altLang="zh-CN" sz="2000" i="1" dirty="0">
+                            <a:latin typeface="Cambria Math" panose="02040503050406030204" pitchFamily="18" charset="0"/>
+                            <a:cs typeface="Cambria Math" panose="02040503050406030204" pitchFamily="18" charset="0"/>
+                          </a:rPr>
+                          <m:t>𝑝𝑜𝑠𝑡</m:t>
+                        </m:r>
+                      </m:sub>
+                    </m:sSub>
+                    <m:r>
+                      <a:rPr lang="en-US" altLang="zh-CN" sz="2000" i="1" dirty="0">
+                        <a:latin typeface="Cambria Math" panose="02040503050406030204" pitchFamily="18" charset="0"/>
+                        <a:cs typeface="Cambria Math" panose="02040503050406030204" pitchFamily="18" charset="0"/>
+                      </a:rPr>
+                      <m:t>&lt;</m:t>
+                    </m:r>
+                    <m:r>
+                      <a:rPr lang="en-US" altLang="zh-CN" sz="2000" i="1" dirty="0">
+                        <a:latin typeface="Cambria Math" panose="02040503050406030204" pitchFamily="18" charset="0"/>
+                        <a:cs typeface="Cambria Math" panose="02040503050406030204" pitchFamily="18" charset="0"/>
+                      </a:rPr>
+                      <m:t>0</m:t>
+                    </m:r>
+                  </m:oMath>
+                </a14:m>
+                <a:r>
+                  <a:rPr lang="en-US" altLang="zh-CN" sz="2000" dirty="0"/>
+                  <a:t>: punish it.</a:t>
+                </a:r>
+                <a:endParaRPr lang="en-US" altLang="zh-CN" sz="2000" dirty="0"/>
+              </a:p>
+              <a:p>
+                <a:pPr lvl="1" algn="l">
+                  <a:spcBef>
+                    <a:spcPts val="500"/>
+                  </a:spcBef>
+                  <a:buClrTx/>
+                  <a:buSzTx/>
+                </a:pPr>
+                <a:r>
+                  <a:rPr lang="en-US" altLang="zh-CN" sz="2000" dirty="0"/>
+                  <a:t>Vision prefers causality </a:t>
+                </a:r>
+                <a14:m>
+                  <m:oMath xmlns:m="http://schemas.openxmlformats.org/officeDocument/2006/math">
+                    <m:r>
+                      <a:rPr lang="en-US" altLang="zh-CN" sz="2000" dirty="0">
+                        <a:latin typeface="Cambria Math" panose="02040503050406030204" pitchFamily="18" charset="0"/>
+                        <a:cs typeface="Cambria Math" panose="02040503050406030204" pitchFamily="18" charset="0"/>
+                      </a:rPr>
+                      <m:t>(−</m:t>
+                    </m:r>
+                    <m:r>
+                      <a:rPr lang="en-US" altLang="zh-CN" sz="2000" dirty="0">
+                        <a:latin typeface="Cambria Math" panose="02040503050406030204" pitchFamily="18" charset="0"/>
+                        <a:cs typeface="Cambria Math" panose="02040503050406030204" pitchFamily="18" charset="0"/>
+                      </a:rPr>
+                      <m:t>1</m:t>
+                    </m:r>
+                    <m:r>
+                      <a:rPr lang="en-US" altLang="zh-CN" sz="2000" dirty="0">
+                        <a:latin typeface="Cambria Math" panose="02040503050406030204" pitchFamily="18" charset="0"/>
+                        <a:cs typeface="Cambria Math" panose="02040503050406030204" pitchFamily="18" charset="0"/>
+                      </a:rPr>
+                      <m:t>)</m:t>
+                    </m:r>
+                  </m:oMath>
+                </a14:m>
+                <a:r>
+                  <a:rPr lang="en-US" altLang="zh-CN" sz="2000" dirty="0"/>
+                  <a:t>; audio prefers synchrony </a:t>
+                </a:r>
+                <a14:m>
+                  <m:oMath xmlns:m="http://schemas.openxmlformats.org/officeDocument/2006/math">
+                    <m:r>
+                      <a:rPr lang="en-US" altLang="zh-CN" sz="2000" dirty="0">
+                        <a:latin typeface="Cambria Math" panose="02040503050406030204" pitchFamily="18" charset="0"/>
+                        <a:cs typeface="Cambria Math" panose="02040503050406030204" pitchFamily="18" charset="0"/>
+                      </a:rPr>
+                      <m:t>(+</m:t>
+                    </m:r>
+                    <m:r>
+                      <a:rPr lang="en-US" altLang="zh-CN" sz="2000" dirty="0">
+                        <a:latin typeface="Cambria Math" panose="02040503050406030204" pitchFamily="18" charset="0"/>
+                        <a:cs typeface="Cambria Math" panose="02040503050406030204" pitchFamily="18" charset="0"/>
+                      </a:rPr>
+                      <m:t>1</m:t>
+                    </m:r>
+                    <m:r>
+                      <a:rPr lang="en-US" altLang="zh-CN" sz="2000" dirty="0">
+                        <a:latin typeface="Cambria Math" panose="02040503050406030204" pitchFamily="18" charset="0"/>
+                        <a:cs typeface="Cambria Math" panose="02040503050406030204" pitchFamily="18" charset="0"/>
+                      </a:rPr>
+                      <m:t>)</m:t>
+                    </m:r>
+                  </m:oMath>
+                </a14:m>
+                <a:r>
+                  <a:rPr lang="en-US" altLang="zh-CN" sz="2000" dirty="0"/>
+                  <a:t>.</a:t>
+                </a:r>
+                <a:endParaRPr lang="en-US" altLang="zh-CN" sz="2000" dirty="0"/>
+              </a:p>
+              <a:p>
+                <a:pPr marL="228600" lvl="1" algn="l">
+                  <a:spcBef>
+                    <a:spcPts val="1000"/>
+                  </a:spcBef>
+                  <a:buClrTx/>
+                  <a:buSzTx/>
+                </a:pPr>
+                <a:r>
+                  <a:rPr lang="en-US" altLang="zh-CN" sz="2800" dirty="0"/>
+                  <a:t>Key Formula:</a:t>
+                </a:r>
+                <a:endParaRPr lang="en-US" altLang="zh-CN" sz="2800" dirty="0"/>
+              </a:p>
+              <a:p>
+                <a:pPr lvl="1" algn="l">
+                  <a:spcBef>
+                    <a:spcPts val="500"/>
+                  </a:spcBef>
+                  <a:buClrTx/>
+                  <a:buSzTx/>
+                </a:pPr>
+                <a14:m>
+                  <m:oMath xmlns:m="http://schemas.openxmlformats.org/officeDocument/2006/math">
+                    <m:sSub>
+                      <m:sSubPr>
+                        <m:ctrlPr>
+                          <a:rPr lang="en-US" altLang="zh-CN" sz="2000" i="1" dirty="0">
+                            <a:latin typeface="Cambria Math" panose="02040503050406030204" pitchFamily="18" charset="0"/>
+                            <a:cs typeface="Cambria Math" panose="02040503050406030204" pitchFamily="18" charset="0"/>
+                          </a:rPr>
+                        </m:ctrlPr>
+                      </m:sSubPr>
+                      <m:e>
+                        <m:r>
+                          <a:rPr lang="en-US" altLang="zh-CN" sz="2000" i="1" dirty="0">
+                            <a:latin typeface="Cambria Math" panose="02040503050406030204" pitchFamily="18" charset="0"/>
+                            <a:cs typeface="Cambria Math" panose="02040503050406030204" pitchFamily="18" charset="0"/>
+                          </a:rPr>
+                          <m:t>𝑒</m:t>
+                        </m:r>
+                      </m:e>
+                      <m:sub>
+                        <m:r>
+                          <a:rPr lang="en-US" altLang="zh-CN" sz="2000" i="1" dirty="0">
+                            <a:latin typeface="Cambria Math" panose="02040503050406030204" pitchFamily="18" charset="0"/>
+                            <a:cs typeface="Cambria Math" panose="02040503050406030204" pitchFamily="18" charset="0"/>
+                          </a:rPr>
+                          <m:t>𝑖𝑗</m:t>
+                        </m:r>
+                      </m:sub>
+                    </m:sSub>
+                    <m:r>
+                      <a:rPr lang="en-US" altLang="zh-CN" sz="2000" i="1" dirty="0">
+                        <a:latin typeface="Cambria Math" panose="02040503050406030204" pitchFamily="18" charset="0"/>
+                        <a:ea typeface="MS Mincho" charset="0"/>
+                        <a:cs typeface="Cambria Math" panose="02040503050406030204" pitchFamily="18" charset="0"/>
+                      </a:rPr>
+                      <m:t>[</m:t>
+                    </m:r>
+                    <m:r>
+                      <a:rPr lang="en-US" altLang="zh-CN" sz="2000" i="1" dirty="0">
+                        <a:latin typeface="Cambria Math" panose="02040503050406030204" pitchFamily="18" charset="0"/>
+                        <a:cs typeface="Cambria Math" panose="02040503050406030204" pitchFamily="18" charset="0"/>
+                      </a:rPr>
+                      <m:t>𝑡</m:t>
+                    </m:r>
+                    <m:r>
+                      <a:rPr lang="en-US" altLang="zh-CN" sz="2000" i="1" dirty="0">
+                        <a:latin typeface="Cambria Math" panose="02040503050406030204" pitchFamily="18" charset="0"/>
+                        <a:ea typeface="MS Mincho" charset="0"/>
+                        <a:cs typeface="Cambria Math" panose="02040503050406030204" pitchFamily="18" charset="0"/>
+                      </a:rPr>
+                      <m:t>]=</m:t>
+                    </m:r>
+                    <m:sSub>
+                      <m:sSubPr>
+                        <m:ctrlPr>
+                          <a:rPr lang="en-US" altLang="zh-CN" sz="2000" i="1" dirty="0">
+                            <a:latin typeface="Cambria Math" panose="02040503050406030204" pitchFamily="18" charset="0"/>
+                            <a:cs typeface="Cambria Math" panose="02040503050406030204" pitchFamily="18" charset="0"/>
+                          </a:rPr>
+                        </m:ctrlPr>
+                      </m:sSubPr>
+                      <m:e>
+                        <m:r>
+                          <a:rPr lang="en-US" altLang="zh-CN" sz="2000" i="1" dirty="0">
+                            <a:latin typeface="Cambria Math" panose="02040503050406030204" pitchFamily="18" charset="0"/>
+                            <a:ea typeface="MS Mincho" charset="0"/>
+                            <a:cs typeface="Cambria Math" panose="02040503050406030204" pitchFamily="18" charset="0"/>
+                          </a:rPr>
+                          <m:t>𝛼</m:t>
+                        </m:r>
+                      </m:e>
+                      <m:sub>
+                        <m:r>
+                          <a:rPr lang="en-US" altLang="zh-CN" sz="2000" i="1" dirty="0">
+                            <a:latin typeface="Cambria Math" panose="02040503050406030204" pitchFamily="18" charset="0"/>
+                            <a:cs typeface="Cambria Math" panose="02040503050406030204" pitchFamily="18" charset="0"/>
+                          </a:rPr>
+                          <m:t>𝑝</m:t>
+                        </m:r>
+                        <m:r>
+                          <a:rPr lang="en-US" altLang="zh-CN" sz="2000" i="1" dirty="0">
+                            <a:latin typeface="Cambria Math" panose="02040503050406030204" pitchFamily="18" charset="0"/>
+                            <a:cs typeface="Cambria Math" panose="02040503050406030204" pitchFamily="18" charset="0"/>
+                          </a:rPr>
+                          <m:t>𝑟𝑒</m:t>
+                        </m:r>
+                      </m:sub>
+                    </m:sSub>
+                    <m:r>
+                      <a:rPr lang="en-US" altLang="zh-CN" sz="2000" i="1" dirty="0">
+                        <a:latin typeface="Cambria Math" panose="02040503050406030204" pitchFamily="18" charset="0"/>
+                        <a:ea typeface="MS Mincho" charset="0"/>
+                        <a:cs typeface="Cambria Math" panose="02040503050406030204" pitchFamily="18" charset="0"/>
+                      </a:rPr>
+                      <m:t>𝛹</m:t>
+                    </m:r>
+                    <m:r>
+                      <a:rPr lang="en-US" altLang="zh-CN" sz="2000" i="1" dirty="0">
+                        <a:latin typeface="Cambria Math" panose="02040503050406030204" pitchFamily="18" charset="0"/>
+                        <a:ea typeface="MS Mincho" charset="0"/>
+                        <a:cs typeface="Cambria Math" panose="02040503050406030204" pitchFamily="18" charset="0"/>
+                      </a:rPr>
+                      <m:t>(</m:t>
+                    </m:r>
+                    <m:sSub>
+                      <m:sSubPr>
+                        <m:ctrlPr>
+                          <a:rPr lang="en-US" altLang="zh-CN" sz="2000" i="1" dirty="0">
+                            <a:latin typeface="Cambria Math" panose="02040503050406030204" pitchFamily="18" charset="0"/>
+                            <a:cs typeface="Cambria Math" panose="02040503050406030204" pitchFamily="18" charset="0"/>
+                          </a:rPr>
+                        </m:ctrlPr>
+                      </m:sSubPr>
+                      <m:e>
+                        <m:r>
+                          <a:rPr lang="en-US" altLang="zh-CN" sz="2000" i="1" dirty="0">
+                            <a:latin typeface="Cambria Math" panose="02040503050406030204" pitchFamily="18" charset="0"/>
+                            <a:cs typeface="Cambria Math" panose="02040503050406030204" pitchFamily="18" charset="0"/>
+                          </a:rPr>
+                          <m:t>𝑢</m:t>
+                        </m:r>
+                      </m:e>
+                      <m:sub>
+                        <m:r>
+                          <a:rPr lang="en-US" altLang="zh-CN" sz="2000" i="1" dirty="0">
+                            <a:latin typeface="Cambria Math" panose="02040503050406030204" pitchFamily="18" charset="0"/>
+                            <a:cs typeface="Cambria Math" panose="02040503050406030204" pitchFamily="18" charset="0"/>
+                          </a:rPr>
+                          <m:t>𝑖</m:t>
+                        </m:r>
+                      </m:sub>
+                    </m:sSub>
+                    <m:r>
+                      <a:rPr lang="en-US" altLang="zh-CN" sz="2000" i="1" dirty="0">
+                        <a:latin typeface="Cambria Math" panose="02040503050406030204" pitchFamily="18" charset="0"/>
+                        <a:ea typeface="MS Mincho" charset="0"/>
+                        <a:cs typeface="Cambria Math" panose="02040503050406030204" pitchFamily="18" charset="0"/>
+                      </a:rPr>
+                      <m:t>[</m:t>
+                    </m:r>
+                    <m:r>
+                      <a:rPr lang="en-US" altLang="zh-CN" sz="2000" i="1" dirty="0">
+                        <a:latin typeface="Cambria Math" panose="02040503050406030204" pitchFamily="18" charset="0"/>
+                        <a:cs typeface="Cambria Math" panose="02040503050406030204" pitchFamily="18" charset="0"/>
+                      </a:rPr>
+                      <m:t>𝑡</m:t>
+                    </m:r>
+                    <m:r>
+                      <a:rPr lang="en-US" altLang="zh-CN" sz="2000" i="1" dirty="0">
+                        <a:latin typeface="Cambria Math" panose="02040503050406030204" pitchFamily="18" charset="0"/>
+                        <a:ea typeface="MS Mincho" charset="0"/>
+                        <a:cs typeface="Cambria Math" panose="02040503050406030204" pitchFamily="18" charset="0"/>
+                      </a:rPr>
+                      <m:t>])</m:t>
+                    </m:r>
+                    <m:r>
+                      <a:rPr lang="en-US" altLang="zh-CN" sz="2000" i="1" dirty="0">
+                        <a:latin typeface="Cambria Math" panose="02040503050406030204" pitchFamily="18" charset="0"/>
+                        <a:cs typeface="Cambria Math" panose="02040503050406030204" pitchFamily="18" charset="0"/>
+                      </a:rPr>
+                      <m:t>𝑡𝑟</m:t>
+                    </m:r>
+                    <m:r>
+                      <a:rPr lang="en-US" altLang="zh-CN" sz="2000" i="1" dirty="0">
+                        <a:latin typeface="Cambria Math" panose="02040503050406030204" pitchFamily="18" charset="0"/>
+                        <a:ea typeface="MS Mincho" charset="0"/>
+                        <a:cs typeface="Cambria Math" panose="02040503050406030204" pitchFamily="18" charset="0"/>
+                      </a:rPr>
+                      <m:t>(</m:t>
+                    </m:r>
+                    <m:sSub>
+                      <m:sSubPr>
+                        <m:ctrlPr>
+                          <a:rPr lang="en-US" altLang="zh-CN" sz="2000" i="1" dirty="0">
+                            <a:latin typeface="Cambria Math" panose="02040503050406030204" pitchFamily="18" charset="0"/>
+                            <a:cs typeface="Cambria Math" panose="02040503050406030204" pitchFamily="18" charset="0"/>
+                          </a:rPr>
+                        </m:ctrlPr>
+                      </m:sSubPr>
+                      <m:e>
+                        <m:r>
+                          <a:rPr lang="en-US" altLang="zh-CN" sz="2000" i="1" dirty="0">
+                            <a:latin typeface="Cambria Math" panose="02040503050406030204" pitchFamily="18" charset="0"/>
+                            <a:cs typeface="Cambria Math" panose="02040503050406030204" pitchFamily="18" charset="0"/>
+                          </a:rPr>
+                          <m:t>𝑥</m:t>
+                        </m:r>
+                      </m:e>
+                      <m:sub>
+                        <m:r>
+                          <a:rPr lang="en-US" altLang="zh-CN" sz="2000" i="1" dirty="0">
+                            <a:latin typeface="Cambria Math" panose="02040503050406030204" pitchFamily="18" charset="0"/>
+                            <a:cs typeface="Cambria Math" panose="02040503050406030204" pitchFamily="18" charset="0"/>
+                          </a:rPr>
+                          <m:t>𝑗</m:t>
+                        </m:r>
+                      </m:sub>
+                    </m:sSub>
+                    <m:r>
+                      <a:rPr lang="en-US" altLang="zh-CN" sz="2000" i="1" dirty="0">
+                        <a:latin typeface="Cambria Math" panose="02040503050406030204" pitchFamily="18" charset="0"/>
+                        <a:ea typeface="MS Mincho" charset="0"/>
+                        <a:cs typeface="Cambria Math" panose="02040503050406030204" pitchFamily="18" charset="0"/>
+                      </a:rPr>
+                      <m:t>)[</m:t>
+                    </m:r>
+                    <m:r>
+                      <a:rPr lang="en-US" altLang="zh-CN" sz="2000" i="1" dirty="0">
+                        <a:latin typeface="Cambria Math" panose="02040503050406030204" pitchFamily="18" charset="0"/>
+                        <a:cs typeface="Cambria Math" panose="02040503050406030204" pitchFamily="18" charset="0"/>
+                      </a:rPr>
+                      <m:t>𝑡</m:t>
+                    </m:r>
+                    <m:r>
+                      <a:rPr lang="en-US" altLang="zh-CN" sz="2000" i="1" dirty="0">
+                        <a:latin typeface="Cambria Math" panose="02040503050406030204" pitchFamily="18" charset="0"/>
+                        <a:ea typeface="MS Mincho" charset="0"/>
+                        <a:cs typeface="Cambria Math" panose="02040503050406030204" pitchFamily="18" charset="0"/>
+                      </a:rPr>
+                      <m:t>]+</m:t>
+                    </m:r>
+                    <m:sSub>
+                      <m:sSubPr>
+                        <m:ctrlPr>
+                          <a:rPr lang="en-US" altLang="zh-CN" sz="2000" i="1" dirty="0">
+                            <a:latin typeface="Cambria Math" panose="02040503050406030204" pitchFamily="18" charset="0"/>
+                            <a:cs typeface="Cambria Math" panose="02040503050406030204" pitchFamily="18" charset="0"/>
+                          </a:rPr>
+                        </m:ctrlPr>
+                      </m:sSubPr>
+                      <m:e>
+                        <m:r>
+                          <a:rPr lang="en-US" altLang="zh-CN" sz="2000" i="1" dirty="0">
+                            <a:latin typeface="Cambria Math" panose="02040503050406030204" pitchFamily="18" charset="0"/>
+                            <a:ea typeface="MS Mincho" charset="0"/>
+                            <a:cs typeface="Cambria Math" panose="02040503050406030204" pitchFamily="18" charset="0"/>
+                          </a:rPr>
+                          <m:t>𝛼</m:t>
+                        </m:r>
+                      </m:e>
+                      <m:sub>
+                        <m:r>
+                          <a:rPr lang="en-US" altLang="zh-CN" sz="2000" i="1" dirty="0">
+                            <a:latin typeface="Cambria Math" panose="02040503050406030204" pitchFamily="18" charset="0"/>
+                            <a:cs typeface="Cambria Math" panose="02040503050406030204" pitchFamily="18" charset="0"/>
+                          </a:rPr>
+                          <m:t>𝑝𝑜𝑠𝑡</m:t>
+                        </m:r>
+                      </m:sub>
+                    </m:sSub>
+                    <m:sSub>
+                      <m:sSubPr>
+                        <m:ctrlPr>
+                          <a:rPr lang="en-US" altLang="zh-CN" sz="2000" i="1" dirty="0">
+                            <a:latin typeface="Cambria Math" panose="02040503050406030204" pitchFamily="18" charset="0"/>
+                            <a:cs typeface="Cambria Math" panose="02040503050406030204" pitchFamily="18" charset="0"/>
+                          </a:rPr>
+                        </m:ctrlPr>
+                      </m:sSubPr>
+                      <m:e>
+                        <m:r>
+                          <a:rPr lang="en-US" altLang="zh-CN" sz="2000" i="1" dirty="0">
+                            <a:latin typeface="Cambria Math" panose="02040503050406030204" pitchFamily="18" charset="0"/>
+                            <a:cs typeface="Cambria Math" panose="02040503050406030204" pitchFamily="18" charset="0"/>
+                          </a:rPr>
+                          <m:t>𝑥</m:t>
+                        </m:r>
+                      </m:e>
+                      <m:sub>
+                        <m:r>
+                          <a:rPr lang="en-US" altLang="zh-CN" sz="2000" i="1" dirty="0">
+                            <a:latin typeface="Cambria Math" panose="02040503050406030204" pitchFamily="18" charset="0"/>
+                            <a:cs typeface="Cambria Math" panose="02040503050406030204" pitchFamily="18" charset="0"/>
+                          </a:rPr>
+                          <m:t>𝑗</m:t>
+                        </m:r>
+                      </m:sub>
+                    </m:sSub>
+                    <m:r>
+                      <a:rPr lang="en-US" altLang="zh-CN" sz="2000" i="1" dirty="0">
+                        <a:latin typeface="Cambria Math" panose="02040503050406030204" pitchFamily="18" charset="0"/>
+                        <a:ea typeface="MS Mincho" charset="0"/>
+                        <a:cs typeface="Cambria Math" panose="02040503050406030204" pitchFamily="18" charset="0"/>
+                      </a:rPr>
+                      <m:t>[</m:t>
+                    </m:r>
+                    <m:r>
+                      <a:rPr lang="en-US" altLang="zh-CN" sz="2000" i="1" dirty="0">
+                        <a:latin typeface="Cambria Math" panose="02040503050406030204" pitchFamily="18" charset="0"/>
+                        <a:cs typeface="Cambria Math" panose="02040503050406030204" pitchFamily="18" charset="0"/>
+                      </a:rPr>
+                      <m:t>𝑡</m:t>
+                    </m:r>
+                    <m:r>
+                      <a:rPr lang="en-US" altLang="zh-CN" sz="2000" i="1" dirty="0">
+                        <a:latin typeface="Cambria Math" panose="02040503050406030204" pitchFamily="18" charset="0"/>
+                        <a:ea typeface="MS Mincho" charset="0"/>
+                        <a:cs typeface="Cambria Math" panose="02040503050406030204" pitchFamily="18" charset="0"/>
+                      </a:rPr>
+                      <m:t>](</m:t>
+                    </m:r>
+                    <m:r>
+                      <a:rPr lang="en-US" altLang="zh-CN" sz="2000" i="1" dirty="0">
+                        <a:latin typeface="Cambria Math" panose="02040503050406030204" pitchFamily="18" charset="0"/>
+                        <a:cs typeface="Cambria Math" panose="02040503050406030204" pitchFamily="18" charset="0"/>
+                      </a:rPr>
+                      <m:t>𝑡𝑟</m:t>
+                    </m:r>
+                    <m:r>
+                      <a:rPr lang="en-US" altLang="zh-CN" sz="2000" i="1" dirty="0">
+                        <a:latin typeface="Cambria Math" panose="02040503050406030204" pitchFamily="18" charset="0"/>
+                        <a:ea typeface="MS Mincho" charset="0"/>
+                        <a:cs typeface="Cambria Math" panose="02040503050406030204" pitchFamily="18" charset="0"/>
+                      </a:rPr>
+                      <m:t>(</m:t>
+                    </m:r>
+                    <m:r>
+                      <a:rPr lang="en-US" altLang="zh-CN" sz="2000" i="1" dirty="0">
+                        <a:latin typeface="Cambria Math" panose="02040503050406030204" pitchFamily="18" charset="0"/>
+                        <a:ea typeface="MS Mincho" charset="0"/>
+                        <a:cs typeface="Cambria Math" panose="02040503050406030204" pitchFamily="18" charset="0"/>
+                      </a:rPr>
+                      <m:t>𝛹</m:t>
+                    </m:r>
+                    <m:r>
+                      <a:rPr lang="en-US" altLang="zh-CN" sz="2000" i="1" dirty="0">
+                        <a:latin typeface="Cambria Math" panose="02040503050406030204" pitchFamily="18" charset="0"/>
+                        <a:ea typeface="MS Mincho" charset="0"/>
+                        <a:cs typeface="Cambria Math" panose="02040503050406030204" pitchFamily="18" charset="0"/>
+                      </a:rPr>
+                      <m:t>(</m:t>
+                    </m:r>
+                    <m:sSub>
+                      <m:sSubPr>
+                        <m:ctrlPr>
+                          <a:rPr lang="en-US" altLang="zh-CN" sz="2000" i="1" dirty="0">
+                            <a:latin typeface="Cambria Math" panose="02040503050406030204" pitchFamily="18" charset="0"/>
+                            <a:cs typeface="Cambria Math" panose="02040503050406030204" pitchFamily="18" charset="0"/>
+                          </a:rPr>
+                        </m:ctrlPr>
+                      </m:sSubPr>
+                      <m:e>
+                        <m:r>
+                          <a:rPr lang="en-US" altLang="zh-CN" sz="2000" i="1" dirty="0">
+                            <a:latin typeface="Cambria Math" panose="02040503050406030204" pitchFamily="18" charset="0"/>
+                            <a:cs typeface="Cambria Math" panose="02040503050406030204" pitchFamily="18" charset="0"/>
+                          </a:rPr>
+                          <m:t>𝑢</m:t>
+                        </m:r>
+                      </m:e>
+                      <m:sub>
+                        <m:r>
+                          <a:rPr lang="en-US" altLang="zh-CN" sz="2000" i="1" dirty="0">
+                            <a:latin typeface="Cambria Math" panose="02040503050406030204" pitchFamily="18" charset="0"/>
+                            <a:cs typeface="Cambria Math" panose="02040503050406030204" pitchFamily="18" charset="0"/>
+                          </a:rPr>
+                          <m:t>𝑖</m:t>
+                        </m:r>
+                      </m:sub>
+                    </m:sSub>
+                    <m:r>
+                      <a:rPr lang="en-US" altLang="zh-CN" sz="2000" i="1" dirty="0">
+                        <a:latin typeface="Cambria Math" panose="02040503050406030204" pitchFamily="18" charset="0"/>
+                        <a:ea typeface="MS Mincho" charset="0"/>
+                        <a:cs typeface="Cambria Math" panose="02040503050406030204" pitchFamily="18" charset="0"/>
+                      </a:rPr>
+                      <m:t>[</m:t>
+                    </m:r>
+                    <m:r>
+                      <a:rPr lang="en-US" altLang="zh-CN" sz="2000" i="1" dirty="0">
+                        <a:latin typeface="Cambria Math" panose="02040503050406030204" pitchFamily="18" charset="0"/>
+                        <a:cs typeface="Cambria Math" panose="02040503050406030204" pitchFamily="18" charset="0"/>
+                      </a:rPr>
+                      <m:t>𝑡</m:t>
+                    </m:r>
+                    <m:r>
+                      <a:rPr lang="en-US" altLang="zh-CN" sz="2000" i="1" dirty="0">
+                        <a:latin typeface="Cambria Math" panose="02040503050406030204" pitchFamily="18" charset="0"/>
+                        <a:ea typeface="MS Mincho" charset="0"/>
+                        <a:cs typeface="Cambria Math" panose="02040503050406030204" pitchFamily="18" charset="0"/>
+                      </a:rPr>
+                      <m:t>]))−</m:t>
+                    </m:r>
+                    <m:r>
+                      <a:rPr lang="en-US" altLang="zh-CN" sz="2000" i="1" dirty="0">
+                        <a:latin typeface="Cambria Math" panose="02040503050406030204" pitchFamily="18" charset="0"/>
+                        <a:ea typeface="MS Mincho" charset="0"/>
+                        <a:cs typeface="Cambria Math" panose="02040503050406030204" pitchFamily="18" charset="0"/>
+                      </a:rPr>
+                      <m:t>𝛹</m:t>
+                    </m:r>
+                    <m:r>
+                      <a:rPr lang="en-US" altLang="zh-CN" sz="2000" i="1" dirty="0">
+                        <a:latin typeface="Cambria Math" panose="02040503050406030204" pitchFamily="18" charset="0"/>
+                        <a:ea typeface="MS Mincho" charset="0"/>
+                        <a:cs typeface="Cambria Math" panose="02040503050406030204" pitchFamily="18" charset="0"/>
+                      </a:rPr>
+                      <m:t>(</m:t>
+                    </m:r>
+                    <m:sSub>
+                      <m:sSubPr>
+                        <m:ctrlPr>
+                          <a:rPr lang="en-US" altLang="zh-CN" sz="2000" i="1" dirty="0">
+                            <a:latin typeface="Cambria Math" panose="02040503050406030204" pitchFamily="18" charset="0"/>
+                            <a:cs typeface="Cambria Math" panose="02040503050406030204" pitchFamily="18" charset="0"/>
+                          </a:rPr>
+                        </m:ctrlPr>
+                      </m:sSubPr>
+                      <m:e>
+                        <m:r>
+                          <a:rPr lang="en-US" altLang="zh-CN" sz="2000" i="1" dirty="0">
+                            <a:latin typeface="Cambria Math" panose="02040503050406030204" pitchFamily="18" charset="0"/>
+                            <a:cs typeface="Cambria Math" panose="02040503050406030204" pitchFamily="18" charset="0"/>
+                          </a:rPr>
+                          <m:t>𝑢</m:t>
+                        </m:r>
+                      </m:e>
+                      <m:sub>
+                        <m:r>
+                          <a:rPr lang="en-US" altLang="zh-CN" sz="2000" i="1" dirty="0">
+                            <a:latin typeface="Cambria Math" panose="02040503050406030204" pitchFamily="18" charset="0"/>
+                            <a:cs typeface="Cambria Math" panose="02040503050406030204" pitchFamily="18" charset="0"/>
+                          </a:rPr>
+                          <m:t>𝑖</m:t>
+                        </m:r>
+                      </m:sub>
+                    </m:sSub>
+                    <m:r>
+                      <a:rPr lang="en-US" altLang="zh-CN" sz="2000" i="1" dirty="0">
+                        <a:latin typeface="Cambria Math" panose="02040503050406030204" pitchFamily="18" charset="0"/>
+                        <a:ea typeface="MS Mincho" charset="0"/>
+                        <a:cs typeface="Cambria Math" panose="02040503050406030204" pitchFamily="18" charset="0"/>
+                      </a:rPr>
+                      <m:t>[</m:t>
+                    </m:r>
+                    <m:r>
+                      <a:rPr lang="en-US" altLang="zh-CN" sz="2000" i="1" dirty="0">
+                        <a:latin typeface="Cambria Math" panose="02040503050406030204" pitchFamily="18" charset="0"/>
+                        <a:cs typeface="Cambria Math" panose="02040503050406030204" pitchFamily="18" charset="0"/>
+                      </a:rPr>
+                      <m:t>𝑡</m:t>
+                    </m:r>
+                    <m:r>
+                      <a:rPr lang="en-US" altLang="zh-CN" sz="2000" i="1" dirty="0">
+                        <a:latin typeface="Cambria Math" panose="02040503050406030204" pitchFamily="18" charset="0"/>
+                        <a:ea typeface="MS Mincho" charset="0"/>
+                        <a:cs typeface="Cambria Math" panose="02040503050406030204" pitchFamily="18" charset="0"/>
+                      </a:rPr>
+                      <m:t>]))</m:t>
+                    </m:r>
+                  </m:oMath>
+                </a14:m>
+                <a:endParaRPr lang="en-US" altLang="zh-CN" sz="2000" i="1" dirty="0">
+                  <a:latin typeface="Cambria Math" panose="02040503050406030204" pitchFamily="18" charset="0"/>
+                  <a:ea typeface="MS Mincho" charset="0"/>
+                  <a:cs typeface="Cambria Math" panose="02040503050406030204" pitchFamily="18" charset="0"/>
+                </a:endParaRPr>
+              </a:p>
+              <a:p>
+                <a:pPr lvl="2" algn="l">
+                  <a:spcBef>
+                    <a:spcPts val="1000"/>
+                  </a:spcBef>
+                  <a:buClrTx/>
+                  <a:buSzTx/>
+                </a:pPr>
+                <a:r>
+                  <a:rPr lang="en-US" altLang="zh-CN" sz="2330" dirty="0"/>
+                  <a:t>Memory </a:t>
+                </a:r>
+                <a14:m>
+                  <m:oMath xmlns:m="http://schemas.openxmlformats.org/officeDocument/2006/math">
+                    <m:r>
+                      <a:rPr lang="en-US" altLang="zh-CN" sz="2330" i="1" dirty="0">
+                        <a:latin typeface="Cambria Math" panose="02040503050406030204" pitchFamily="18" charset="0"/>
+                        <a:cs typeface="Cambria Math" panose="02040503050406030204" pitchFamily="18" charset="0"/>
+                      </a:rPr>
+                      <m:t>𝒪</m:t>
+                    </m:r>
+                    <m:r>
+                      <a:rPr lang="en-US" altLang="zh-CN" sz="2330" i="1" dirty="0">
+                        <a:latin typeface="Cambria Math" panose="02040503050406030204" pitchFamily="18" charset="0"/>
+                        <a:cs typeface="Cambria Math" panose="02040503050406030204" pitchFamily="18" charset="0"/>
+                      </a:rPr>
+                      <m:t>(</m:t>
+                    </m:r>
+                    <m:r>
+                      <a:rPr lang="en-US" altLang="zh-CN" sz="2330" i="1" dirty="0">
+                        <a:latin typeface="Cambria Math" panose="02040503050406030204" pitchFamily="18" charset="0"/>
+                        <a:cs typeface="Cambria Math" panose="02040503050406030204" pitchFamily="18" charset="0"/>
+                      </a:rPr>
+                      <m:t>𝑛</m:t>
+                    </m:r>
+                    <m:r>
+                      <a:rPr lang="en-US" altLang="zh-CN" sz="2330" i="1" dirty="0">
+                        <a:latin typeface="Cambria Math" panose="02040503050406030204" pitchFamily="18" charset="0"/>
+                        <a:cs typeface="Cambria Math" panose="02040503050406030204" pitchFamily="18" charset="0"/>
+                      </a:rPr>
+                      <m:t>)</m:t>
+                    </m:r>
+                  </m:oMath>
+                </a14:m>
+                <a:r>
+                  <a:rPr lang="en-US" altLang="zh-CN" sz="2330" dirty="0"/>
+                  <a:t> — no extra cost for extra information.</a:t>
+                </a:r>
+                <a:endParaRPr lang="en-US" altLang="zh-CN" sz="2330" dirty="0"/>
+              </a:p>
+            </p:txBody>
+          </p:sp>
+        </mc:Choice>
+        <mc:Fallback>
+          <p:sp>
+            <p:nvSpPr>
+              <p:cNvPr id="3" name="Content Placeholder 2"/>
+              <p:cNvSpPr>
+                <a:spLocks noRot="1" noChangeAspect="1" noMove="1" noResize="1" noEditPoints="1" noAdjustHandles="1" noChangeArrowheads="1" noChangeShapeType="1" noTextEdit="1"/>
+              </p:cNvSpPr>
+              <p:nvPr>
+                <p:ph idx="1"/>
+              </p:nvPr>
+            </p:nvSpPr>
+            <p:spPr>
+              <a:blipFill rotWithShape="1">
+                <a:blip r:embed="rId1"/>
+                <a:stretch>
+                  <a:fillRect l="-4" t="-3" r="2" b="3"/>
+                </a:stretch>
+              </a:blipFill>
+            </p:spPr>
+            <p:txBody>
+              <a:bodyPr/>
+              <a:lstStyle/>
+              <a:p>
+                <a:r>
+                  <a:rPr lang="zh-CN" altLang="en-US">
+                    <a:noFill/>
+                  </a:rPr>
+                  <a:t> </a:t>
+                </a:r>
+              </a:p>
+            </p:txBody>
+          </p:sp>
+        </mc:Fallback>
+      </mc:AlternateContent>
       <p:sp>
         <p:nvSpPr>
           <p:cNvPr id="4" name="Footer Placeholder 3"/>
@@ -8435,25 +13069,584 @@
           </a:p>
         </p:txBody>
       </p:sp>
-      <p:sp>
-        <p:nvSpPr>
-          <p:cNvPr id="3" name="Content Placeholder 2"/>
-          <p:cNvSpPr>
-            <a:spLocks noGrp="1"/>
-          </p:cNvSpPr>
-          <p:nvPr>
-            <p:ph idx="1"/>
-          </p:nvPr>
-        </p:nvSpPr>
-        <p:spPr/>
-        <p:txBody>
-          <a:bodyPr/>
-          <a:lstStyle/>
-          <a:p>
-            <a:endParaRPr lang="en-US" dirty="0"/>
-          </a:p>
-        </p:txBody>
-      </p:sp>
+      <mc:AlternateContent xmlns:mc="http://schemas.openxmlformats.org/markup-compatibility/2006">
+        <mc:Choice xmlns:a14="http://schemas.microsoft.com/office/drawing/2010/main" Requires="a14">
+          <p:sp>
+            <p:nvSpPr>
+              <p:cNvPr id="3" name="Content Placeholder 2"/>
+              <p:cNvSpPr>
+                <a:spLocks noGrp="1"/>
+              </p:cNvSpPr>
+              <p:nvPr>
+                <p:ph idx="1"/>
+              </p:nvPr>
+            </p:nvSpPr>
+            <p:spPr/>
+            <p:txBody>
+              <a:bodyPr/>
+              <a:lstStyle/>
+              <a:p>
+                <a:r>
+                  <a:rPr lang="en-US" altLang="zh-CN" dirty="0"/>
+                  <a:t>The Ultimate Goal: Full Locality:</a:t>
+                </a:r>
+                <a:endParaRPr lang="en-US" altLang="zh-CN" dirty="0"/>
+              </a:p>
+              <a:p>
+                <a:pPr lvl="1"/>
+                <a:r>
+                  <a:rPr lang="en-US" altLang="zh-CN" dirty="0"/>
+                  <a:t>Previous: temporally local, but still need layer-to-layer error propagation.</a:t>
+                </a:r>
+                <a:endParaRPr lang="en-US" altLang="zh-CN" dirty="0"/>
+              </a:p>
+              <a:p>
+                <a:pPr lvl="1"/>
+                <a:r>
+                  <a:rPr lang="en-US" altLang="zh-CN" dirty="0"/>
+                  <a:t>TESS:  </a:t>
+                </a:r>
+                <a:r>
+                  <a:rPr lang="en-US" altLang="zh-CN" dirty="0"/>
+                  <a:t>Each layer can learn from its own local signal</a:t>
+                </a:r>
+                <a:endParaRPr lang="en-US" altLang="zh-CN" dirty="0"/>
+              </a:p>
+              <a:p>
+                <a:pPr marL="228600" lvl="1" algn="l">
+                  <a:spcBef>
+                    <a:spcPts val="1000"/>
+                  </a:spcBef>
+                  <a:buClrTx/>
+                  <a:buSzTx/>
+                </a:pPr>
+                <a:r>
+                  <a:rPr lang="en-US" altLang="zh-CN" sz="2800" dirty="0"/>
+                  <a:t>Two Keys:</a:t>
+                </a:r>
+                <a:endParaRPr lang="en-US" altLang="zh-CN" sz="2800" dirty="0"/>
+              </a:p>
+              <a:p>
+                <a:pPr lvl="1" algn="l">
+                  <a:spcBef>
+                    <a:spcPts val="500"/>
+                  </a:spcBef>
+                  <a:buClrTx/>
+                  <a:buSzTx/>
+                </a:pPr>
+                <a:r>
+                  <a:rPr lang="en-US" altLang="zh-CN" sz="2400" i="1" dirty="0"/>
+                  <a:t>Time locality: </a:t>
+                </a:r>
+                <a:r>
+                  <a:rPr lang="en-US" altLang="zh-CN" sz="2400" dirty="0"/>
+                  <a:t>instantaneous traces (</a:t>
+                </a:r>
+                <a14:m>
+                  <m:oMath xmlns:m="http://schemas.openxmlformats.org/officeDocument/2006/math">
+                    <m:r>
+                      <a:rPr lang="en-US" altLang="zh-CN" sz="2400" i="1" dirty="0">
+                        <a:latin typeface="Cambria Math" panose="02040503050406030204" pitchFamily="18" charset="0"/>
+                        <a:cs typeface="Cambria Math" panose="02040503050406030204" pitchFamily="18" charset="0"/>
+                      </a:rPr>
+                      <m:t>𝛽</m:t>
+                    </m:r>
+                    <m:r>
+                      <a:rPr lang="en-US" altLang="zh-CN" sz="2400" i="1" dirty="0">
+                        <a:latin typeface="Cambria Math" panose="02040503050406030204" pitchFamily="18" charset="0"/>
+                        <a:cs typeface="Cambria Math" panose="02040503050406030204" pitchFamily="18" charset="0"/>
+                      </a:rPr>
+                      <m:t>=</m:t>
+                    </m:r>
+                    <m:r>
+                      <a:rPr lang="en-US" altLang="zh-CN" sz="2400" i="1" dirty="0">
+                        <a:latin typeface="Cambria Math" panose="02040503050406030204" pitchFamily="18" charset="0"/>
+                        <a:cs typeface="Cambria Math" panose="02040503050406030204" pitchFamily="18" charset="0"/>
+                      </a:rPr>
+                      <m:t>0</m:t>
+                    </m:r>
+                  </m:oMath>
+                </a14:m>
+                <a:r>
+                  <a:rPr lang="en-US" altLang="zh-CN" sz="2400" dirty="0"/>
+                  <a:t>) — memory </a:t>
+                </a:r>
+                <a14:m>
+                  <m:oMath xmlns:m="http://schemas.openxmlformats.org/officeDocument/2006/math">
+                    <m:r>
+                      <a:rPr lang="en-US" altLang="zh-CN" sz="2400" i="1" dirty="0">
+                        <a:latin typeface="Cambria Math" panose="02040503050406030204" pitchFamily="18" charset="0"/>
+                        <a:cs typeface="Cambria Math" panose="02040503050406030204" pitchFamily="18" charset="0"/>
+                      </a:rPr>
+                      <m:t>𝒪</m:t>
+                    </m:r>
+                    <m:r>
+                      <a:rPr lang="en-US" altLang="zh-CN" sz="2400" i="1" dirty="0">
+                        <a:latin typeface="Cambria Math" panose="02040503050406030204" pitchFamily="18" charset="0"/>
+                        <a:cs typeface="Cambria Math" panose="02040503050406030204" pitchFamily="18" charset="0"/>
+                      </a:rPr>
+                      <m:t>(</m:t>
+                    </m:r>
+                    <m:r>
+                      <a:rPr lang="en-US" altLang="zh-CN" sz="2400" i="1" dirty="0">
+                        <a:latin typeface="Cambria Math" panose="02040503050406030204" pitchFamily="18" charset="0"/>
+                        <a:cs typeface="Cambria Math" panose="02040503050406030204" pitchFamily="18" charset="0"/>
+                      </a:rPr>
+                      <m:t>𝑛</m:t>
+                    </m:r>
+                    <m:r>
+                      <a:rPr lang="en-US" altLang="zh-CN" sz="2400" i="1" dirty="0">
+                        <a:latin typeface="Cambria Math" panose="02040503050406030204" pitchFamily="18" charset="0"/>
+                        <a:cs typeface="Cambria Math" panose="02040503050406030204" pitchFamily="18" charset="0"/>
+                      </a:rPr>
+                      <m:t>)</m:t>
+                    </m:r>
+                  </m:oMath>
+                </a14:m>
+                <a:r>
+                  <a:rPr lang="en-US" altLang="zh-CN" sz="2400" dirty="0"/>
+                  <a:t>.</a:t>
+                </a:r>
+                <a:endParaRPr lang="en-US" altLang="zh-CN" sz="2400" dirty="0"/>
+              </a:p>
+              <a:p>
+                <a:pPr lvl="1" algn="l">
+                  <a:spcBef>
+                    <a:spcPts val="500"/>
+                  </a:spcBef>
+                  <a:buClrTx/>
+                  <a:buSzTx/>
+                </a:pPr>
+                <a:r>
+                  <a:rPr lang="en-US" altLang="zh-CN" sz="2400" i="1" dirty="0"/>
+                  <a:t>Space locality</a:t>
+                </a:r>
+                <a:r>
+                  <a:rPr lang="en-US" altLang="zh-CN" sz="2400" dirty="0"/>
+                  <a:t>: each layer projects outputs to label space and compares locally.</a:t>
+                </a:r>
+                <a:endParaRPr lang="en-US" altLang="zh-CN" sz="2400" dirty="0"/>
+              </a:p>
+              <a:p>
+                <a:pPr lvl="1" algn="l">
+                  <a:spcBef>
+                    <a:spcPts val="500"/>
+                  </a:spcBef>
+                  <a:buClrTx/>
+                  <a:buSzTx/>
+                </a:pPr>
+                <a14:m>
+                  <m:oMath xmlns:m="http://schemas.openxmlformats.org/officeDocument/2006/math">
+                    <m:sSup>
+                      <m:sSupPr>
+                        <m:ctrlPr>
+                          <a:rPr lang="en-US" altLang="zh-CN" sz="2400" i="1" dirty="0">
+                            <a:latin typeface="Cambria Math" panose="02040503050406030204" pitchFamily="18" charset="0"/>
+                            <a:cs typeface="Cambria Math" panose="02040503050406030204" pitchFamily="18" charset="0"/>
+                          </a:rPr>
+                        </m:ctrlPr>
+                      </m:sSupPr>
+                      <m:e>
+                        <m:r>
+                          <a:rPr lang="en-US" altLang="zh-CN" sz="2400" i="1" dirty="0">
+                            <a:latin typeface="Cambria Math" panose="02040503050406030204" pitchFamily="18" charset="0"/>
+                            <a:cs typeface="Cambria Math" panose="02040503050406030204" pitchFamily="18" charset="0"/>
+                          </a:rPr>
+                          <m:t>𝑚</m:t>
+                        </m:r>
+                      </m:e>
+                      <m:sup>
+                        <m:r>
+                          <a:rPr lang="en-US" altLang="zh-CN" sz="2400" i="1" dirty="0">
+                            <a:latin typeface="Cambria Math" panose="02040503050406030204" pitchFamily="18" charset="0"/>
+                            <a:cs typeface="Cambria Math" panose="02040503050406030204" pitchFamily="18" charset="0"/>
+                          </a:rPr>
+                          <m:t>𝑙</m:t>
+                        </m:r>
+                      </m:sup>
+                    </m:sSup>
+                    <m:r>
+                      <a:rPr lang="en-US" altLang="zh-CN" sz="2400" i="1" dirty="0">
+                        <a:latin typeface="Cambria Math" panose="02040503050406030204" pitchFamily="18" charset="0"/>
+                        <a:ea typeface="MS Mincho" charset="0"/>
+                        <a:cs typeface="Cambria Math" panose="02040503050406030204" pitchFamily="18" charset="0"/>
+                      </a:rPr>
+                      <m:t>[</m:t>
+                    </m:r>
+                    <m:r>
+                      <a:rPr lang="en-US" altLang="zh-CN" sz="2400" i="1" dirty="0">
+                        <a:latin typeface="Cambria Math" panose="02040503050406030204" pitchFamily="18" charset="0"/>
+                        <a:cs typeface="Cambria Math" panose="02040503050406030204" pitchFamily="18" charset="0"/>
+                      </a:rPr>
+                      <m:t>𝑡</m:t>
+                    </m:r>
+                    <m:r>
+                      <a:rPr lang="en-US" altLang="zh-CN" sz="2400" i="1" dirty="0">
+                        <a:latin typeface="Cambria Math" panose="02040503050406030204" pitchFamily="18" charset="0"/>
+                        <a:ea typeface="MS Mincho" charset="0"/>
+                        <a:cs typeface="Cambria Math" panose="02040503050406030204" pitchFamily="18" charset="0"/>
+                      </a:rPr>
+                      <m:t>]=</m:t>
+                    </m:r>
+                    <m:sSup>
+                      <m:sSupPr>
+                        <m:ctrlPr>
+                          <a:rPr lang="en-US" altLang="zh-CN" sz="2400" i="1" dirty="0">
+                            <a:latin typeface="Cambria Math" panose="02040503050406030204" pitchFamily="18" charset="0"/>
+                            <a:cs typeface="Cambria Math" panose="02040503050406030204" pitchFamily="18" charset="0"/>
+                          </a:rPr>
+                        </m:ctrlPr>
+                      </m:sSupPr>
+                      <m:e>
+                        <m:r>
+                          <a:rPr lang="en-US" altLang="zh-CN" sz="2400" i="1" dirty="0">
+                            <a:latin typeface="Cambria Math" panose="02040503050406030204" pitchFamily="18" charset="0"/>
+                            <a:cs typeface="Cambria Math" panose="02040503050406030204" pitchFamily="18" charset="0"/>
+                          </a:rPr>
+                          <m:t>𝐵</m:t>
+                        </m:r>
+                      </m:e>
+                      <m:sup>
+                        <m:r>
+                          <a:rPr lang="en-US" altLang="zh-CN" sz="2400" i="1" dirty="0">
+                            <a:latin typeface="Cambria Math" panose="02040503050406030204" pitchFamily="18" charset="0"/>
+                            <a:cs typeface="Cambria Math" panose="02040503050406030204" pitchFamily="18" charset="0"/>
+                          </a:rPr>
+                          <m:t>𝑙</m:t>
+                        </m:r>
+                        <m:r>
+                          <a:rPr lang="en-US" altLang="zh-CN" sz="2400" i="1" dirty="0">
+                            <a:latin typeface="Cambria Math" panose="02040503050406030204" pitchFamily="18" charset="0"/>
+                            <a:ea typeface="MS Mincho" charset="0"/>
+                            <a:cs typeface="Cambria Math" panose="02040503050406030204" pitchFamily="18" charset="0"/>
+                          </a:rPr>
+                          <m:t>⊤</m:t>
+                        </m:r>
+                      </m:sup>
+                    </m:sSup>
+                    <m:r>
+                      <a:rPr lang="en-US" altLang="zh-CN" sz="2400" i="1" dirty="0">
+                        <a:latin typeface="Cambria Math" panose="02040503050406030204" pitchFamily="18" charset="0"/>
+                        <a:ea typeface="MS Mincho" charset="0"/>
+                        <a:cs typeface="Cambria Math" panose="02040503050406030204" pitchFamily="18" charset="0"/>
+                      </a:rPr>
+                      <m:t>(</m:t>
+                    </m:r>
+                    <m:r>
+                      <a:rPr lang="en-US" altLang="zh-CN" sz="2400" i="1" dirty="0">
+                        <a:latin typeface="Cambria Math" panose="02040503050406030204" pitchFamily="18" charset="0"/>
+                        <a:cs typeface="Cambria Math" panose="02040503050406030204" pitchFamily="18" charset="0"/>
+                      </a:rPr>
+                      <m:t>𝑓</m:t>
+                    </m:r>
+                    <m:r>
+                      <a:rPr lang="en-US" altLang="zh-CN" sz="2400" i="1" dirty="0">
+                        <a:latin typeface="Cambria Math" panose="02040503050406030204" pitchFamily="18" charset="0"/>
+                        <a:ea typeface="MS Mincho" charset="0"/>
+                        <a:cs typeface="Cambria Math" panose="02040503050406030204" pitchFamily="18" charset="0"/>
+                      </a:rPr>
+                      <m:t>(</m:t>
+                    </m:r>
+                    <m:sSup>
+                      <m:sSupPr>
+                        <m:ctrlPr>
+                          <a:rPr lang="en-US" altLang="zh-CN" sz="2400" i="1" dirty="0">
+                            <a:latin typeface="Cambria Math" panose="02040503050406030204" pitchFamily="18" charset="0"/>
+                            <a:cs typeface="Cambria Math" panose="02040503050406030204" pitchFamily="18" charset="0"/>
+                          </a:rPr>
+                        </m:ctrlPr>
+                      </m:sSupPr>
+                      <m:e>
+                        <m:r>
+                          <a:rPr lang="en-US" altLang="zh-CN" sz="2400" i="1" dirty="0">
+                            <a:latin typeface="Cambria Math" panose="02040503050406030204" pitchFamily="18" charset="0"/>
+                            <a:cs typeface="Cambria Math" panose="02040503050406030204" pitchFamily="18" charset="0"/>
+                          </a:rPr>
+                          <m:t>𝐵</m:t>
+                        </m:r>
+                      </m:e>
+                      <m:sup>
+                        <m:r>
+                          <a:rPr lang="en-US" altLang="zh-CN" sz="2400" i="1" dirty="0">
+                            <a:latin typeface="Cambria Math" panose="02040503050406030204" pitchFamily="18" charset="0"/>
+                            <a:cs typeface="Cambria Math" panose="02040503050406030204" pitchFamily="18" charset="0"/>
+                          </a:rPr>
+                          <m:t>𝑙</m:t>
+                        </m:r>
+                      </m:sup>
+                    </m:sSup>
+                    <m:sSup>
+                      <m:sSupPr>
+                        <m:ctrlPr>
+                          <a:rPr lang="en-US" altLang="zh-CN" sz="2400" i="1" dirty="0">
+                            <a:latin typeface="Cambria Math" panose="02040503050406030204" pitchFamily="18" charset="0"/>
+                            <a:cs typeface="Cambria Math" panose="02040503050406030204" pitchFamily="18" charset="0"/>
+                          </a:rPr>
+                        </m:ctrlPr>
+                      </m:sSupPr>
+                      <m:e>
+                        <m:r>
+                          <a:rPr lang="en-US" altLang="zh-CN" sz="2400" i="1" dirty="0">
+                            <a:latin typeface="Cambria Math" panose="02040503050406030204" pitchFamily="18" charset="0"/>
+                            <a:cs typeface="Cambria Math" panose="02040503050406030204" pitchFamily="18" charset="0"/>
+                          </a:rPr>
+                          <m:t>𝑜</m:t>
+                        </m:r>
+                      </m:e>
+                      <m:sup>
+                        <m:r>
+                          <a:rPr lang="en-US" altLang="zh-CN" sz="2400" i="1" dirty="0">
+                            <a:latin typeface="Cambria Math" panose="02040503050406030204" pitchFamily="18" charset="0"/>
+                            <a:cs typeface="Cambria Math" panose="02040503050406030204" pitchFamily="18" charset="0"/>
+                          </a:rPr>
+                          <m:t>𝑙</m:t>
+                        </m:r>
+                      </m:sup>
+                    </m:sSup>
+                    <m:r>
+                      <a:rPr lang="en-US" altLang="zh-CN" sz="2400" i="1" dirty="0">
+                        <a:latin typeface="Cambria Math" panose="02040503050406030204" pitchFamily="18" charset="0"/>
+                        <a:ea typeface="MS Mincho" charset="0"/>
+                        <a:cs typeface="Cambria Math" panose="02040503050406030204" pitchFamily="18" charset="0"/>
+                      </a:rPr>
+                      <m:t>[</m:t>
+                    </m:r>
+                    <m:r>
+                      <a:rPr lang="en-US" altLang="zh-CN" sz="2400" i="1" dirty="0">
+                        <a:latin typeface="Cambria Math" panose="02040503050406030204" pitchFamily="18" charset="0"/>
+                        <a:cs typeface="Cambria Math" panose="02040503050406030204" pitchFamily="18" charset="0"/>
+                      </a:rPr>
+                      <m:t>𝑡</m:t>
+                    </m:r>
+                    <m:r>
+                      <a:rPr lang="en-US" altLang="zh-CN" sz="2400" i="1" dirty="0">
+                        <a:latin typeface="Cambria Math" panose="02040503050406030204" pitchFamily="18" charset="0"/>
+                        <a:ea typeface="MS Mincho" charset="0"/>
+                        <a:cs typeface="Cambria Math" panose="02040503050406030204" pitchFamily="18" charset="0"/>
+                      </a:rPr>
+                      <m:t>])−</m:t>
+                    </m:r>
+                    <m:sSup>
+                      <m:sSupPr>
+                        <m:ctrlPr>
+                          <a:rPr lang="en-US" altLang="zh-CN" sz="2400" i="1" dirty="0">
+                            <a:latin typeface="Cambria Math" panose="02040503050406030204" pitchFamily="18" charset="0"/>
+                            <a:cs typeface="Cambria Math" panose="02040503050406030204" pitchFamily="18" charset="0"/>
+                          </a:rPr>
+                        </m:ctrlPr>
+                      </m:sSupPr>
+                      <m:e>
+                        <m:r>
+                          <a:rPr lang="en-US" altLang="zh-CN" sz="2400" i="1" dirty="0">
+                            <a:latin typeface="Cambria Math" panose="02040503050406030204" pitchFamily="18" charset="0"/>
+                            <a:cs typeface="Cambria Math" panose="02040503050406030204" pitchFamily="18" charset="0"/>
+                          </a:rPr>
+                          <m:t>𝑦</m:t>
+                        </m:r>
+                      </m:e>
+                      <m:sup>
+                        <m:r>
+                          <a:rPr lang="en-US" altLang="zh-CN" sz="2400" i="1" dirty="0">
+                            <a:latin typeface="Cambria Math" panose="02040503050406030204" pitchFamily="18" charset="0"/>
+                            <a:ea typeface="MS Mincho" charset="0"/>
+                            <a:cs typeface="Cambria Math" panose="02040503050406030204" pitchFamily="18" charset="0"/>
+                          </a:rPr>
+                          <m:t>∗</m:t>
+                        </m:r>
+                      </m:sup>
+                    </m:sSup>
+                    <m:r>
+                      <a:rPr lang="en-US" altLang="zh-CN" sz="2400" i="1" dirty="0">
+                        <a:latin typeface="Cambria Math" panose="02040503050406030204" pitchFamily="18" charset="0"/>
+                        <a:ea typeface="MS Mincho" charset="0"/>
+                        <a:cs typeface="Cambria Math" panose="02040503050406030204" pitchFamily="18" charset="0"/>
+                      </a:rPr>
+                      <m:t>), </m:t>
+                    </m:r>
+                    <m:r>
+                      <a:rPr lang="en-US" altLang="zh-CN" sz="2400" i="1" dirty="0">
+                        <a:latin typeface="Cambria Math" panose="02040503050406030204" pitchFamily="18" charset="0"/>
+                        <a:ea typeface="MS Mincho" charset="0"/>
+                        <a:cs typeface="Cambria Math" panose="02040503050406030204" pitchFamily="18" charset="0"/>
+                      </a:rPr>
+                      <m:t>𝛥</m:t>
+                    </m:r>
+                    <m:sSup>
+                      <m:sSupPr>
+                        <m:ctrlPr>
+                          <a:rPr lang="en-US" altLang="zh-CN" sz="2400" i="1" dirty="0">
+                            <a:latin typeface="Cambria Math" panose="02040503050406030204" pitchFamily="18" charset="0"/>
+                            <a:cs typeface="Cambria Math" panose="02040503050406030204" pitchFamily="18" charset="0"/>
+                          </a:rPr>
+                        </m:ctrlPr>
+                      </m:sSupPr>
+                      <m:e>
+                        <m:r>
+                          <a:rPr lang="en-US" altLang="zh-CN" sz="2400" i="1" dirty="0">
+                            <a:latin typeface="Cambria Math" panose="02040503050406030204" pitchFamily="18" charset="0"/>
+                            <a:cs typeface="Cambria Math" panose="02040503050406030204" pitchFamily="18" charset="0"/>
+                          </a:rPr>
+                          <m:t>𝑊</m:t>
+                        </m:r>
+                      </m:e>
+                      <m:sup>
+                        <m:r>
+                          <a:rPr lang="en-US" altLang="zh-CN" sz="2400" i="1" dirty="0">
+                            <a:latin typeface="Cambria Math" panose="02040503050406030204" pitchFamily="18" charset="0"/>
+                            <a:cs typeface="Cambria Math" panose="02040503050406030204" pitchFamily="18" charset="0"/>
+                          </a:rPr>
+                          <m:t>𝑙</m:t>
+                        </m:r>
+                      </m:sup>
+                    </m:sSup>
+                    <m:r>
+                      <a:rPr lang="en-US" altLang="zh-CN" sz="2400" i="1" dirty="0">
+                        <a:latin typeface="Cambria Math" panose="02040503050406030204" pitchFamily="18" charset="0"/>
+                        <a:ea typeface="MS Mincho" charset="0"/>
+                        <a:cs typeface="Cambria Math" panose="02040503050406030204" pitchFamily="18" charset="0"/>
+                      </a:rPr>
+                      <m:t>[</m:t>
+                    </m:r>
+                    <m:r>
+                      <a:rPr lang="en-US" altLang="zh-CN" sz="2400" i="1" dirty="0">
+                        <a:latin typeface="Cambria Math" panose="02040503050406030204" pitchFamily="18" charset="0"/>
+                        <a:cs typeface="Cambria Math" panose="02040503050406030204" pitchFamily="18" charset="0"/>
+                      </a:rPr>
+                      <m:t>𝑡</m:t>
+                    </m:r>
+                    <m:r>
+                      <a:rPr lang="en-US" altLang="zh-CN" sz="2400" i="1" dirty="0">
+                        <a:latin typeface="Cambria Math" panose="02040503050406030204" pitchFamily="18" charset="0"/>
+                        <a:ea typeface="MS Mincho" charset="0"/>
+                        <a:cs typeface="Cambria Math" panose="02040503050406030204" pitchFamily="18" charset="0"/>
+                      </a:rPr>
+                      <m:t>]=</m:t>
+                    </m:r>
+                    <m:sSup>
+                      <m:sSupPr>
+                        <m:ctrlPr>
+                          <a:rPr lang="en-US" altLang="zh-CN" sz="2400" i="1" dirty="0">
+                            <a:latin typeface="Cambria Math" panose="02040503050406030204" pitchFamily="18" charset="0"/>
+                            <a:cs typeface="Cambria Math" panose="02040503050406030204" pitchFamily="18" charset="0"/>
+                          </a:rPr>
+                        </m:ctrlPr>
+                      </m:sSupPr>
+                      <m:e>
+                        <m:r>
+                          <a:rPr lang="en-US" altLang="zh-CN" sz="2400" i="1" dirty="0">
+                            <a:latin typeface="Cambria Math" panose="02040503050406030204" pitchFamily="18" charset="0"/>
+                            <a:cs typeface="Cambria Math" panose="02040503050406030204" pitchFamily="18" charset="0"/>
+                          </a:rPr>
+                          <m:t>𝑚</m:t>
+                        </m:r>
+                      </m:e>
+                      <m:sup>
+                        <m:r>
+                          <a:rPr lang="en-US" altLang="zh-CN" sz="2400" i="1" dirty="0">
+                            <a:latin typeface="Cambria Math" panose="02040503050406030204" pitchFamily="18" charset="0"/>
+                            <a:cs typeface="Cambria Math" panose="02040503050406030204" pitchFamily="18" charset="0"/>
+                          </a:rPr>
+                          <m:t>𝑙</m:t>
+                        </m:r>
+                      </m:sup>
+                    </m:sSup>
+                    <m:r>
+                      <a:rPr lang="en-US" altLang="zh-CN" sz="2400" i="1" dirty="0">
+                        <a:latin typeface="Cambria Math" panose="02040503050406030204" pitchFamily="18" charset="0"/>
+                        <a:ea typeface="MS Mincho" charset="0"/>
+                        <a:cs typeface="Cambria Math" panose="02040503050406030204" pitchFamily="18" charset="0"/>
+                      </a:rPr>
+                      <m:t>[</m:t>
+                    </m:r>
+                    <m:r>
+                      <a:rPr lang="en-US" altLang="zh-CN" sz="2400" i="1" dirty="0">
+                        <a:latin typeface="Cambria Math" panose="02040503050406030204" pitchFamily="18" charset="0"/>
+                        <a:cs typeface="Cambria Math" panose="02040503050406030204" pitchFamily="18" charset="0"/>
+                      </a:rPr>
+                      <m:t>𝑡</m:t>
+                    </m:r>
+                    <m:r>
+                      <a:rPr lang="en-US" altLang="zh-CN" sz="2400" i="1" dirty="0">
+                        <a:latin typeface="Cambria Math" panose="02040503050406030204" pitchFamily="18" charset="0"/>
+                        <a:ea typeface="MS Mincho" charset="0"/>
+                        <a:cs typeface="Cambria Math" panose="02040503050406030204" pitchFamily="18" charset="0"/>
+                      </a:rPr>
+                      <m:t>]⊙[</m:t>
+                    </m:r>
+                    <m:r>
+                      <a:rPr lang="en-US" altLang="zh-CN" sz="2400" i="1" dirty="0">
+                        <a:latin typeface="Cambria Math" panose="02040503050406030204" pitchFamily="18" charset="0"/>
+                        <a:cs typeface="Cambria Math" panose="02040503050406030204" pitchFamily="18" charset="0"/>
+                      </a:rPr>
+                      <m:t>𝑡𝑟𝑎𝑐𝑒𝑠</m:t>
+                    </m:r>
+                    <m:r>
+                      <a:rPr lang="en-US" altLang="zh-CN" sz="2400" i="1" dirty="0">
+                        <a:latin typeface="Cambria Math" panose="02040503050406030204" pitchFamily="18" charset="0"/>
+                        <a:ea typeface="MS Mincho" charset="0"/>
+                        <a:cs typeface="Cambria Math" panose="02040503050406030204" pitchFamily="18" charset="0"/>
+                      </a:rPr>
+                      <m:t>]</m:t>
+                    </m:r>
+                  </m:oMath>
+                </a14:m>
+                <a:endParaRPr lang="en-US" altLang="zh-CN" sz="2400" i="1" dirty="0">
+                  <a:latin typeface="Cambria Math" panose="02040503050406030204" pitchFamily="18" charset="0"/>
+                  <a:ea typeface="MS Mincho" charset="0"/>
+                  <a:cs typeface="Cambria Math" panose="02040503050406030204" pitchFamily="18" charset="0"/>
+                </a:endParaRPr>
+              </a:p>
+              <a:p>
+                <a:pPr lvl="1" algn="l">
+                  <a:spcBef>
+                    <a:spcPts val="500"/>
+                  </a:spcBef>
+                  <a:buClrTx/>
+                  <a:buSzTx/>
+                </a:pPr>
+                <a:r>
+                  <a:rPr lang="en-US" altLang="zh-CN" sz="2400" dirty="0"/>
+                  <a:t>No layer-to-layer propagation. Fully parallel.</a:t>
+                </a:r>
+                <a:endParaRPr lang="en-US" altLang="zh-CN" sz="2400" dirty="0"/>
+              </a:p>
+            </p:txBody>
+          </p:sp>
+        </mc:Choice>
+        <mc:Fallback>
+          <p:sp>
+            <p:nvSpPr>
+              <p:cNvPr id="3" name="Content Placeholder 2"/>
+              <p:cNvSpPr>
+                <a:spLocks noRot="1" noChangeAspect="1" noMove="1" noResize="1" noEditPoints="1" noAdjustHandles="1" noChangeArrowheads="1" noChangeShapeType="1" noTextEdit="1"/>
+              </p:cNvSpPr>
+              <p:nvPr>
+                <p:ph idx="1"/>
+              </p:nvPr>
+            </p:nvSpPr>
+            <p:spPr>
+              <a:blipFill rotWithShape="1">
+                <a:blip r:embed="rId1"/>
+                <a:stretch>
+                  <a:fillRect l="-4" t="-3" r="2" b="3"/>
+                </a:stretch>
+              </a:blipFill>
+            </p:spPr>
+            <p:txBody>
+              <a:bodyPr/>
+              <a:lstStyle/>
+              <a:p>
+                <a:r>
+                  <a:rPr lang="zh-CN" altLang="en-US">
+                    <a:noFill/>
+                  </a:rPr>
+                  <a:t> </a:t>
+                </a:r>
+              </a:p>
+            </p:txBody>
+          </p:sp>
+        </mc:Fallback>
+      </mc:AlternateContent>
       <p:sp>
         <p:nvSpPr>
           <p:cNvPr id="4" name="Footer Placeholder 3"/>
@@ -8562,7 +13755,49 @@
           <a:bodyPr/>
           <a:lstStyle/>
           <a:p>
-            <a:endParaRPr dirty="0"/>
+            <a:r>
+              <a:rPr lang="en-US" altLang="zh-CN" dirty="0"/>
+              <a:t>Exact vs. Approximate: </a:t>
+            </a:r>
+            <a:endParaRPr lang="en-US" altLang="zh-CN" dirty="0"/>
+          </a:p>
+          <a:p>
+            <a:pPr lvl="1"/>
+            <a:r>
+              <a:rPr lang="en-US" altLang="zh-CN" dirty="0"/>
+              <a:t>RTRL is exact but expensive. OTTT/TESS are approximate but efficient. When would you choose each?</a:t>
+            </a:r>
+            <a:endParaRPr lang="en-US" altLang="zh-CN" dirty="0"/>
+          </a:p>
+          <a:p>
+            <a:r>
+              <a:rPr lang="en-US" altLang="zh-CN" dirty="0"/>
+              <a:t>Biology-Inspired vs. Performance: </a:t>
+            </a:r>
+            <a:endParaRPr lang="en-US" altLang="zh-CN" dirty="0"/>
+          </a:p>
+          <a:p>
+            <a:pPr lvl="1"/>
+            <a:r>
+              <a:rPr lang="en-US" altLang="zh-CN" dirty="0"/>
+              <a:t>e-prop and S-TLLR incorporate biological mechanisms. Do these help performance, or are they just constraints?</a:t>
+            </a:r>
+            <a:endParaRPr lang="en-US" altLang="zh-CN" dirty="0"/>
+          </a:p>
+          <a:p>
+            <a:r>
+              <a:rPr lang="en-US" altLang="zh-CN" dirty="0"/>
+              <a:t>The Future of Local Learning: </a:t>
+            </a:r>
+            <a:endParaRPr lang="en-US" altLang="zh-CN" dirty="0"/>
+          </a:p>
+          <a:p>
+            <a:pPr lvl="1"/>
+            <a:r>
+              <a:rPr lang="en-US" altLang="zh-CN" dirty="0"/>
+              <a:t>TESS proves full locality is possible. Can it scale to ImageNet-level tasks?</a:t>
+            </a:r>
+            <a:endParaRPr lang="en-US" altLang="zh-CN" dirty="0"/>
           </a:p>
         </p:txBody>
       </p:sp>
@@ -8667,12 +13902,65 @@
             <p:ph idx="1"/>
           </p:nvPr>
         </p:nvSpPr>
-        <p:spPr/>
-        <p:txBody>
-          <a:bodyPr/>
+        <p:spPr>
+          <a:xfrm>
+            <a:off x="193675" y="1090295"/>
+            <a:ext cx="11805285" cy="5428615"/>
+          </a:xfrm>
+        </p:spPr>
+        <p:txBody>
+          <a:bodyPr>
+            <a:normAutofit fontScale="80000"/>
+          </a:bodyPr>
           <a:lstStyle/>
           <a:p>
-            <a:endParaRPr dirty="0"/>
+            <a:r>
+              <a:rPr lang="en-US" altLang="zh-CN" dirty="0"/>
+              <a:t>Shared Foundation: All algorithms follow the same principle — a learning signal meets an eligibility trace. The difference lies in how each algorithm obtains these two signals.</a:t>
+            </a:r>
+            <a:endParaRPr lang="en-US" altLang="zh-CN" dirty="0"/>
+          </a:p>
+          <a:p>
+            <a:r>
+              <a:rPr lang="en-US" altLang="zh-CN" dirty="0"/>
+              <a:t>RTRL (1989): The first online gradient algorithm. Exact but incredibly expensive — requires tracking sensitivity for every weight-output pair.</a:t>
+            </a:r>
+            <a:endParaRPr lang="en-US" altLang="zh-CN" dirty="0"/>
+          </a:p>
+          <a:p>
+            <a:r>
+              <a:rPr lang="en-US" altLang="zh-CN" dirty="0"/>
+              <a:t>e-prop (2020): Added biological plausibility through slow ALIF neurons. These variables carry information across long time spans.</a:t>
+            </a:r>
+            <a:endParaRPr lang="en-US" altLang="zh-CN" dirty="0"/>
+          </a:p>
+          <a:p>
+            <a:r>
+              <a:rPr lang="en-US" altLang="zh-CN" dirty="0"/>
+              <a:t>OTTT (2022): Discovered that most of BPTT's temporal complexity can be safely ignored. The remaining part is just exponential decay. Memory becomes independent of sequence length.</a:t>
+            </a:r>
+            <a:endParaRPr lang="en-US" altLang="zh-CN" dirty="0"/>
+          </a:p>
+          <a:p>
+            <a:r>
+              <a:rPr lang="en-US" altLang="zh-CN" dirty="0"/>
+              <a:t>NDOT (2024): Replaced OTTT's fixed decay with a dynamic one based on actual neuron states. More accurate credit assignment with the same low memory.</a:t>
+            </a:r>
+            <a:endParaRPr lang="en-US" altLang="zh-CN" dirty="0"/>
+          </a:p>
+          <a:p>
+            <a:r>
+              <a:rPr lang="en-US" altLang="zh-CN" dirty="0"/>
+              <a:t>S-TLLR (2025): Broke BPTT's causality-only assumption. Added non-causal STDP terms. Different tasks prefer different settings — vision likes causality, audio likes synchrony.</a:t>
+            </a:r>
+            <a:endParaRPr lang="en-US" altLang="zh-CN" dirty="0"/>
+          </a:p>
+          <a:p>
+            <a:r>
+              <a:rPr lang="en-US" altLang="zh-CN" dirty="0"/>
+              <a:t>TESS (2025): The ultimate goal achieved. No layer-to-layer error propagation. Each layer learns from locally generated signals. Fully parallelizable and hardware-friendly.</a:t>
+            </a:r>
+            <a:endParaRPr lang="en-US" altLang="zh-CN" dirty="0"/>
           </a:p>
         </p:txBody>
       </p:sp>
